--- a/pitch/sentinelle_aerienne_presentation_complete.pptx
+++ b/pitch/sentinelle_aerienne_presentation_complete.pptx
@@ -28,9 +28,10 @@
     <p:sldId id="276" r:id="rId22"/>
     <p:sldId id="277" r:id="rId23"/>
     <p:sldId id="278" r:id="rId24"/>
+    <p:sldId id="279" r:id="rId25"/>
   </p:sldIdLst>
   <p:notesMasterIdLst>
-    <p:notesMasterId r:id="rId25"/>
+    <p:notesMasterId r:id="rId26"/>
   </p:notesMasterIdLst>
   <p:sldSz cx="12192000" cy="6858000"/>
   <p:notesSz cx="6858000" cy="12192000"/>
@@ -129,13 +130,13 @@
   <p:extLst>
     <p:ext uri="{521415D9-36F7-43E2-AB2F-B90AF26B5E84}">
       <p14:sectionLst xmlns:p14="http://schemas.microsoft.com/office/powerpoint/2010/main">
-        <p14:section name="Introduction" id="{273c15bf-96be-f8bd-d801-105f9d3185f2}">
+        <p14:section name="Introduction" id="{710749be-2704-a678-193e-16f0fd95b5b6}">
           <p14:sldIdLst>
             <p14:sldId id="256"/>
             <p14:sldId id="257"/>
           </p14:sldIdLst>
         </p14:section>
-        <p14:section name="Le drone" id="{34898e6f-f9e9-c4ed-f2d9-ae8a49f5600d}">
+        <p14:section name="Le drone" id="{1524fc86-00ae-fb5d-0b15-0ba155d9a802}">
           <p14:sldIdLst>
             <p14:sldId id="258"/>
             <p14:sldId id="259"/>
@@ -144,7 +145,7 @@
             <p14:sldId id="262"/>
           </p14:sldIdLst>
         </p14:section>
-        <p14:section name="Technologies" id="{997727b8-940d-5ba8-f572-cdb1ce31145f}">
+        <p14:section name="Technologies" id="{c8a0d6fc-d81c-8ba8-c23b-5375ccf56e4c}">
           <p14:sldIdLst>
             <p14:sldId id="263"/>
             <p14:sldId id="264"/>
@@ -154,30 +155,31 @@
             <p14:sldId id="268"/>
             <p14:sldId id="269"/>
             <p14:sldId id="270"/>
+            <p14:sldId id="271"/>
           </p14:sldIdLst>
         </p14:section>
-        <p14:section name="Avantages et risques" id="{df4dc8fe-66d6-5efe-04b2-b8c07e616ea7}">
+        <p14:section name="Avantages et risques" id="{c89d6a3b-6194-5819-1e62-09571a8b33f1}">
           <p14:sldIdLst>
-            <p14:sldId id="271"/>
             <p14:sldId id="272"/>
+            <p14:sldId id="273"/>
           </p14:sldIdLst>
         </p14:section>
-        <p14:section name="Réglementation et sécurité" id="{51a520f9-9129-b0d5-8e6f-563b9b18669f}">
+        <p14:section name="Réglementation et sécurité" id="{3ac54a99-dca2-fd3c-2b11-e984f143e5fb}">
           <p14:sldIdLst>
-            <p14:sldId id="273"/>
             <p14:sldId id="274"/>
+            <p14:sldId id="275"/>
           </p14:sldIdLst>
         </p14:section>
-        <p14:section name="Applications et projet" id="{618e11ac-4434-bf8c-1168-6c8fb3865771}">
+        <p14:section name="Applications et projet" id="{33345ece-1a14-d206-c8e2-e865430948df}">
           <p14:sldIdLst>
-            <p14:sldId id="275"/>
             <p14:sldId id="276"/>
             <p14:sldId id="277"/>
+            <p14:sldId id="278"/>
           </p14:sldIdLst>
         </p14:section>
-        <p14:section name="Conclusion" id="{62aa9ed3-0b24-e090-3fb1-7d6f5f1b7785}">
+        <p14:section name="Conclusion" id="{f31dacf4-e9c1-1e03-c2b2-aa47e71f48c0}">
           <p14:sldIdLst>
-            <p14:sldId id="278"/>
+            <p14:sldId id="279"/>
           </p14:sldIdLst>
         </p14:section>
       </p14:sectionLst>
@@ -771,7 +773,7 @@
 L'énergie : la batterie lithium-polymère alimente un module de puissance qui mesure la tension et le courant, puis trois variateurs qui règlent la vitesse des trois moteurs.
 Le pilotage : les capteurs envoient leurs mesures au contrôleur de vol, qui commande les servos de basculement et les gouvernes de l'empennage, et communique par les liaisons radio.
 La mission : la caméra envoie ses images au Raspberry Pi, qui produit les alertes envoyées à la station sol.
-Nous prévoyons des alimentations séparées : une pour les radios, et une dédiée au Raspberry Pi, pour qu'aucune ne perturbe l'autre. Roger va vous présenter le module IA.</a:t>
+Nous prévoyons des alimentations séparées : une pour les radios, et une dédiée au Raspberry Pi, pour qu'aucune ne perturbe l'autre.</a:t>
             </a:r>
             <a:endParaRPr lang="en-US" dirty="0"/>
           </a:p>
@@ -859,10 +861,9 @@
           <a:p>
             <a:r>
               <a:rPr lang="en-US" dirty="0"/>
-              <a:t>Roger KAINWANG (environ 70 s)
-Merci Israel. Bonjour, je m'appelle KAINWANG Roger, je m'occupe de l'intelligence artificielle et des données.
-Le module IA, c'est un Raspberry Pi 5 avec une carte AI HAT+ qui porte une puce Hailo-8 de 26 TOPS. Tout le calcul se fait à bord : aucune image ne part sur internet.
-La caméra filme. Le détecteur YOLOv8s repère les personnes, les véhicules et les débris au sol. On ne garde que ce qui est dans la zone utile, la piste et ses abords. Un suivi relie les détections d'une image à l'autre pour qu'un objet ne déclenche qu'une seule alerte. Puis l'alerte part vers la station sol avec une photo de preuve.</a:t>
+              <a:t>Israel AWADE (environ 60 s)
+Voici à quoi ressemblent les principaux composants. Pour l'énergie : la batterie lithium-polymère, le module de puissance, les variateurs et les moteurs sans balais. Pour le pilotage : le contrôleur de vol à STM32H743, le module GNSS avec son compas, le tube de Pitot, la radio longue portée et la radiocommande. Et pour la mission : le Raspberry Pi 5, sa carte d'accélération Hailo-8, et la caméra.
+Ce sont des composants standards, faciles à trouver et à remplacer. Roger va vous présenter le module d'intelligence artificielle.</a:t>
             </a:r>
             <a:endParaRPr lang="en-US" dirty="0"/>
           </a:p>
@@ -950,9 +951,10 @@
           <a:p>
             <a:r>
               <a:rPr lang="en-US" dirty="0"/>
-              <a:t>Roger KAINWANG (environ 60 s)
-Pour le modèle, nous ne partons pas de zéro : nous prenons un YOLOv8s déjà entraîné et nous l'adaptons à notre mission, avec FOD-A, une base publique de plus de 30 000 débris de piste annotés, et des images prises avec notre caméra, vues d'en haut. Nous ajoutons des scènes vides avec des ombres et des marquages pour éviter les fausses alertes.
-Si l'IA voit un objet qu'elle ne sait pas classer, elle le signale « à vérifier », avec l'image. Si la liaison est coupée, elle garde ses alertes. Et c'est toujours l'humain qui décide : l'IA ne commande jamais le drone. Angelo va vous montrer la station sol.</a:t>
+              <a:t>Roger KAINWANG (environ 70 s)
+Merci Israel. Bonjour, je m'appelle KAINWANG Roger, je m'occupe de l'intelligence artificielle et des données.
+Le module IA, c'est un Raspberry Pi 5 avec une carte AI HAT+ qui porte une puce Hailo-8 de 26 TOPS. Tout le calcul se fait à bord : aucune image ne part sur internet.
+La caméra filme. Le détecteur YOLOv8s repère les personnes, les véhicules et les débris au sol. On ne garde que ce qui est dans la zone utile, la piste et ses abords. Un suivi relie les détections d'une image à l'autre pour qu'un objet ne déclenche qu'une seule alerte. Puis l'alerte part vers la station sol avec une photo de preuve.</a:t>
             </a:r>
             <a:endParaRPr lang="en-US" dirty="0"/>
           </a:p>
@@ -1040,9 +1042,9 @@
           <a:p>
             <a:r>
               <a:rPr lang="en-US" dirty="0"/>
-              <a:t>Angelo LOGO ADANTO (environ 50 s)
-Merci Roger. Au sol, nous développons la station en Flutter, avec une version mobile et une version web. L'opérateur prépare sa mission, définit la zone autorisée, suit la télémétrie en direct, et reçoit les alertes de l'IA avec leur image. La vidéo est enregistrée.
-Toutes ces données sont archivées par le back-end de Cédric : une API REST et une base MySQL, avec l'historique des vols et des alertes, et des journaux de vol signés. Makafui va vous présenter les liaisons.</a:t>
+              <a:t>Roger KAINWANG (environ 60 s)
+Pour le modèle, nous ne partons pas de zéro : nous prenons un YOLOv8s déjà entraîné et nous l'adaptons à notre mission, avec FOD-A, une base publique de plus de 30 000 débris de piste annotés, et des images prises avec notre caméra, vues d'en haut. Nous ajoutons des scènes vides avec des ombres et des marquages pour éviter les fausses alertes.
+Si l'IA voit un objet qu'elle ne sait pas classer, elle le signale « à vérifier », avec l'image. Si la liaison est coupée, elle garde ses alertes. Et c'est toujours l'humain qui décide : l'IA ne commande jamais le drone. Angelo va vous montrer la station sol.</a:t>
             </a:r>
             <a:endParaRPr lang="en-US" dirty="0"/>
           </a:p>
@@ -1130,9 +1132,9 @@
           <a:p>
             <a:r>
               <a:rPr lang="en-US" dirty="0"/>
-              <a:t>Makafui de MEDEIROS (environ 55 s)
-Merci Angelo. Notre principe : ne jamais dépendre d'un seul lien. Nous avons trois liaisons séparées. Un lien vidéo HD pour voir ce que voit le drone. Une radio longue portée chiffrée pour la télémétrie, les ordres et les alertes de l'IA. Et un canal d'urgence indépendant, qui sert uniquement à faire revenir le drone ou à couper les moteurs.
-La 4G est écartée car la couverture n'est pas garantie, et le satellite est à l'essai comme secours. Les antennes sont placées hors des zones en carbone, qui bloquent les ondes.</a:t>
+              <a:t>Angelo LOGO ADANTO (environ 50 s)
+Merci Roger. Au sol, nous développons la station en Flutter, avec une version mobile et une version web. L'opérateur prépare sa mission, définit la zone autorisée, suit la télémétrie en direct, et reçoit les alertes de l'IA avec leur image. La vidéo est enregistrée.
+Toutes ces données sont archivées par le back-end de Cédric : une API REST et une base MySQL, avec l'historique des vols et des alertes, et des journaux de vol signés. Makafui va vous présenter les liaisons.</a:t>
             </a:r>
             <a:endParaRPr lang="en-US" dirty="0"/>
           </a:p>
@@ -1220,8 +1222,9 @@
           <a:p>
             <a:r>
               <a:rPr lang="en-US" dirty="0"/>
-              <a:t>Israel AWADE (environ 50 s)
-[Israel] Pour résumer ce que notre drone apporte : il n'a pas besoin de piste, il vole longtemps grâce à son aile, et ses moteurs basculants servent aux deux phases de vol. L'IA à bord donne l'alerte pendant le vol, sans internet. La liaison est sécurisée. Les agents n'ont plus à parcourir la piste eux-mêmes. Et la même plateforme peut servir à d'autres missions.</a:t>
+              <a:t>Makafui de MEDEIROS (environ 55 s)
+Merci Angelo. Notre principe : ne jamais dépendre d'un seul lien. Nous avons trois liaisons séparées. Un lien vidéo HD pour voir ce que voit le drone. Une radio longue portée chiffrée pour la télémétrie, les ordres et les alertes de l'IA. Et un canal d'urgence indépendant, qui sert uniquement à faire revenir le drone ou à couper les moteurs.
+La 4G est écartée car la couverture n'est pas garantie, et le satellite est à l'essai comme secours. Les antennes sont placées hors des zones en carbone, qui bloquent les ondes.</a:t>
             </a:r>
             <a:endParaRPr lang="en-US" dirty="0"/>
           </a:p>
@@ -1309,10 +1312,8 @@
           <a:p>
             <a:r>
               <a:rPr lang="en-US" dirty="0"/>
-              <a:t>Israel AWADE puis Makafui de MEDEIROS (environ 90 s)
-Nous avons aussi listé les risques, avec une réponse pour chacun.
-Si la liaison radio est perdue, le drone rentre seul et atterrit à la verticale. Si la batterie devient faible, il rentre ; si elle est critique, il atterrit immédiatement. Le moment le plus délicat est le vol vertical : on le garde court, à faible hauteur. Les servos de basculement sont contrôlés à chaque check-list.
-[Makafui] Contre le brouillage et le leurrage GPS, nous comparons deux GPS avec les autres capteurs. Contre le piratage, la liaison est chiffrée et les ordres sont signés. Le géorepérage empêche de sortir de la zone. Et si l'IA hésite, elle signale « à vérifier » : c'est l'humain qui décide.</a:t>
+              <a:t>Israel AWADE (environ 50 s)
+[Israel] Pour résumer ce que notre drone apporte : il n'a pas besoin de piste, il vole longtemps grâce à son aile, et ses moteurs basculants servent aux deux phases de vol. L'IA à bord donne l'alerte pendant le vol, sans internet. La liaison est sécurisée. Les agents n'ont plus à parcourir la piste eux-mêmes. Et la même plateforme peut servir à d'autres missions.</a:t>
             </a:r>
             <a:endParaRPr lang="en-US" dirty="0"/>
           </a:p>
@@ -1400,10 +1401,10 @@
           <a:p>
             <a:r>
               <a:rPr lang="en-US" dirty="0"/>
-              <a:t>Cédric KODJOVI (environ 70 s)
-[Cédric] Côté réglementation, deux familles de règles.
-Pour le vol : nous ne volons qu'avec l'autorisation de l'ANAC, en vue directe du télépilote sauf autorisation particulière, dans une zone et à une hauteur limitées que le géorepérage fait respecter. Pas de vol au-dessus de la foule ni près d'un aérodrome sans accord. Le télépilote est formé et suit des check-lists.
-Pour les ondes et les données : nos fréquences doivent être autorisées par l'ARCEP. Comme le drone peut filmer des personnes, nous respectons la loi togolaise sur la protection des données : pas de reconnaissance faciale, on ne garde que les images d'alerte, et l'accès est réservé aux personnes autorisées.</a:t>
+              <a:t>Israel AWADE puis Makafui de MEDEIROS (environ 90 s)
+Nous avons aussi listé les risques, avec une réponse pour chacun.
+Si la liaison radio est perdue, le drone rentre seul et atterrit à la verticale. Si la batterie devient faible, il rentre ; si elle est critique, il atterrit immédiatement. Le moment le plus délicat est le vol vertical : on le garde court, à faible hauteur. Les servos de basculement sont contrôlés à chaque check-list.
+[Makafui] Contre le brouillage et le leurrage GPS, nous comparons deux GPS avec les autres capteurs. Contre le piratage, la liaison est chiffrée et les ordres sont signés. Le géorepérage empêche de sortir de la zone. Et si l'IA hésite, elle signale « à vérifier » : c'est l'humain qui décide.</a:t>
             </a:r>
             <a:endParaRPr lang="en-US" dirty="0"/>
           </a:p>
@@ -1491,10 +1492,10 @@
           <a:p>
             <a:r>
               <a:rPr lang="en-US" dirty="0"/>
-              <a:t>Makafui de MEDEIROS (environ 65 s)
-[Makafui] La sécurité se joue à deux niveaux.
-La sécurité du vol : le contrôleur est séparé de l'IA ; en cas de perte de radio, de batterie faible ou de GPS dégradé, le drone applique automatiquement une procédure de secours ; le géorepérage limite la zone et la hauteur ; une coupure d'urgence reste toujours possible ; et avant le décollage, le drone vérifie lui-même que tout est prêt.
-La cybersécurité : la liaison est chiffrée, chaque message est signé avec une clé chargée au sol, donc un faux ordre est rejeté. Nous détectons le brouillage, nous comparons les sources de position contre le leurrage GPS, et les journaux de vol sont signés.</a:t>
+              <a:t>Cédric KODJOVI (environ 70 s)
+[Cédric] Côté réglementation, deux familles de règles.
+Pour le vol : nous ne volons qu'avec l'autorisation de l'ANAC, en vue directe du télépilote sauf autorisation particulière, dans une zone et à une hauteur limitées que le géorepérage fait respecter. Pas de vol au-dessus de la foule ni près d'un aérodrome sans accord. Le télépilote est formé et suit des check-lists.
+Pour les ondes et les données : nos fréquences doivent être autorisées par l'ARCEP. Comme le drone peut filmer des personnes, nous respectons la loi togolaise sur la protection des données : pas de reconnaissance faciale, on ne garde que les images d'alerte, et l'accès est réservé aux personnes autorisées.</a:t>
             </a:r>
             <a:endParaRPr lang="en-US" dirty="0"/>
           </a:p>
@@ -1674,8 +1675,10 @@
           <a:p>
             <a:r>
               <a:rPr lang="en-US" dirty="0"/>
-              <a:t>Cédric KODJOVI (environ 55 s)
-[Cédric] Notre premier usage, c'est l'aéroport. Mais la même plateforme peut servir en agriculture et pour l'environnement, par exemple pour repérer des départs de feux de brousse, pour inspecter des lignes électriques, des ponts ou le port de Lomé, pour livrer de petits colis médicaux dans des zones enclavées avec une version adaptée, ou pour la cartographie. À chaque fois, on change seulement la charge utile et le modèle d'IA.</a:t>
+              <a:t>Makafui de MEDEIROS (environ 65 s)
+[Makafui] La sécurité se joue à deux niveaux.
+La sécurité du vol : le contrôleur est séparé de l'IA ; en cas de perte de radio, de batterie faible ou de GPS dégradé, le drone applique automatiquement une procédure de secours ; le géorepérage limite la zone et la hauteur ; une coupure d'urgence reste toujours possible ; et avant le décollage, le drone vérifie lui-même que tout est prêt.
+La cybersécurité : la liaison est chiffrée, chaque message est signé avec une clé chargée au sol, donc un faux ordre est rejeté. Nous détectons le brouillage, nous comparons les sources de position contre le leurrage GPS, et les journaux de vol sont signés.</a:t>
             </a:r>
             <a:endParaRPr lang="en-US" dirty="0"/>
           </a:p>
@@ -1763,8 +1766,8 @@
           <a:p>
             <a:r>
               <a:rPr lang="en-US" dirty="0"/>
-              <a:t>Cédric KODJOVI (environ 35 s)
-Côté calendrier, la candidature a été validée en août, la conception faite en septembre et le dossier déposé. Nous sommes en phase de prototypage et d'intégration. En novembre viendront les essais au sol, en vol et de sécurité, pour être prêts pour la finale en décembre. Je rends la parole à Israel.</a:t>
+              <a:t>Cédric KODJOVI (environ 55 s)
+[Cédric] Notre premier usage, c'est l'aéroport. Mais la même plateforme peut servir en agriculture et pour l'environnement, par exemple pour repérer des départs de feux de brousse, pour inspecter des lignes électriques, des ponts ou le port de Lomé, pour livrer de petits colis médicaux dans des zones enclavées avec une version adaptée, ou pour la cartographie. À chaque fois, on change seulement la charge utile et le modèle d'IA.</a:t>
             </a:r>
             <a:endParaRPr lang="en-US" dirty="0"/>
           </a:p>
@@ -1852,8 +1855,8 @@
           <a:p>
             <a:r>
               <a:rPr lang="en-US" dirty="0"/>
-              <a:t>Israel AWADE (environ 35 s)
-Merci Cédric. Notre budget est estimé entre 730 000 et 1 400 000 francs CFA pour le drone, avec en plus 120 000 à 160 000 francs pour le module d'intelligence artificielle. Nous avons choisi des composants courants, faciles à trouver et à remplacer.</a:t>
+              <a:t>Cédric KODJOVI (environ 35 s)
+Côté calendrier, la candidature a été validée en août, la conception faite en septembre et le dossier déposé. Nous sommes en phase de prototypage et d'intégration. En novembre viendront les essais au sol, en vol et de sécurité, pour être prêts pour la finale en décembre. Je rends la parole à Israel.</a:t>
             </a:r>
             <a:endParaRPr lang="en-US" dirty="0"/>
           </a:p>
@@ -1942,8 +1945,7 @@
             <a:r>
               <a:rPr lang="en-US" dirty="0"/>
               <a:t>Israel AWADE (environ 35 s)
-Pour résumer, la Sentinelle Aérienne décolle partout, vole longtemps grâce à son aile, analyse ses images à bord et communique de façon sécurisée. Ses risques sont identifiés et traités, et elle respecte le cadre réglementaire.
-Merci à l'ANAC et aux organisateurs du CECFD. Merci pour votre attention, nous sommes prêts à répondre à vos questions.</a:t>
+Merci Cédric. Notre budget est estimé entre 730 000 et 1 400 000 francs CFA pour le drone, avec en plus 120 000 à 160 000 francs pour le module d'intelligence artificielle. Nous avons choisi des composants courants, faciles à trouver et à remplacer.</a:t>
             </a:r>
             <a:endParaRPr lang="en-US" dirty="0"/>
           </a:p>
@@ -1967,6 +1969,96 @@
             <a:fld id="{F7021451-1387-4CA6-816F-3879F97B5CBC}" type="slidenum">
               <a:rPr lang="en-US"/>
               <a:t>23</a:t>
+            </a:fld>
+            <a:endParaRPr lang="en-US"/>
+          </a:p>
+        </p:txBody>
+      </p:sp>
+    </p:spTree>
+    <p:extLst>
+      <p:ext uri="{BB962C8B-B14F-4D97-AF65-F5344CB8AC3E}">
+        <p14:creationId xmlns:p14="http://schemas.microsoft.com/office/powerpoint/2010/main" val="1024086991"/>
+      </p:ext>
+    </p:extLst>
+  </p:cSld>
+  <p:clrMapOvr>
+    <a:masterClrMapping/>
+  </p:clrMapOvr>
+</p:notes>
+</file>
+
+<file path=ppt/notesSlides/notesSlide24.xml><?xml version="1.0" encoding="utf-8"?>
+<p:notes xmlns:a="http://schemas.openxmlformats.org/drawingml/2006/main" xmlns:r="http://schemas.openxmlformats.org/officeDocument/2006/relationships" xmlns:p="http://schemas.openxmlformats.org/presentationml/2006/main">
+  <p:cSld>
+    <p:spTree>
+      <p:nvGrpSpPr>
+        <p:cNvPr id="1" name=""/>
+        <p:cNvGrpSpPr/>
+        <p:nvPr/>
+      </p:nvGrpSpPr>
+      <p:grpSpPr>
+        <a:xfrm>
+          <a:off x="0" y="0"/>
+          <a:ext cx="0" cy="0"/>
+          <a:chOff x="0" y="0"/>
+          <a:chExt cx="0" cy="0"/>
+        </a:xfrm>
+      </p:grpSpPr>
+      <p:sp>
+        <p:nvSpPr>
+          <p:cNvPr id="2" name="Slide Image Placeholder 1"/>
+          <p:cNvSpPr>
+            <a:spLocks noGrp="1" noRot="1" noChangeAspect="1"/>
+          </p:cNvSpPr>
+          <p:nvPr>
+            <p:ph type="sldImg"/>
+          </p:nvPr>
+        </p:nvSpPr>
+        <p:spPr/>
+      </p:sp>
+      <p:sp>
+        <p:nvSpPr>
+          <p:cNvPr id="3" name="Notes Placeholder 2"/>
+          <p:cNvSpPr>
+            <a:spLocks noGrp="1"/>
+          </p:cNvSpPr>
+          <p:nvPr>
+            <p:ph type="body" idx="1"/>
+          </p:nvPr>
+        </p:nvSpPr>
+        <p:spPr/>
+        <p:txBody>
+          <a:bodyPr/>
+          <a:lstStyle/>
+          <a:p>
+            <a:r>
+              <a:rPr lang="en-US" dirty="0"/>
+              <a:t>Israel AWADE (environ 35 s)
+Pour résumer, la Sentinelle Aérienne décolle partout, vole longtemps grâce à son aile, analyse ses images à bord et communique de façon sécurisée. Ses risques sont identifiés et traités, et elle respecte le cadre réglementaire.
+Merci à l'ANAC et aux organisateurs du CECFD. Merci pour votre attention, nous sommes prêts à répondre à vos questions.</a:t>
+            </a:r>
+            <a:endParaRPr lang="en-US" dirty="0"/>
+          </a:p>
+        </p:txBody>
+      </p:sp>
+      <p:sp>
+        <p:nvSpPr>
+          <p:cNvPr id="4" name="Slide Number Placeholder 3"/>
+          <p:cNvSpPr>
+            <a:spLocks noGrp="1"/>
+          </p:cNvSpPr>
+          <p:nvPr>
+            <p:ph type="sldNum" sz="quarter" idx="10"/>
+          </p:nvPr>
+        </p:nvSpPr>
+        <p:spPr/>
+        <p:txBody>
+          <a:bodyPr/>
+          <a:lstStyle/>
+          <a:p>
+            <a:fld id="{F7021451-1387-4CA6-816F-3879F97B5CBC}" type="slidenum">
+              <a:rPr lang="en-US"/>
+              <a:t>24</a:t>
             </a:fld>
             <a:endParaRPr lang="en-US"/>
           </a:p>
@@ -6058,7 +6150,7 @@
                   <a:schemeClr val="tx1"/>
                 </a:solidFill>
               </a:rPr>
-              <a:t>Le module d'intelligence artificielle</a:t>
+              <a:t>Les principaux composants</a:t>
             </a:r>
             <a:endParaRPr lang="en-US" sz="3000" dirty="0"/>
           </a:p>
@@ -6094,29 +6186,50 @@
                   <a:schemeClr val="tx2"/>
                 </a:solidFill>
               </a:rPr>
-              <a:t>Roger KAINWANG</a:t>
+              <a:t>Israel AWADE</a:t>
             </a:r>
             <a:endParaRPr lang="en-US" sz="1000" dirty="0"/>
           </a:p>
         </p:txBody>
       </p:sp>
-      <p:sp>
-        <p:nvSpPr>
-          <p:cNvPr id="4" name="Étape 1"/>
+      <p:pic>
+        <p:nvPicPr>
+          <p:cNvPr id="4" name="Image 0" descr="Vue CAO du drone">    </p:cNvPr>
+          <p:cNvPicPr>
+            <a:picLocks noChangeAspect="1"/>
+          </p:cNvPicPr>
+          <p:nvPr/>
+        </p:nvPicPr>
+        <p:blipFill>
+          <a:blip r:embed="rId1"/>
+          <a:stretch>
+            <a:fillRect/>
+          </a:stretch>
+        </p:blipFill>
+        <p:spPr>
+          <a:xfrm>
+            <a:off x="594360" y="1546879"/>
+            <a:ext cx="1605229" cy="1203922"/>
+          </a:xfrm>
+          <a:prstGeom prst="rect">
+            <a:avLst/>
+          </a:prstGeom>
+        </p:spPr>
+      </p:pic>
+      <p:sp>
+        <p:nvSpPr>
+          <p:cNvPr id="5" name="Cadre batterie_lipo"/>
           <p:cNvSpPr/>
           <p:nvPr/>
         </p:nvSpPr>
         <p:spPr>
           <a:xfrm>
-            <a:off x="594360" y="1463040"/>
-            <a:ext cx="1589989" cy="1051560"/>
-          </a:xfrm>
-          <a:prstGeom prst="rect">
-            <a:avLst/>
-          </a:prstGeom>
-          <a:solidFill>
-            <a:schemeClr val="bg2"/>
-          </a:solidFill>
+            <a:off x="594360" y="1546879"/>
+            <a:ext cx="1605229" cy="1203922"/>
+          </a:xfrm>
+          <a:prstGeom prst="rect">
+            <a:avLst/>
+          </a:prstGeom>
           <a:ln w="9525">
             <a:solidFill>
               <a:schemeClr val="accent5"/>
@@ -6127,14 +6240,14 @@
       </p:sp>
       <p:sp>
         <p:nvSpPr>
-          <p:cNvPr id="5" name="Text 3"/>
+          <p:cNvPr id="6" name="Text 3"/>
           <p:cNvSpPr txBox="1"/>
           <p:nvPr/>
         </p:nvSpPr>
         <p:spPr>
           <a:xfrm>
-            <a:off x="685800" y="1536192"/>
-            <a:ext cx="1407109" cy="905256"/>
+            <a:off x="594360" y="3017520"/>
+            <a:ext cx="1605229" cy="502920"/>
           </a:xfrm>
           <a:prstGeom prst="rect">
             <a:avLst/>
@@ -6143,79 +6256,76 @@
           <a:ln/>
         </p:spPr>
         <p:txBody>
-          <a:bodyPr wrap="square" lIns="0" tIns="0" rIns="0" bIns="0" rtlCol="0" anchor="ctr"/>
+          <a:bodyPr wrap="square" lIns="0" tIns="0" rIns="0" bIns="0" rtlCol="0" anchor="t"/>
           <a:lstStyle/>
           <a:p>
             <a:pPr algn="ctr" indent="0" marL="0">
               <a:buNone/>
             </a:pPr>
             <a:r>
-              <a:rPr lang="en-US" sz="1500" b="1" dirty="0">
+              <a:rPr lang="en-US" sz="1300" b="1" dirty="0">
                 <a:solidFill>
                   <a:schemeClr val="tx1"/>
                 </a:solidFill>
               </a:rPr>
-              <a:t>Caméra</a:t>
-            </a:r>
-            <a:endParaRPr lang="en-US" sz="1500" dirty="0"/>
+              <a:t>Batterie LiPo</a:t>
+            </a:r>
+            <a:endParaRPr lang="en-US" sz="1300" dirty="0"/>
           </a:p>
           <a:p>
             <a:pPr algn="ctr" indent="0" marL="0">
               <a:buNone/>
             </a:pPr>
             <a:r>
-              <a:rPr lang="en-US" sz="1200" dirty="0">
+              <a:rPr lang="en-US" sz="1100" dirty="0">
                 <a:solidFill>
                   <a:schemeClr val="tx2"/>
                 </a:solidFill>
               </a:rPr>
-              <a:t>images horodatées</a:t>
-            </a:r>
-            <a:endParaRPr lang="en-US" sz="1500" dirty="0"/>
-          </a:p>
-        </p:txBody>
-      </p:sp>
-      <p:sp>
-        <p:nvSpPr>
-          <p:cNvPr id="6" name="Shape 4"/>
+              <a:t>réserve d'énergie</a:t>
+            </a:r>
+            <a:endParaRPr lang="en-US" sz="1300" dirty="0"/>
+          </a:p>
+        </p:txBody>
+      </p:sp>
+      <p:pic>
+        <p:nvPicPr>
+          <p:cNvPr id="7" name="Image 1" descr="Vue CAO du drone">    </p:cNvPr>
+          <p:cNvPicPr>
+            <a:picLocks noChangeAspect="1"/>
+          </p:cNvPicPr>
+          <p:nvPr/>
+        </p:nvPicPr>
+        <p:blipFill>
+          <a:blip r:embed="rId2"/>
+          <a:stretch>
+            <a:fillRect/>
+          </a:stretch>
+        </p:blipFill>
+        <p:spPr>
+          <a:xfrm>
+            <a:off x="2473909" y="1355613"/>
+            <a:ext cx="1605229" cy="1586455"/>
+          </a:xfrm>
+          <a:prstGeom prst="rect">
+            <a:avLst/>
+          </a:prstGeom>
+        </p:spPr>
+      </p:pic>
+      <p:sp>
+        <p:nvSpPr>
+          <p:cNvPr id="8" name="Cadre module_puissance"/>
           <p:cNvSpPr/>
           <p:nvPr/>
         </p:nvSpPr>
         <p:spPr>
           <a:xfrm>
-            <a:off x="2220925" y="1988820"/>
-            <a:ext cx="219456" cy="0"/>
-          </a:xfrm>
-          <a:prstGeom prst="line">
-            <a:avLst/>
-          </a:prstGeom>
-          <a:noFill/>
-          <a:ln w="19050">
-            <a:solidFill>
-              <a:schemeClr val="tx2"/>
-            </a:solidFill>
-            <a:prstDash val="solid"/>
-            <a:tailEnd type="triangle"/>
-          </a:ln>
-        </p:spPr>
-      </p:sp>
-      <p:sp>
-        <p:nvSpPr>
-          <p:cNvPr id="7" name="Étape 2"/>
-          <p:cNvSpPr/>
-          <p:nvPr/>
-        </p:nvSpPr>
-        <p:spPr>
-          <a:xfrm>
-            <a:off x="2476957" y="1463040"/>
-            <a:ext cx="1589989" cy="1051560"/>
-          </a:xfrm>
-          <a:prstGeom prst="rect">
-            <a:avLst/>
-          </a:prstGeom>
-          <a:solidFill>
-            <a:schemeClr val="bg2"/>
-          </a:solidFill>
+            <a:off x="2473909" y="1355613"/>
+            <a:ext cx="1605229" cy="1586455"/>
+          </a:xfrm>
+          <a:prstGeom prst="rect">
+            <a:avLst/>
+          </a:prstGeom>
           <a:ln w="9525">
             <a:solidFill>
               <a:schemeClr val="accent5"/>
@@ -6226,14 +6336,14 @@
       </p:sp>
       <p:sp>
         <p:nvSpPr>
-          <p:cNvPr id="8" name="Text 6"/>
+          <p:cNvPr id="9" name="Text 5"/>
           <p:cNvSpPr txBox="1"/>
           <p:nvPr/>
         </p:nvSpPr>
         <p:spPr>
           <a:xfrm>
-            <a:off x="2568397" y="1536192"/>
-            <a:ext cx="1407109" cy="905256"/>
+            <a:off x="2473909" y="3017520"/>
+            <a:ext cx="1605229" cy="502920"/>
           </a:xfrm>
           <a:prstGeom prst="rect">
             <a:avLst/>
@@ -6242,79 +6352,76 @@
           <a:ln/>
         </p:spPr>
         <p:txBody>
-          <a:bodyPr wrap="square" lIns="0" tIns="0" rIns="0" bIns="0" rtlCol="0" anchor="ctr"/>
+          <a:bodyPr wrap="square" lIns="0" tIns="0" rIns="0" bIns="0" rtlCol="0" anchor="t"/>
           <a:lstStyle/>
           <a:p>
             <a:pPr algn="ctr" indent="0" marL="0">
               <a:buNone/>
             </a:pPr>
             <a:r>
-              <a:rPr lang="en-US" sz="1500" b="1" dirty="0">
+              <a:rPr lang="en-US" sz="1300" b="1" dirty="0">
                 <a:solidFill>
                   <a:schemeClr val="tx1"/>
                 </a:solidFill>
               </a:rPr>
-              <a:t>Détection</a:t>
-            </a:r>
-            <a:endParaRPr lang="en-US" sz="1500" dirty="0"/>
+              <a:t>Module de puissance</a:t>
+            </a:r>
+            <a:endParaRPr lang="en-US" sz="1300" dirty="0"/>
           </a:p>
           <a:p>
             <a:pPr algn="ctr" indent="0" marL="0">
               <a:buNone/>
             </a:pPr>
             <a:r>
-              <a:rPr lang="en-US" sz="1200" dirty="0">
+              <a:rPr lang="en-US" sz="1100" dirty="0">
                 <a:solidFill>
                   <a:schemeClr val="tx2"/>
                 </a:solidFill>
               </a:rPr>
-              <a:t>YOLOv8s sur Hailo-8</a:t>
-            </a:r>
-            <a:endParaRPr lang="en-US" sz="1500" dirty="0"/>
-          </a:p>
-        </p:txBody>
-      </p:sp>
-      <p:sp>
-        <p:nvSpPr>
-          <p:cNvPr id="9" name="Shape 7"/>
+              <a:t>mesure tension et courant</a:t>
+            </a:r>
+            <a:endParaRPr lang="en-US" sz="1300" dirty="0"/>
+          </a:p>
+        </p:txBody>
+      </p:sp>
+      <p:pic>
+        <p:nvPicPr>
+          <p:cNvPr id="10" name="Image 2" descr="Vue CAO du drone">    </p:cNvPr>
+          <p:cNvPicPr>
+            <a:picLocks noChangeAspect="1"/>
+          </p:cNvPicPr>
+          <p:nvPr/>
+        </p:nvPicPr>
+        <p:blipFill>
+          <a:blip r:embed="rId3"/>
+          <a:stretch>
+            <a:fillRect/>
+          </a:stretch>
+        </p:blipFill>
+        <p:spPr>
+          <a:xfrm>
+            <a:off x="4353458" y="1473306"/>
+            <a:ext cx="1605229" cy="1351068"/>
+          </a:xfrm>
+          <a:prstGeom prst="rect">
+            <a:avLst/>
+          </a:prstGeom>
+        </p:spPr>
+      </p:pic>
+      <p:sp>
+        <p:nvSpPr>
+          <p:cNvPr id="11" name="Cadre esc_moteur"/>
           <p:cNvSpPr/>
           <p:nvPr/>
         </p:nvSpPr>
         <p:spPr>
           <a:xfrm>
-            <a:off x="4103522" y="1988820"/>
-            <a:ext cx="219456" cy="0"/>
-          </a:xfrm>
-          <a:prstGeom prst="line">
-            <a:avLst/>
-          </a:prstGeom>
-          <a:noFill/>
-          <a:ln w="19050">
-            <a:solidFill>
-              <a:schemeClr val="tx2"/>
-            </a:solidFill>
-            <a:prstDash val="solid"/>
-            <a:tailEnd type="triangle"/>
-          </a:ln>
-        </p:spPr>
-      </p:sp>
-      <p:sp>
-        <p:nvSpPr>
-          <p:cNvPr id="10" name="Étape 3"/>
-          <p:cNvSpPr/>
-          <p:nvPr/>
-        </p:nvSpPr>
-        <p:spPr>
-          <a:xfrm>
-            <a:off x="4359554" y="1463040"/>
-            <a:ext cx="1589989" cy="1051560"/>
-          </a:xfrm>
-          <a:prstGeom prst="rect">
-            <a:avLst/>
-          </a:prstGeom>
-          <a:solidFill>
-            <a:schemeClr val="bg2"/>
-          </a:solidFill>
+            <a:off x="4353458" y="1473306"/>
+            <a:ext cx="1605229" cy="1351068"/>
+          </a:xfrm>
+          <a:prstGeom prst="rect">
+            <a:avLst/>
+          </a:prstGeom>
           <a:ln w="9525">
             <a:solidFill>
               <a:schemeClr val="accent5"/>
@@ -6325,14 +6432,14 @@
       </p:sp>
       <p:sp>
         <p:nvSpPr>
-          <p:cNvPr id="11" name="Text 9"/>
+          <p:cNvPr id="12" name="Text 7"/>
           <p:cNvSpPr txBox="1"/>
           <p:nvPr/>
         </p:nvSpPr>
         <p:spPr>
           <a:xfrm>
-            <a:off x="4450994" y="1536192"/>
-            <a:ext cx="1407109" cy="905256"/>
+            <a:off x="4353458" y="3017520"/>
+            <a:ext cx="1605229" cy="502920"/>
           </a:xfrm>
           <a:prstGeom prst="rect">
             <a:avLst/>
@@ -6341,79 +6448,76 @@
           <a:ln/>
         </p:spPr>
         <p:txBody>
-          <a:bodyPr wrap="square" lIns="0" tIns="0" rIns="0" bIns="0" rtlCol="0" anchor="ctr"/>
+          <a:bodyPr wrap="square" lIns="0" tIns="0" rIns="0" bIns="0" rtlCol="0" anchor="t"/>
           <a:lstStyle/>
           <a:p>
             <a:pPr algn="ctr" indent="0" marL="0">
               <a:buNone/>
             </a:pPr>
             <a:r>
-              <a:rPr lang="en-US" sz="1500" b="1" dirty="0">
+              <a:rPr lang="en-US" sz="1300" b="1" dirty="0">
                 <a:solidFill>
                   <a:schemeClr val="tx1"/>
                 </a:solidFill>
               </a:rPr>
-              <a:t>Zone d'intérêt</a:t>
-            </a:r>
-            <a:endParaRPr lang="en-US" sz="1500" dirty="0"/>
+              <a:t>Variateurs (ESC)</a:t>
+            </a:r>
+            <a:endParaRPr lang="en-US" sz="1300" dirty="0"/>
           </a:p>
           <a:p>
             <a:pPr algn="ctr" indent="0" marL="0">
               <a:buNone/>
             </a:pPr>
             <a:r>
-              <a:rPr lang="en-US" sz="1200" dirty="0">
+              <a:rPr lang="en-US" sz="1100" dirty="0">
                 <a:solidFill>
                   <a:schemeClr val="tx2"/>
                 </a:solidFill>
               </a:rPr>
-              <a:t>piste et abords</a:t>
-            </a:r>
-            <a:endParaRPr lang="en-US" sz="1500" dirty="0"/>
-          </a:p>
-        </p:txBody>
-      </p:sp>
-      <p:sp>
-        <p:nvSpPr>
-          <p:cNvPr id="12" name="Shape 10"/>
+              <a:t>règlent la vitesse des moteurs</a:t>
+            </a:r>
+            <a:endParaRPr lang="en-US" sz="1300" dirty="0"/>
+          </a:p>
+        </p:txBody>
+      </p:sp>
+      <p:pic>
+        <p:nvPicPr>
+          <p:cNvPr id="13" name="Image 3" descr="Vue CAO du drone">    </p:cNvPr>
+          <p:cNvPicPr>
+            <a:picLocks noChangeAspect="1"/>
+          </p:cNvPicPr>
+          <p:nvPr/>
+        </p:nvPicPr>
+        <p:blipFill>
+          <a:blip r:embed="rId4"/>
+          <a:stretch>
+            <a:fillRect/>
+          </a:stretch>
+        </p:blipFill>
+        <p:spPr>
+          <a:xfrm>
+            <a:off x="6233008" y="1667271"/>
+            <a:ext cx="1605229" cy="963138"/>
+          </a:xfrm>
+          <a:prstGeom prst="rect">
+            <a:avLst/>
+          </a:prstGeom>
+        </p:spPr>
+      </p:pic>
+      <p:sp>
+        <p:nvSpPr>
+          <p:cNvPr id="14" name="Cadre moteur_brushless"/>
           <p:cNvSpPr/>
           <p:nvPr/>
         </p:nvSpPr>
         <p:spPr>
           <a:xfrm>
-            <a:off x="5986120" y="1988820"/>
-            <a:ext cx="219456" cy="0"/>
-          </a:xfrm>
-          <a:prstGeom prst="line">
-            <a:avLst/>
-          </a:prstGeom>
-          <a:noFill/>
-          <a:ln w="19050">
-            <a:solidFill>
-              <a:schemeClr val="tx2"/>
-            </a:solidFill>
-            <a:prstDash val="solid"/>
-            <a:tailEnd type="triangle"/>
-          </a:ln>
-        </p:spPr>
-      </p:sp>
-      <p:sp>
-        <p:nvSpPr>
-          <p:cNvPr id="13" name="Étape 4"/>
-          <p:cNvSpPr/>
-          <p:nvPr/>
-        </p:nvSpPr>
-        <p:spPr>
-          <a:xfrm>
-            <a:off x="6242152" y="1463040"/>
-            <a:ext cx="1589989" cy="1051560"/>
-          </a:xfrm>
-          <a:prstGeom prst="rect">
-            <a:avLst/>
-          </a:prstGeom>
-          <a:solidFill>
-            <a:schemeClr val="bg2"/>
-          </a:solidFill>
+            <a:off x="6233008" y="1667271"/>
+            <a:ext cx="1605229" cy="963138"/>
+          </a:xfrm>
+          <a:prstGeom prst="rect">
+            <a:avLst/>
+          </a:prstGeom>
           <a:ln w="9525">
             <a:solidFill>
               <a:schemeClr val="accent5"/>
@@ -6424,14 +6528,14 @@
       </p:sp>
       <p:sp>
         <p:nvSpPr>
-          <p:cNvPr id="14" name="Text 12"/>
+          <p:cNvPr id="15" name="Text 9"/>
           <p:cNvSpPr txBox="1"/>
           <p:nvPr/>
         </p:nvSpPr>
         <p:spPr>
           <a:xfrm>
-            <a:off x="6333592" y="1536192"/>
-            <a:ext cx="1407109" cy="905256"/>
+            <a:off x="6233008" y="3017520"/>
+            <a:ext cx="1605229" cy="502920"/>
           </a:xfrm>
           <a:prstGeom prst="rect">
             <a:avLst/>
@@ -6440,79 +6544,76 @@
           <a:ln/>
         </p:spPr>
         <p:txBody>
-          <a:bodyPr wrap="square" lIns="0" tIns="0" rIns="0" bIns="0" rtlCol="0" anchor="ctr"/>
+          <a:bodyPr wrap="square" lIns="0" tIns="0" rIns="0" bIns="0" rtlCol="0" anchor="t"/>
           <a:lstStyle/>
           <a:p>
             <a:pPr algn="ctr" indent="0" marL="0">
               <a:buNone/>
             </a:pPr>
             <a:r>
-              <a:rPr lang="en-US" sz="1500" b="1" dirty="0">
+              <a:rPr lang="en-US" sz="1300" b="1" dirty="0">
                 <a:solidFill>
                   <a:schemeClr val="tx1"/>
                 </a:solidFill>
               </a:rPr>
-              <a:t>Suivi</a:t>
-            </a:r>
-            <a:endParaRPr lang="en-US" sz="1500" dirty="0"/>
+              <a:t>Moteurs brushless</a:t>
+            </a:r>
+            <a:endParaRPr lang="en-US" sz="1300" dirty="0"/>
           </a:p>
           <a:p>
             <a:pPr algn="ctr" indent="0" marL="0">
               <a:buNone/>
             </a:pPr>
             <a:r>
-              <a:rPr lang="en-US" sz="1200" dirty="0">
+              <a:rPr lang="en-US" sz="1100" dirty="0">
                 <a:solidFill>
                   <a:schemeClr val="tx2"/>
                 </a:solidFill>
               </a:rPr>
-              <a:t>un objet, une alerte</a:t>
-            </a:r>
-            <a:endParaRPr lang="en-US" sz="1500" dirty="0"/>
-          </a:p>
-        </p:txBody>
-      </p:sp>
-      <p:sp>
-        <p:nvSpPr>
-          <p:cNvPr id="15" name="Shape 13"/>
+              <a:t>2 avant basculants, 1 arrière</a:t>
+            </a:r>
+            <a:endParaRPr lang="en-US" sz="1300" dirty="0"/>
+          </a:p>
+        </p:txBody>
+      </p:sp>
+      <p:pic>
+        <p:nvPicPr>
+          <p:cNvPr id="16" name="Image 4" descr="Vue CAO du drone">    </p:cNvPr>
+          <p:cNvPicPr>
+            <a:picLocks noChangeAspect="1"/>
+          </p:cNvPicPr>
+          <p:nvPr/>
+        </p:nvPicPr>
+        <p:blipFill>
+          <a:blip r:embed="rId5"/>
+          <a:stretch>
+            <a:fillRect/>
+          </a:stretch>
+        </p:blipFill>
+        <p:spPr>
+          <a:xfrm>
+            <a:off x="8355335" y="1325880"/>
+            <a:ext cx="1119673" cy="1645920"/>
+          </a:xfrm>
+          <a:prstGeom prst="rect">
+            <a:avLst/>
+          </a:prstGeom>
+        </p:spPr>
+      </p:pic>
+      <p:sp>
+        <p:nvSpPr>
+          <p:cNvPr id="17" name="Cadre controleur_h743"/>
           <p:cNvSpPr/>
           <p:nvPr/>
         </p:nvSpPr>
         <p:spPr>
           <a:xfrm>
-            <a:off x="7868717" y="1988820"/>
-            <a:ext cx="219456" cy="0"/>
-          </a:xfrm>
-          <a:prstGeom prst="line">
-            <a:avLst/>
-          </a:prstGeom>
-          <a:noFill/>
-          <a:ln w="19050">
-            <a:solidFill>
-              <a:schemeClr val="tx2"/>
-            </a:solidFill>
-            <a:prstDash val="solid"/>
-            <a:tailEnd type="triangle"/>
-          </a:ln>
-        </p:spPr>
-      </p:sp>
-      <p:sp>
-        <p:nvSpPr>
-          <p:cNvPr id="16" name="Étape 5"/>
-          <p:cNvSpPr/>
-          <p:nvPr/>
-        </p:nvSpPr>
-        <p:spPr>
-          <a:xfrm>
-            <a:off x="8124749" y="1463040"/>
-            <a:ext cx="1589989" cy="1051560"/>
-          </a:xfrm>
-          <a:prstGeom prst="rect">
-            <a:avLst/>
-          </a:prstGeom>
-          <a:solidFill>
-            <a:schemeClr val="bg2"/>
-          </a:solidFill>
+            <a:off x="8355335" y="1325880"/>
+            <a:ext cx="1119673" cy="1645920"/>
+          </a:xfrm>
+          <a:prstGeom prst="rect">
+            <a:avLst/>
+          </a:prstGeom>
           <a:ln w="9525">
             <a:solidFill>
               <a:schemeClr val="accent5"/>
@@ -6523,14 +6624,14 @@
       </p:sp>
       <p:sp>
         <p:nvSpPr>
-          <p:cNvPr id="17" name="Text 15"/>
+          <p:cNvPr id="18" name="Text 11"/>
           <p:cNvSpPr txBox="1"/>
           <p:nvPr/>
         </p:nvSpPr>
         <p:spPr>
           <a:xfrm>
-            <a:off x="8216189" y="1536192"/>
-            <a:ext cx="1407109" cy="905256"/>
+            <a:off x="8112557" y="3017520"/>
+            <a:ext cx="1605229" cy="502920"/>
           </a:xfrm>
           <a:prstGeom prst="rect">
             <a:avLst/>
@@ -6539,79 +6640,76 @@
           <a:ln/>
         </p:spPr>
         <p:txBody>
-          <a:bodyPr wrap="square" lIns="0" tIns="0" rIns="0" bIns="0" rtlCol="0" anchor="ctr"/>
+          <a:bodyPr wrap="square" lIns="0" tIns="0" rIns="0" bIns="0" rtlCol="0" anchor="t"/>
           <a:lstStyle/>
           <a:p>
             <a:pPr algn="ctr" indent="0" marL="0">
               <a:buNone/>
             </a:pPr>
             <a:r>
-              <a:rPr lang="en-US" sz="1500" b="1" dirty="0">
+              <a:rPr lang="en-US" sz="1300" b="1" dirty="0">
                 <a:solidFill>
                   <a:schemeClr val="tx1"/>
                 </a:solidFill>
               </a:rPr>
-              <a:t>Alerte</a:t>
-            </a:r>
-            <a:endParaRPr lang="en-US" sz="1500" dirty="0"/>
+              <a:t>Contrôleur de vol</a:t>
+            </a:r>
+            <a:endParaRPr lang="en-US" sz="1300" dirty="0"/>
           </a:p>
           <a:p>
             <a:pPr algn="ctr" indent="0" marL="0">
               <a:buNone/>
             </a:pPr>
             <a:r>
-              <a:rPr lang="en-US" sz="1200" dirty="0">
+              <a:rPr lang="en-US" sz="1100" dirty="0">
                 <a:solidFill>
                   <a:schemeClr val="tx2"/>
                 </a:solidFill>
               </a:rPr>
-              <a:t>avec image de preuve</a:t>
-            </a:r>
-            <a:endParaRPr lang="en-US" sz="1500" dirty="0"/>
-          </a:p>
-        </p:txBody>
-      </p:sp>
-      <p:sp>
-        <p:nvSpPr>
-          <p:cNvPr id="18" name="Shape 16"/>
+              <a:t>STM32H743 sous ArduPilot</a:t>
+            </a:r>
+            <a:endParaRPr lang="en-US" sz="1300" dirty="0"/>
+          </a:p>
+        </p:txBody>
+      </p:sp>
+      <p:pic>
+        <p:nvPicPr>
+          <p:cNvPr id="19" name="Image 5" descr="Vue CAO du drone">    </p:cNvPr>
+          <p:cNvPicPr>
+            <a:picLocks noChangeAspect="1"/>
+          </p:cNvPicPr>
+          <p:nvPr/>
+        </p:nvPicPr>
+        <p:blipFill>
+          <a:blip r:embed="rId6"/>
+          <a:stretch>
+            <a:fillRect/>
+          </a:stretch>
+        </p:blipFill>
+        <p:spPr>
+          <a:xfrm>
+            <a:off x="9992106" y="1803367"/>
+            <a:ext cx="1605229" cy="690946"/>
+          </a:xfrm>
+          <a:prstGeom prst="rect">
+            <a:avLst/>
+          </a:prstGeom>
+        </p:spPr>
+      </p:pic>
+      <p:sp>
+        <p:nvSpPr>
+          <p:cNvPr id="20" name="Cadre gnss"/>
           <p:cNvSpPr/>
           <p:nvPr/>
         </p:nvSpPr>
         <p:spPr>
           <a:xfrm>
-            <a:off x="9751314" y="1988820"/>
-            <a:ext cx="219456" cy="0"/>
-          </a:xfrm>
-          <a:prstGeom prst="line">
-            <a:avLst/>
-          </a:prstGeom>
-          <a:noFill/>
-          <a:ln w="19050">
-            <a:solidFill>
-              <a:schemeClr val="tx2"/>
-            </a:solidFill>
-            <a:prstDash val="solid"/>
-            <a:tailEnd type="triangle"/>
-          </a:ln>
-        </p:spPr>
-      </p:sp>
-      <p:sp>
-        <p:nvSpPr>
-          <p:cNvPr id="19" name="Étape 6"/>
-          <p:cNvSpPr/>
-          <p:nvPr/>
-        </p:nvSpPr>
-        <p:spPr>
-          <a:xfrm>
-            <a:off x="10007346" y="1463040"/>
-            <a:ext cx="1589989" cy="1051560"/>
-          </a:xfrm>
-          <a:prstGeom prst="rect">
-            <a:avLst/>
-          </a:prstGeom>
-          <a:solidFill>
-            <a:schemeClr val="bg2"/>
-          </a:solidFill>
+            <a:off x="9992106" y="1803367"/>
+            <a:ext cx="1605229" cy="690946"/>
+          </a:xfrm>
+          <a:prstGeom prst="rect">
+            <a:avLst/>
+          </a:prstGeom>
           <a:ln w="9525">
             <a:solidFill>
               <a:schemeClr val="accent5"/>
@@ -6622,14 +6720,14 @@
       </p:sp>
       <p:sp>
         <p:nvSpPr>
-          <p:cNvPr id="20" name="Text 18"/>
+          <p:cNvPr id="21" name="Text 13"/>
           <p:cNvSpPr txBox="1"/>
           <p:nvPr/>
         </p:nvSpPr>
         <p:spPr>
           <a:xfrm>
-            <a:off x="10098786" y="1536192"/>
-            <a:ext cx="1407109" cy="905256"/>
+            <a:off x="9992106" y="3017520"/>
+            <a:ext cx="1605229" cy="502920"/>
           </a:xfrm>
           <a:prstGeom prst="rect">
             <a:avLst/>
@@ -6638,48 +6736,94 @@
           <a:ln/>
         </p:spPr>
         <p:txBody>
-          <a:bodyPr wrap="square" lIns="0" tIns="0" rIns="0" bIns="0" rtlCol="0" anchor="ctr"/>
+          <a:bodyPr wrap="square" lIns="0" tIns="0" rIns="0" bIns="0" rtlCol="0" anchor="t"/>
           <a:lstStyle/>
           <a:p>
             <a:pPr algn="ctr" indent="0" marL="0">
               <a:buNone/>
             </a:pPr>
             <a:r>
-              <a:rPr lang="en-US" sz="1500" b="1" dirty="0">
+              <a:rPr lang="en-US" sz="1300" b="1" dirty="0">
                 <a:solidFill>
                   <a:schemeClr val="tx1"/>
                 </a:solidFill>
               </a:rPr>
-              <a:t>Station sol</a:t>
-            </a:r>
-            <a:endParaRPr lang="en-US" sz="1500" dirty="0"/>
+              <a:t>Module GNSS</a:t>
+            </a:r>
+            <a:endParaRPr lang="en-US" sz="1300" dirty="0"/>
           </a:p>
           <a:p>
             <a:pPr algn="ctr" indent="0" marL="0">
               <a:buNone/>
             </a:pPr>
             <a:r>
-              <a:rPr lang="en-US" sz="1200" dirty="0">
+              <a:rPr lang="en-US" sz="1100" dirty="0">
                 <a:solidFill>
                   <a:schemeClr val="tx2"/>
                 </a:solidFill>
               </a:rPr>
-              <a:t>par la liaison sécurisée</a:t>
-            </a:r>
-            <a:endParaRPr lang="en-US" sz="1500" dirty="0"/>
-          </a:p>
-        </p:txBody>
-      </p:sp>
-      <p:sp>
-        <p:nvSpPr>
-          <p:cNvPr id="21" name="Text 19"/>
+              <a:t>position et compas</a:t>
+            </a:r>
+            <a:endParaRPr lang="en-US" sz="1300" dirty="0"/>
+          </a:p>
+        </p:txBody>
+      </p:sp>
+      <p:pic>
+        <p:nvPicPr>
+          <p:cNvPr id="22" name="Image 6" descr="Vue CAO du drone">    </p:cNvPr>
+          <p:cNvPicPr>
+            <a:picLocks noChangeAspect="1"/>
+          </p:cNvPicPr>
+          <p:nvPr/>
+        </p:nvPicPr>
+        <p:blipFill>
+          <a:blip r:embed="rId7"/>
+          <a:stretch>
+            <a:fillRect/>
+          </a:stretch>
+        </p:blipFill>
+        <p:spPr>
+          <a:xfrm>
+            <a:off x="594360" y="4104907"/>
+            <a:ext cx="1605229" cy="842745"/>
+          </a:xfrm>
+          <a:prstGeom prst="rect">
+            <a:avLst/>
+          </a:prstGeom>
+        </p:spPr>
+      </p:pic>
+      <p:sp>
+        <p:nvSpPr>
+          <p:cNvPr id="23" name="Cadre pitot"/>
+          <p:cNvSpPr/>
+          <p:nvPr/>
+        </p:nvSpPr>
+        <p:spPr>
+          <a:xfrm>
+            <a:off x="594360" y="4104907"/>
+            <a:ext cx="1605229" cy="842745"/>
+          </a:xfrm>
+          <a:prstGeom prst="rect">
+            <a:avLst/>
+          </a:prstGeom>
+          <a:ln w="9525">
+            <a:solidFill>
+              <a:schemeClr val="accent5"/>
+            </a:solidFill>
+            <a:prstDash val="solid"/>
+          </a:ln>
+        </p:spPr>
+      </p:sp>
+      <p:sp>
+        <p:nvSpPr>
+          <p:cNvPr id="24" name="Text 15"/>
           <p:cNvSpPr txBox="1"/>
           <p:nvPr/>
         </p:nvSpPr>
         <p:spPr>
           <a:xfrm>
-            <a:off x="594360" y="2880360"/>
-            <a:ext cx="5227168" cy="365760"/>
+            <a:off x="594360" y="5394960"/>
+            <a:ext cx="1605229" cy="502920"/>
           </a:xfrm>
           <a:prstGeom prst="rect">
             <a:avLst/>
@@ -6688,6 +6832,536 @@
           <a:ln/>
         </p:spPr>
         <p:txBody>
+          <a:bodyPr wrap="square" lIns="0" tIns="0" rIns="0" bIns="0" rtlCol="0" anchor="t"/>
+          <a:lstStyle/>
+          <a:p>
+            <a:pPr algn="ctr" indent="0" marL="0">
+              <a:buNone/>
+            </a:pPr>
+            <a:r>
+              <a:rPr lang="en-US" sz="1300" b="1" dirty="0">
+                <a:solidFill>
+                  <a:schemeClr val="tx1"/>
+                </a:solidFill>
+              </a:rPr>
+              <a:t>Tube de Pitot</a:t>
+            </a:r>
+            <a:endParaRPr lang="en-US" sz="1300" dirty="0"/>
+          </a:p>
+          <a:p>
+            <a:pPr algn="ctr" indent="0" marL="0">
+              <a:buNone/>
+            </a:pPr>
+            <a:r>
+              <a:rPr lang="en-US" sz="1100" dirty="0">
+                <a:solidFill>
+                  <a:schemeClr val="tx2"/>
+                </a:solidFill>
+              </a:rPr>
+              <a:t>vitesse air</a:t>
+            </a:r>
+            <a:endParaRPr lang="en-US" sz="1300" dirty="0"/>
+          </a:p>
+        </p:txBody>
+      </p:sp>
+      <p:pic>
+        <p:nvPicPr>
+          <p:cNvPr id="25" name="Image 7" descr="Vue CAO du drone">    </p:cNvPr>
+          <p:cNvPicPr>
+            <a:picLocks noChangeAspect="1"/>
+          </p:cNvPicPr>
+          <p:nvPr/>
+        </p:nvPicPr>
+        <p:blipFill>
+          <a:blip r:embed="rId8"/>
+          <a:stretch>
+            <a:fillRect/>
+          </a:stretch>
+        </p:blipFill>
+        <p:spPr>
+          <a:xfrm>
+            <a:off x="2473909" y="3915146"/>
+            <a:ext cx="1605229" cy="1222267"/>
+          </a:xfrm>
+          <a:prstGeom prst="rect">
+            <a:avLst/>
+          </a:prstGeom>
+        </p:spPr>
+      </p:pic>
+      <p:sp>
+        <p:nvSpPr>
+          <p:cNvPr id="26" name="Cadre radio_longue_portee"/>
+          <p:cNvSpPr/>
+          <p:nvPr/>
+        </p:nvSpPr>
+        <p:spPr>
+          <a:xfrm>
+            <a:off x="2473909" y="3915146"/>
+            <a:ext cx="1605229" cy="1222267"/>
+          </a:xfrm>
+          <a:prstGeom prst="rect">
+            <a:avLst/>
+          </a:prstGeom>
+          <a:ln w="9525">
+            <a:solidFill>
+              <a:schemeClr val="accent5"/>
+            </a:solidFill>
+            <a:prstDash val="solid"/>
+          </a:ln>
+        </p:spPr>
+      </p:sp>
+      <p:sp>
+        <p:nvSpPr>
+          <p:cNvPr id="27" name="Text 17"/>
+          <p:cNvSpPr txBox="1"/>
+          <p:nvPr/>
+        </p:nvSpPr>
+        <p:spPr>
+          <a:xfrm>
+            <a:off x="2473909" y="5394960"/>
+            <a:ext cx="1605229" cy="502920"/>
+          </a:xfrm>
+          <a:prstGeom prst="rect">
+            <a:avLst/>
+          </a:prstGeom>
+          <a:noFill/>
+          <a:ln/>
+        </p:spPr>
+        <p:txBody>
+          <a:bodyPr wrap="square" lIns="0" tIns="0" rIns="0" bIns="0" rtlCol="0" anchor="t"/>
+          <a:lstStyle/>
+          <a:p>
+            <a:pPr algn="ctr" indent="0" marL="0">
+              <a:buNone/>
+            </a:pPr>
+            <a:r>
+              <a:rPr lang="en-US" sz="1300" b="1" dirty="0">
+                <a:solidFill>
+                  <a:schemeClr val="tx1"/>
+                </a:solidFill>
+              </a:rPr>
+              <a:t>Radio longue portée</a:t>
+            </a:r>
+            <a:endParaRPr lang="en-US" sz="1300" dirty="0"/>
+          </a:p>
+          <a:p>
+            <a:pPr algn="ctr" indent="0" marL="0">
+              <a:buNone/>
+            </a:pPr>
+            <a:r>
+              <a:rPr lang="en-US" sz="1100" dirty="0">
+                <a:solidFill>
+                  <a:schemeClr val="tx2"/>
+                </a:solidFill>
+              </a:rPr>
+              <a:t>télémétrie chiffrée</a:t>
+            </a:r>
+            <a:endParaRPr lang="en-US" sz="1300" dirty="0"/>
+          </a:p>
+        </p:txBody>
+      </p:sp>
+      <p:pic>
+        <p:nvPicPr>
+          <p:cNvPr id="28" name="Image 8" descr="Vue CAO du drone">    </p:cNvPr>
+          <p:cNvPicPr>
+            <a:picLocks noChangeAspect="1"/>
+          </p:cNvPicPr>
+          <p:nvPr/>
+        </p:nvPicPr>
+        <p:blipFill>
+          <a:blip r:embed="rId9"/>
+          <a:stretch>
+            <a:fillRect/>
+          </a:stretch>
+        </p:blipFill>
+        <p:spPr>
+          <a:xfrm>
+            <a:off x="4353458" y="3924319"/>
+            <a:ext cx="1605229" cy="1203922"/>
+          </a:xfrm>
+          <a:prstGeom prst="rect">
+            <a:avLst/>
+          </a:prstGeom>
+        </p:spPr>
+      </p:pic>
+      <p:sp>
+        <p:nvSpPr>
+          <p:cNvPr id="29" name="Cadre radios_rc"/>
+          <p:cNvSpPr/>
+          <p:nvPr/>
+        </p:nvSpPr>
+        <p:spPr>
+          <a:xfrm>
+            <a:off x="4353458" y="3924319"/>
+            <a:ext cx="1605229" cy="1203922"/>
+          </a:xfrm>
+          <a:prstGeom prst="rect">
+            <a:avLst/>
+          </a:prstGeom>
+          <a:ln w="9525">
+            <a:solidFill>
+              <a:schemeClr val="accent5"/>
+            </a:solidFill>
+            <a:prstDash val="solid"/>
+          </a:ln>
+        </p:spPr>
+      </p:sp>
+      <p:sp>
+        <p:nvSpPr>
+          <p:cNvPr id="30" name="Text 19"/>
+          <p:cNvSpPr txBox="1"/>
+          <p:nvPr/>
+        </p:nvSpPr>
+        <p:spPr>
+          <a:xfrm>
+            <a:off x="4353458" y="5394960"/>
+            <a:ext cx="1605229" cy="502920"/>
+          </a:xfrm>
+          <a:prstGeom prst="rect">
+            <a:avLst/>
+          </a:prstGeom>
+          <a:noFill/>
+          <a:ln/>
+        </p:spPr>
+        <p:txBody>
+          <a:bodyPr wrap="square" lIns="0" tIns="0" rIns="0" bIns="0" rtlCol="0" anchor="t"/>
+          <a:lstStyle/>
+          <a:p>
+            <a:pPr algn="ctr" indent="0" marL="0">
+              <a:buNone/>
+            </a:pPr>
+            <a:r>
+              <a:rPr lang="en-US" sz="1300" b="1" dirty="0">
+                <a:solidFill>
+                  <a:schemeClr val="tx1"/>
+                </a:solidFill>
+              </a:rPr>
+              <a:t>Radiocommande</a:t>
+            </a:r>
+            <a:endParaRPr lang="en-US" sz="1300" dirty="0"/>
+          </a:p>
+          <a:p>
+            <a:pPr algn="ctr" indent="0" marL="0">
+              <a:buNone/>
+            </a:pPr>
+            <a:r>
+              <a:rPr lang="en-US" sz="1100" dirty="0">
+                <a:solidFill>
+                  <a:schemeClr val="tx2"/>
+                </a:solidFill>
+              </a:rPr>
+              <a:t>pilotage et canal d'urgence</a:t>
+            </a:r>
+            <a:endParaRPr lang="en-US" sz="1300" dirty="0"/>
+          </a:p>
+        </p:txBody>
+      </p:sp>
+      <p:pic>
+        <p:nvPicPr>
+          <p:cNvPr id="31" name="Image 9" descr="Vue CAO du drone">    </p:cNvPr>
+          <p:cNvPicPr>
+            <a:picLocks noChangeAspect="1"/>
+          </p:cNvPicPr>
+          <p:nvPr/>
+        </p:nvPicPr>
+        <p:blipFill>
+          <a:blip r:embed="rId10"/>
+          <a:stretch>
+            <a:fillRect/>
+          </a:stretch>
+        </p:blipFill>
+        <p:spPr>
+          <a:xfrm>
+            <a:off x="6233008" y="3991204"/>
+            <a:ext cx="1605229" cy="1070153"/>
+          </a:xfrm>
+          <a:prstGeom prst="rect">
+            <a:avLst/>
+          </a:prstGeom>
+        </p:spPr>
+      </p:pic>
+      <p:sp>
+        <p:nvSpPr>
+          <p:cNvPr id="32" name="Cadre raspberry_pi5"/>
+          <p:cNvSpPr/>
+          <p:nvPr/>
+        </p:nvSpPr>
+        <p:spPr>
+          <a:xfrm>
+            <a:off x="6233008" y="3991204"/>
+            <a:ext cx="1605229" cy="1070153"/>
+          </a:xfrm>
+          <a:prstGeom prst="rect">
+            <a:avLst/>
+          </a:prstGeom>
+          <a:ln w="9525">
+            <a:solidFill>
+              <a:schemeClr val="accent5"/>
+            </a:solidFill>
+            <a:prstDash val="solid"/>
+          </a:ln>
+        </p:spPr>
+      </p:sp>
+      <p:sp>
+        <p:nvSpPr>
+          <p:cNvPr id="33" name="Text 21"/>
+          <p:cNvSpPr txBox="1"/>
+          <p:nvPr/>
+        </p:nvSpPr>
+        <p:spPr>
+          <a:xfrm>
+            <a:off x="6233008" y="5394960"/>
+            <a:ext cx="1605229" cy="502920"/>
+          </a:xfrm>
+          <a:prstGeom prst="rect">
+            <a:avLst/>
+          </a:prstGeom>
+          <a:noFill/>
+          <a:ln/>
+        </p:spPr>
+        <p:txBody>
+          <a:bodyPr wrap="square" lIns="0" tIns="0" rIns="0" bIns="0" rtlCol="0" anchor="t"/>
+          <a:lstStyle/>
+          <a:p>
+            <a:pPr algn="ctr" indent="0" marL="0">
+              <a:buNone/>
+            </a:pPr>
+            <a:r>
+              <a:rPr lang="en-US" sz="1300" b="1" dirty="0">
+                <a:solidFill>
+                  <a:schemeClr val="tx1"/>
+                </a:solidFill>
+              </a:rPr>
+              <a:t>Raspberry Pi 5</a:t>
+            </a:r>
+            <a:endParaRPr lang="en-US" sz="1300" dirty="0"/>
+          </a:p>
+          <a:p>
+            <a:pPr algn="ctr" indent="0" marL="0">
+              <a:buNone/>
+            </a:pPr>
+            <a:r>
+              <a:rPr lang="en-US" sz="1100" dirty="0">
+                <a:solidFill>
+                  <a:schemeClr val="tx2"/>
+                </a:solidFill>
+              </a:rPr>
+              <a:t>ordinateur du module IA</a:t>
+            </a:r>
+            <a:endParaRPr lang="en-US" sz="1300" dirty="0"/>
+          </a:p>
+        </p:txBody>
+      </p:sp>
+      <p:pic>
+        <p:nvPicPr>
+          <p:cNvPr id="34" name="Image 10" descr="Vue CAO du drone">    </p:cNvPr>
+          <p:cNvPicPr>
+            <a:picLocks noChangeAspect="1"/>
+          </p:cNvPicPr>
+          <p:nvPr/>
+        </p:nvPicPr>
+        <p:blipFill>
+          <a:blip r:embed="rId11"/>
+          <a:stretch>
+            <a:fillRect/>
+          </a:stretch>
+        </p:blipFill>
+        <p:spPr>
+          <a:xfrm>
+            <a:off x="8112557" y="3991204"/>
+            <a:ext cx="1605229" cy="1070153"/>
+          </a:xfrm>
+          <a:prstGeom prst="rect">
+            <a:avLst/>
+          </a:prstGeom>
+        </p:spPr>
+      </p:pic>
+      <p:sp>
+        <p:nvSpPr>
+          <p:cNvPr id="35" name="Cadre ai_hat_plus"/>
+          <p:cNvSpPr/>
+          <p:nvPr/>
+        </p:nvSpPr>
+        <p:spPr>
+          <a:xfrm>
+            <a:off x="8112557" y="3991204"/>
+            <a:ext cx="1605229" cy="1070153"/>
+          </a:xfrm>
+          <a:prstGeom prst="rect">
+            <a:avLst/>
+          </a:prstGeom>
+          <a:ln w="9525">
+            <a:solidFill>
+              <a:schemeClr val="accent5"/>
+            </a:solidFill>
+            <a:prstDash val="solid"/>
+          </a:ln>
+        </p:spPr>
+      </p:sp>
+      <p:sp>
+        <p:nvSpPr>
+          <p:cNvPr id="36" name="Text 23"/>
+          <p:cNvSpPr txBox="1"/>
+          <p:nvPr/>
+        </p:nvSpPr>
+        <p:spPr>
+          <a:xfrm>
+            <a:off x="8112557" y="5394960"/>
+            <a:ext cx="1605229" cy="502920"/>
+          </a:xfrm>
+          <a:prstGeom prst="rect">
+            <a:avLst/>
+          </a:prstGeom>
+          <a:noFill/>
+          <a:ln/>
+        </p:spPr>
+        <p:txBody>
+          <a:bodyPr wrap="square" lIns="0" tIns="0" rIns="0" bIns="0" rtlCol="0" anchor="t"/>
+          <a:lstStyle/>
+          <a:p>
+            <a:pPr algn="ctr" indent="0" marL="0">
+              <a:buNone/>
+            </a:pPr>
+            <a:r>
+              <a:rPr lang="en-US" sz="1300" b="1" dirty="0">
+                <a:solidFill>
+                  <a:schemeClr val="tx1"/>
+                </a:solidFill>
+              </a:rPr>
+              <a:t>AI HAT+ (Hailo-8)</a:t>
+            </a:r>
+            <a:endParaRPr lang="en-US" sz="1300" dirty="0"/>
+          </a:p>
+          <a:p>
+            <a:pPr algn="ctr" indent="0" marL="0">
+              <a:buNone/>
+            </a:pPr>
+            <a:r>
+              <a:rPr lang="en-US" sz="1100" dirty="0">
+                <a:solidFill>
+                  <a:schemeClr val="tx2"/>
+                </a:solidFill>
+              </a:rPr>
+              <a:t>accélérateur d'IA, 26 TOPS</a:t>
+            </a:r>
+            <a:endParaRPr lang="en-US" sz="1300" dirty="0"/>
+          </a:p>
+        </p:txBody>
+      </p:sp>
+      <p:pic>
+        <p:nvPicPr>
+          <p:cNvPr id="37" name="Image 11" descr="Vue CAO du drone">    </p:cNvPr>
+          <p:cNvPicPr>
+            <a:picLocks noChangeAspect="1"/>
+          </p:cNvPicPr>
+          <p:nvPr/>
+        </p:nvPicPr>
+        <p:blipFill>
+          <a:blip r:embed="rId12"/>
+          <a:stretch>
+            <a:fillRect/>
+          </a:stretch>
+        </p:blipFill>
+        <p:spPr>
+          <a:xfrm>
+            <a:off x="10263779" y="3703320"/>
+            <a:ext cx="1061884" cy="1645920"/>
+          </a:xfrm>
+          <a:prstGeom prst="rect">
+            <a:avLst/>
+          </a:prstGeom>
+        </p:spPr>
+      </p:pic>
+      <p:sp>
+        <p:nvSpPr>
+          <p:cNvPr id="38" name="Cadre camera"/>
+          <p:cNvSpPr/>
+          <p:nvPr/>
+        </p:nvSpPr>
+        <p:spPr>
+          <a:xfrm>
+            <a:off x="10263779" y="3703320"/>
+            <a:ext cx="1061884" cy="1645920"/>
+          </a:xfrm>
+          <a:prstGeom prst="rect">
+            <a:avLst/>
+          </a:prstGeom>
+          <a:ln w="9525">
+            <a:solidFill>
+              <a:schemeClr val="accent5"/>
+            </a:solidFill>
+            <a:prstDash val="solid"/>
+          </a:ln>
+        </p:spPr>
+      </p:sp>
+      <p:sp>
+        <p:nvSpPr>
+          <p:cNvPr id="39" name="Text 25"/>
+          <p:cNvSpPr txBox="1"/>
+          <p:nvPr/>
+        </p:nvSpPr>
+        <p:spPr>
+          <a:xfrm>
+            <a:off x="9992106" y="5394960"/>
+            <a:ext cx="1605229" cy="502920"/>
+          </a:xfrm>
+          <a:prstGeom prst="rect">
+            <a:avLst/>
+          </a:prstGeom>
+          <a:noFill/>
+          <a:ln/>
+        </p:spPr>
+        <p:txBody>
+          <a:bodyPr wrap="square" lIns="0" tIns="0" rIns="0" bIns="0" rtlCol="0" anchor="t"/>
+          <a:lstStyle/>
+          <a:p>
+            <a:pPr algn="ctr" indent="0" marL="0">
+              <a:buNone/>
+            </a:pPr>
+            <a:r>
+              <a:rPr lang="en-US" sz="1300" b="1" dirty="0">
+                <a:solidFill>
+                  <a:schemeClr val="tx1"/>
+                </a:solidFill>
+              </a:rPr>
+              <a:t>Caméra</a:t>
+            </a:r>
+            <a:endParaRPr lang="en-US" sz="1300" dirty="0"/>
+          </a:p>
+          <a:p>
+            <a:pPr algn="ctr" indent="0" marL="0">
+              <a:buNone/>
+            </a:pPr>
+            <a:r>
+              <a:rPr lang="en-US" sz="1100" dirty="0">
+                <a:solidFill>
+                  <a:schemeClr val="tx2"/>
+                </a:solidFill>
+              </a:rPr>
+              <a:t>images pour l'IA</a:t>
+            </a:r>
+            <a:endParaRPr lang="en-US" sz="1300" dirty="0"/>
+          </a:p>
+        </p:txBody>
+      </p:sp>
+      <p:sp>
+        <p:nvSpPr>
+          <p:cNvPr id="40" name="Text 26"/>
+          <p:cNvSpPr txBox="1"/>
+          <p:nvPr/>
+        </p:nvSpPr>
+        <p:spPr>
+          <a:xfrm>
+            <a:off x="594360" y="6053328"/>
+            <a:ext cx="11002975" cy="201168"/>
+          </a:xfrm>
+          <a:prstGeom prst="rect">
+            <a:avLst/>
+          </a:prstGeom>
+          <a:noFill/>
+          <a:ln/>
+        </p:spPr>
+        <p:txBody>
           <a:bodyPr wrap="square" lIns="0" tIns="0" rIns="0" bIns="0" rtlCol="0" anchor="ctr"/>
           <a:lstStyle/>
           <a:p>
@@ -6695,202 +7369,14 @@
               <a:buNone/>
             </a:pPr>
             <a:r>
-              <a:rPr lang="en-US" sz="1800" b="1" dirty="0">
-                <a:solidFill>
-                  <a:schemeClr val="accent1"/>
-                </a:solidFill>
-              </a:rPr>
-              <a:t>Matériel</a:t>
-            </a:r>
-            <a:endParaRPr lang="en-US" sz="1800" dirty="0"/>
-          </a:p>
-        </p:txBody>
-      </p:sp>
-      <p:sp>
-        <p:nvSpPr>
-          <p:cNvPr id="22" name="Text 20"/>
-          <p:cNvSpPr txBox="1"/>
-          <p:nvPr/>
-        </p:nvSpPr>
-        <p:spPr>
-          <a:xfrm>
-            <a:off x="594360" y="3337560"/>
-            <a:ext cx="5227168" cy="2560320"/>
-          </a:xfrm>
-          <a:prstGeom prst="rect">
-            <a:avLst/>
-          </a:prstGeom>
-          <a:noFill/>
-          <a:ln/>
-        </p:spPr>
-        <p:txBody>
-          <a:bodyPr wrap="square" lIns="0" tIns="0" rIns="0" bIns="0" rtlCol="0" anchor="t"/>
-          <a:lstStyle/>
-          <a:p>
-            <a:pPr marL="228600" indent="-228600">
-              <a:spcAft>
-                <a:spcPts val="800"/>
-              </a:spcAft>
-              <a:buSzPct val="100000"/>
-              <a:buChar char="•"/>
-            </a:pPr>
-            <a:r>
-              <a:rPr lang="en-US" sz="1600" dirty="0">
-                <a:solidFill>
-                  <a:schemeClr val="tx1"/>
-                </a:solidFill>
-              </a:rPr>
-              <a:t>Raspberry Pi 5</a:t>
-            </a:r>
-            <a:endParaRPr lang="en-US" sz="1600" dirty="0"/>
-          </a:p>
-          <a:p>
-            <a:pPr marL="228600" indent="-228600">
-              <a:spcAft>
-                <a:spcPts val="800"/>
-              </a:spcAft>
-              <a:buSzPct val="100000"/>
-              <a:buChar char="•"/>
-            </a:pPr>
-            <a:r>
-              <a:rPr lang="en-US" sz="1600" dirty="0">
-                <a:solidFill>
-                  <a:schemeClr val="tx1"/>
-                </a:solidFill>
-              </a:rPr>
-              <a:t>AI HAT+ 26 TOPS (puce Hailo-8)</a:t>
-            </a:r>
-            <a:endParaRPr lang="en-US" sz="1600" dirty="0"/>
-          </a:p>
-          <a:p>
-            <a:pPr marL="228600" indent="-228600">
-              <a:spcAft>
-                <a:spcPts val="800"/>
-              </a:spcAft>
-              <a:buSzPct val="100000"/>
-              <a:buChar char="•"/>
-            </a:pPr>
-            <a:r>
-              <a:rPr lang="en-US" sz="1600" dirty="0">
-                <a:solidFill>
-                  <a:schemeClr val="tx1"/>
-                </a:solidFill>
-              </a:rPr>
-              <a:t>Séparé du contrôleur de vol</a:t>
-            </a:r>
-            <a:endParaRPr lang="en-US" sz="1600" dirty="0"/>
-          </a:p>
-        </p:txBody>
-      </p:sp>
-      <p:sp>
-        <p:nvSpPr>
-          <p:cNvPr id="23" name="Text 21"/>
-          <p:cNvSpPr txBox="1"/>
-          <p:nvPr/>
-        </p:nvSpPr>
-        <p:spPr>
-          <a:xfrm>
-            <a:off x="6370168" y="2880360"/>
-            <a:ext cx="5227168" cy="365760"/>
-          </a:xfrm>
-          <a:prstGeom prst="rect">
-            <a:avLst/>
-          </a:prstGeom>
-          <a:noFill/>
-          <a:ln/>
-        </p:spPr>
-        <p:txBody>
-          <a:bodyPr wrap="square" lIns="0" tIns="0" rIns="0" bIns="0" rtlCol="0" anchor="ctr"/>
-          <a:lstStyle/>
-          <a:p>
-            <a:pPr indent="0" marL="0">
-              <a:buNone/>
-            </a:pPr>
-            <a:r>
-              <a:rPr lang="en-US" sz="1800" b="1" dirty="0">
-                <a:solidFill>
-                  <a:schemeClr val="accent1"/>
-                </a:solidFill>
-              </a:rPr>
-              <a:t>Ce qu'il détecte</a:t>
-            </a:r>
-            <a:endParaRPr lang="en-US" sz="1800" dirty="0"/>
-          </a:p>
-        </p:txBody>
-      </p:sp>
-      <p:sp>
-        <p:nvSpPr>
-          <p:cNvPr id="24" name="Text 22"/>
-          <p:cNvSpPr txBox="1"/>
-          <p:nvPr/>
-        </p:nvSpPr>
-        <p:spPr>
-          <a:xfrm>
-            <a:off x="6370168" y="3337560"/>
-            <a:ext cx="5227168" cy="2560320"/>
-          </a:xfrm>
-          <a:prstGeom prst="rect">
-            <a:avLst/>
-          </a:prstGeom>
-          <a:noFill/>
-          <a:ln/>
-        </p:spPr>
-        <p:txBody>
-          <a:bodyPr wrap="square" lIns="0" tIns="0" rIns="0" bIns="0" rtlCol="0" anchor="t"/>
-          <a:lstStyle/>
-          <a:p>
-            <a:pPr marL="228600" indent="-228600">
-              <a:spcAft>
-                <a:spcPts val="800"/>
-              </a:spcAft>
-              <a:buSzPct val="100000"/>
-              <a:buChar char="•"/>
-            </a:pPr>
-            <a:r>
-              <a:rPr lang="en-US" sz="1600" dirty="0">
-                <a:solidFill>
-                  <a:schemeClr val="tx1"/>
-                </a:solidFill>
-              </a:rPr>
-              <a:t>Personnes</a:t>
-            </a:r>
-            <a:endParaRPr lang="en-US" sz="1600" dirty="0"/>
-          </a:p>
-          <a:p>
-            <a:pPr marL="228600" indent="-228600">
-              <a:spcAft>
-                <a:spcPts val="800"/>
-              </a:spcAft>
-              <a:buSzPct val="100000"/>
-              <a:buChar char="•"/>
-            </a:pPr>
-            <a:r>
-              <a:rPr lang="en-US" sz="1600" dirty="0">
-                <a:solidFill>
-                  <a:schemeClr val="tx1"/>
-                </a:solidFill>
-              </a:rPr>
-              <a:t>Véhicules</a:t>
-            </a:r>
-            <a:endParaRPr lang="en-US" sz="1600" dirty="0"/>
-          </a:p>
-          <a:p>
-            <a:pPr marL="228600" indent="-228600">
-              <a:spcAft>
-                <a:spcPts val="800"/>
-              </a:spcAft>
-              <a:buSzPct val="100000"/>
-              <a:buChar char="•"/>
-            </a:pPr>
-            <a:r>
-              <a:rPr lang="en-US" sz="1600" dirty="0">
-                <a:solidFill>
-                  <a:schemeClr val="tx1"/>
-                </a:solidFill>
-              </a:rPr>
-              <a:t>Débris et objets au sol</a:t>
-            </a:r>
-            <a:endParaRPr lang="en-US" sz="1600" dirty="0"/>
+              <a:rPr lang="en-US" sz="900" i="1" dirty="0">
+                <a:solidFill>
+                  <a:schemeClr val="tx2"/>
+                </a:solidFill>
+              </a:rPr>
+              <a:t>Photos de composants (exemples) : wiki ArduPilot, CC BY-SA 3.0 ; Raspberry Pi Ltd, CC BY-SA 4.0.</a:t>
+            </a:r>
+            <a:endParaRPr lang="en-US" sz="900" dirty="0"/>
           </a:p>
         </p:txBody>
       </p:sp>
@@ -6996,7 +7482,7 @@
                   <a:schemeClr val="tx1"/>
                 </a:solidFill>
               </a:rPr>
-              <a:t>Données et fiabilité de l'IA</a:t>
+              <a:t>Le module d'intelligence artificielle</a:t>
             </a:r>
             <a:endParaRPr lang="en-US" sz="3000" dirty="0"/>
           </a:p>
@@ -7040,14 +7526,39 @@
       </p:sp>
       <p:sp>
         <p:nvSpPr>
-          <p:cNvPr id="4" name="Text 2"/>
+          <p:cNvPr id="4" name="Étape 1"/>
+          <p:cNvSpPr/>
+          <p:nvPr/>
+        </p:nvSpPr>
+        <p:spPr>
+          <a:xfrm>
+            <a:off x="594360" y="1463040"/>
+            <a:ext cx="1589989" cy="1051560"/>
+          </a:xfrm>
+          <a:prstGeom prst="rect">
+            <a:avLst/>
+          </a:prstGeom>
+          <a:solidFill>
+            <a:schemeClr val="bg2"/>
+          </a:solidFill>
+          <a:ln w="9525">
+            <a:solidFill>
+              <a:schemeClr val="accent5"/>
+            </a:solidFill>
+            <a:prstDash val="solid"/>
+          </a:ln>
+        </p:spPr>
+      </p:sp>
+      <p:sp>
+        <p:nvSpPr>
+          <p:cNvPr id="5" name="Text 3"/>
           <p:cNvSpPr txBox="1"/>
           <p:nvPr/>
         </p:nvSpPr>
         <p:spPr>
           <a:xfrm>
-            <a:off x="594360" y="1417320"/>
-            <a:ext cx="5227168" cy="365760"/>
+            <a:off x="685800" y="1536192"/>
+            <a:ext cx="1407109" cy="905256"/>
           </a:xfrm>
           <a:prstGeom prst="rect">
             <a:avLst/>
@@ -7059,6 +7570,551 @@
           <a:bodyPr wrap="square" lIns="0" tIns="0" rIns="0" bIns="0" rtlCol="0" anchor="ctr"/>
           <a:lstStyle/>
           <a:p>
+            <a:pPr algn="ctr" indent="0" marL="0">
+              <a:buNone/>
+            </a:pPr>
+            <a:r>
+              <a:rPr lang="en-US" sz="1500" b="1" dirty="0">
+                <a:solidFill>
+                  <a:schemeClr val="tx1"/>
+                </a:solidFill>
+              </a:rPr>
+              <a:t>Caméra</a:t>
+            </a:r>
+            <a:endParaRPr lang="en-US" sz="1500" dirty="0"/>
+          </a:p>
+          <a:p>
+            <a:pPr algn="ctr" indent="0" marL="0">
+              <a:buNone/>
+            </a:pPr>
+            <a:r>
+              <a:rPr lang="en-US" sz="1200" dirty="0">
+                <a:solidFill>
+                  <a:schemeClr val="tx2"/>
+                </a:solidFill>
+              </a:rPr>
+              <a:t>images horodatées</a:t>
+            </a:r>
+            <a:endParaRPr lang="en-US" sz="1500" dirty="0"/>
+          </a:p>
+        </p:txBody>
+      </p:sp>
+      <p:sp>
+        <p:nvSpPr>
+          <p:cNvPr id="6" name="Shape 4"/>
+          <p:cNvSpPr/>
+          <p:nvPr/>
+        </p:nvSpPr>
+        <p:spPr>
+          <a:xfrm>
+            <a:off x="2220925" y="1988820"/>
+            <a:ext cx="219456" cy="0"/>
+          </a:xfrm>
+          <a:prstGeom prst="line">
+            <a:avLst/>
+          </a:prstGeom>
+          <a:noFill/>
+          <a:ln w="19050">
+            <a:solidFill>
+              <a:schemeClr val="tx2"/>
+            </a:solidFill>
+            <a:prstDash val="solid"/>
+            <a:tailEnd type="triangle"/>
+          </a:ln>
+        </p:spPr>
+      </p:sp>
+      <p:sp>
+        <p:nvSpPr>
+          <p:cNvPr id="7" name="Étape 2"/>
+          <p:cNvSpPr/>
+          <p:nvPr/>
+        </p:nvSpPr>
+        <p:spPr>
+          <a:xfrm>
+            <a:off x="2476957" y="1463040"/>
+            <a:ext cx="1589989" cy="1051560"/>
+          </a:xfrm>
+          <a:prstGeom prst="rect">
+            <a:avLst/>
+          </a:prstGeom>
+          <a:solidFill>
+            <a:schemeClr val="bg2"/>
+          </a:solidFill>
+          <a:ln w="9525">
+            <a:solidFill>
+              <a:schemeClr val="accent5"/>
+            </a:solidFill>
+            <a:prstDash val="solid"/>
+          </a:ln>
+        </p:spPr>
+      </p:sp>
+      <p:sp>
+        <p:nvSpPr>
+          <p:cNvPr id="8" name="Text 6"/>
+          <p:cNvSpPr txBox="1"/>
+          <p:nvPr/>
+        </p:nvSpPr>
+        <p:spPr>
+          <a:xfrm>
+            <a:off x="2568397" y="1536192"/>
+            <a:ext cx="1407109" cy="905256"/>
+          </a:xfrm>
+          <a:prstGeom prst="rect">
+            <a:avLst/>
+          </a:prstGeom>
+          <a:noFill/>
+          <a:ln/>
+        </p:spPr>
+        <p:txBody>
+          <a:bodyPr wrap="square" lIns="0" tIns="0" rIns="0" bIns="0" rtlCol="0" anchor="ctr"/>
+          <a:lstStyle/>
+          <a:p>
+            <a:pPr algn="ctr" indent="0" marL="0">
+              <a:buNone/>
+            </a:pPr>
+            <a:r>
+              <a:rPr lang="en-US" sz="1500" b="1" dirty="0">
+                <a:solidFill>
+                  <a:schemeClr val="tx1"/>
+                </a:solidFill>
+              </a:rPr>
+              <a:t>Détection</a:t>
+            </a:r>
+            <a:endParaRPr lang="en-US" sz="1500" dirty="0"/>
+          </a:p>
+          <a:p>
+            <a:pPr algn="ctr" indent="0" marL="0">
+              <a:buNone/>
+            </a:pPr>
+            <a:r>
+              <a:rPr lang="en-US" sz="1200" dirty="0">
+                <a:solidFill>
+                  <a:schemeClr val="tx2"/>
+                </a:solidFill>
+              </a:rPr>
+              <a:t>YOLOv8s sur Hailo-8</a:t>
+            </a:r>
+            <a:endParaRPr lang="en-US" sz="1500" dirty="0"/>
+          </a:p>
+        </p:txBody>
+      </p:sp>
+      <p:sp>
+        <p:nvSpPr>
+          <p:cNvPr id="9" name="Shape 7"/>
+          <p:cNvSpPr/>
+          <p:nvPr/>
+        </p:nvSpPr>
+        <p:spPr>
+          <a:xfrm>
+            <a:off x="4103522" y="1988820"/>
+            <a:ext cx="219456" cy="0"/>
+          </a:xfrm>
+          <a:prstGeom prst="line">
+            <a:avLst/>
+          </a:prstGeom>
+          <a:noFill/>
+          <a:ln w="19050">
+            <a:solidFill>
+              <a:schemeClr val="tx2"/>
+            </a:solidFill>
+            <a:prstDash val="solid"/>
+            <a:tailEnd type="triangle"/>
+          </a:ln>
+        </p:spPr>
+      </p:sp>
+      <p:sp>
+        <p:nvSpPr>
+          <p:cNvPr id="10" name="Étape 3"/>
+          <p:cNvSpPr/>
+          <p:nvPr/>
+        </p:nvSpPr>
+        <p:spPr>
+          <a:xfrm>
+            <a:off x="4359554" y="1463040"/>
+            <a:ext cx="1589989" cy="1051560"/>
+          </a:xfrm>
+          <a:prstGeom prst="rect">
+            <a:avLst/>
+          </a:prstGeom>
+          <a:solidFill>
+            <a:schemeClr val="bg2"/>
+          </a:solidFill>
+          <a:ln w="9525">
+            <a:solidFill>
+              <a:schemeClr val="accent5"/>
+            </a:solidFill>
+            <a:prstDash val="solid"/>
+          </a:ln>
+        </p:spPr>
+      </p:sp>
+      <p:sp>
+        <p:nvSpPr>
+          <p:cNvPr id="11" name="Text 9"/>
+          <p:cNvSpPr txBox="1"/>
+          <p:nvPr/>
+        </p:nvSpPr>
+        <p:spPr>
+          <a:xfrm>
+            <a:off x="4450994" y="1536192"/>
+            <a:ext cx="1407109" cy="905256"/>
+          </a:xfrm>
+          <a:prstGeom prst="rect">
+            <a:avLst/>
+          </a:prstGeom>
+          <a:noFill/>
+          <a:ln/>
+        </p:spPr>
+        <p:txBody>
+          <a:bodyPr wrap="square" lIns="0" tIns="0" rIns="0" bIns="0" rtlCol="0" anchor="ctr"/>
+          <a:lstStyle/>
+          <a:p>
+            <a:pPr algn="ctr" indent="0" marL="0">
+              <a:buNone/>
+            </a:pPr>
+            <a:r>
+              <a:rPr lang="en-US" sz="1500" b="1" dirty="0">
+                <a:solidFill>
+                  <a:schemeClr val="tx1"/>
+                </a:solidFill>
+              </a:rPr>
+              <a:t>Zone d'intérêt</a:t>
+            </a:r>
+            <a:endParaRPr lang="en-US" sz="1500" dirty="0"/>
+          </a:p>
+          <a:p>
+            <a:pPr algn="ctr" indent="0" marL="0">
+              <a:buNone/>
+            </a:pPr>
+            <a:r>
+              <a:rPr lang="en-US" sz="1200" dirty="0">
+                <a:solidFill>
+                  <a:schemeClr val="tx2"/>
+                </a:solidFill>
+              </a:rPr>
+              <a:t>piste et abords</a:t>
+            </a:r>
+            <a:endParaRPr lang="en-US" sz="1500" dirty="0"/>
+          </a:p>
+        </p:txBody>
+      </p:sp>
+      <p:sp>
+        <p:nvSpPr>
+          <p:cNvPr id="12" name="Shape 10"/>
+          <p:cNvSpPr/>
+          <p:nvPr/>
+        </p:nvSpPr>
+        <p:spPr>
+          <a:xfrm>
+            <a:off x="5986120" y="1988820"/>
+            <a:ext cx="219456" cy="0"/>
+          </a:xfrm>
+          <a:prstGeom prst="line">
+            <a:avLst/>
+          </a:prstGeom>
+          <a:noFill/>
+          <a:ln w="19050">
+            <a:solidFill>
+              <a:schemeClr val="tx2"/>
+            </a:solidFill>
+            <a:prstDash val="solid"/>
+            <a:tailEnd type="triangle"/>
+          </a:ln>
+        </p:spPr>
+      </p:sp>
+      <p:sp>
+        <p:nvSpPr>
+          <p:cNvPr id="13" name="Étape 4"/>
+          <p:cNvSpPr/>
+          <p:nvPr/>
+        </p:nvSpPr>
+        <p:spPr>
+          <a:xfrm>
+            <a:off x="6242152" y="1463040"/>
+            <a:ext cx="1589989" cy="1051560"/>
+          </a:xfrm>
+          <a:prstGeom prst="rect">
+            <a:avLst/>
+          </a:prstGeom>
+          <a:solidFill>
+            <a:schemeClr val="bg2"/>
+          </a:solidFill>
+          <a:ln w="9525">
+            <a:solidFill>
+              <a:schemeClr val="accent5"/>
+            </a:solidFill>
+            <a:prstDash val="solid"/>
+          </a:ln>
+        </p:spPr>
+      </p:sp>
+      <p:sp>
+        <p:nvSpPr>
+          <p:cNvPr id="14" name="Text 12"/>
+          <p:cNvSpPr txBox="1"/>
+          <p:nvPr/>
+        </p:nvSpPr>
+        <p:spPr>
+          <a:xfrm>
+            <a:off x="6333592" y="1536192"/>
+            <a:ext cx="1407109" cy="905256"/>
+          </a:xfrm>
+          <a:prstGeom prst="rect">
+            <a:avLst/>
+          </a:prstGeom>
+          <a:noFill/>
+          <a:ln/>
+        </p:spPr>
+        <p:txBody>
+          <a:bodyPr wrap="square" lIns="0" tIns="0" rIns="0" bIns="0" rtlCol="0" anchor="ctr"/>
+          <a:lstStyle/>
+          <a:p>
+            <a:pPr algn="ctr" indent="0" marL="0">
+              <a:buNone/>
+            </a:pPr>
+            <a:r>
+              <a:rPr lang="en-US" sz="1500" b="1" dirty="0">
+                <a:solidFill>
+                  <a:schemeClr val="tx1"/>
+                </a:solidFill>
+              </a:rPr>
+              <a:t>Suivi</a:t>
+            </a:r>
+            <a:endParaRPr lang="en-US" sz="1500" dirty="0"/>
+          </a:p>
+          <a:p>
+            <a:pPr algn="ctr" indent="0" marL="0">
+              <a:buNone/>
+            </a:pPr>
+            <a:r>
+              <a:rPr lang="en-US" sz="1200" dirty="0">
+                <a:solidFill>
+                  <a:schemeClr val="tx2"/>
+                </a:solidFill>
+              </a:rPr>
+              <a:t>un objet, une alerte</a:t>
+            </a:r>
+            <a:endParaRPr lang="en-US" sz="1500" dirty="0"/>
+          </a:p>
+        </p:txBody>
+      </p:sp>
+      <p:sp>
+        <p:nvSpPr>
+          <p:cNvPr id="15" name="Shape 13"/>
+          <p:cNvSpPr/>
+          <p:nvPr/>
+        </p:nvSpPr>
+        <p:spPr>
+          <a:xfrm>
+            <a:off x="7868717" y="1988820"/>
+            <a:ext cx="219456" cy="0"/>
+          </a:xfrm>
+          <a:prstGeom prst="line">
+            <a:avLst/>
+          </a:prstGeom>
+          <a:noFill/>
+          <a:ln w="19050">
+            <a:solidFill>
+              <a:schemeClr val="tx2"/>
+            </a:solidFill>
+            <a:prstDash val="solid"/>
+            <a:tailEnd type="triangle"/>
+          </a:ln>
+        </p:spPr>
+      </p:sp>
+      <p:sp>
+        <p:nvSpPr>
+          <p:cNvPr id="16" name="Étape 5"/>
+          <p:cNvSpPr/>
+          <p:nvPr/>
+        </p:nvSpPr>
+        <p:spPr>
+          <a:xfrm>
+            <a:off x="8124749" y="1463040"/>
+            <a:ext cx="1589989" cy="1051560"/>
+          </a:xfrm>
+          <a:prstGeom prst="rect">
+            <a:avLst/>
+          </a:prstGeom>
+          <a:solidFill>
+            <a:schemeClr val="bg2"/>
+          </a:solidFill>
+          <a:ln w="9525">
+            <a:solidFill>
+              <a:schemeClr val="accent5"/>
+            </a:solidFill>
+            <a:prstDash val="solid"/>
+          </a:ln>
+        </p:spPr>
+      </p:sp>
+      <p:sp>
+        <p:nvSpPr>
+          <p:cNvPr id="17" name="Text 15"/>
+          <p:cNvSpPr txBox="1"/>
+          <p:nvPr/>
+        </p:nvSpPr>
+        <p:spPr>
+          <a:xfrm>
+            <a:off x="8216189" y="1536192"/>
+            <a:ext cx="1407109" cy="905256"/>
+          </a:xfrm>
+          <a:prstGeom prst="rect">
+            <a:avLst/>
+          </a:prstGeom>
+          <a:noFill/>
+          <a:ln/>
+        </p:spPr>
+        <p:txBody>
+          <a:bodyPr wrap="square" lIns="0" tIns="0" rIns="0" bIns="0" rtlCol="0" anchor="ctr"/>
+          <a:lstStyle/>
+          <a:p>
+            <a:pPr algn="ctr" indent="0" marL="0">
+              <a:buNone/>
+            </a:pPr>
+            <a:r>
+              <a:rPr lang="en-US" sz="1500" b="1" dirty="0">
+                <a:solidFill>
+                  <a:schemeClr val="tx1"/>
+                </a:solidFill>
+              </a:rPr>
+              <a:t>Alerte</a:t>
+            </a:r>
+            <a:endParaRPr lang="en-US" sz="1500" dirty="0"/>
+          </a:p>
+          <a:p>
+            <a:pPr algn="ctr" indent="0" marL="0">
+              <a:buNone/>
+            </a:pPr>
+            <a:r>
+              <a:rPr lang="en-US" sz="1200" dirty="0">
+                <a:solidFill>
+                  <a:schemeClr val="tx2"/>
+                </a:solidFill>
+              </a:rPr>
+              <a:t>avec image de preuve</a:t>
+            </a:r>
+            <a:endParaRPr lang="en-US" sz="1500" dirty="0"/>
+          </a:p>
+        </p:txBody>
+      </p:sp>
+      <p:sp>
+        <p:nvSpPr>
+          <p:cNvPr id="18" name="Shape 16"/>
+          <p:cNvSpPr/>
+          <p:nvPr/>
+        </p:nvSpPr>
+        <p:spPr>
+          <a:xfrm>
+            <a:off x="9751314" y="1988820"/>
+            <a:ext cx="219456" cy="0"/>
+          </a:xfrm>
+          <a:prstGeom prst="line">
+            <a:avLst/>
+          </a:prstGeom>
+          <a:noFill/>
+          <a:ln w="19050">
+            <a:solidFill>
+              <a:schemeClr val="tx2"/>
+            </a:solidFill>
+            <a:prstDash val="solid"/>
+            <a:tailEnd type="triangle"/>
+          </a:ln>
+        </p:spPr>
+      </p:sp>
+      <p:sp>
+        <p:nvSpPr>
+          <p:cNvPr id="19" name="Étape 6"/>
+          <p:cNvSpPr/>
+          <p:nvPr/>
+        </p:nvSpPr>
+        <p:spPr>
+          <a:xfrm>
+            <a:off x="10007346" y="1463040"/>
+            <a:ext cx="1589989" cy="1051560"/>
+          </a:xfrm>
+          <a:prstGeom prst="rect">
+            <a:avLst/>
+          </a:prstGeom>
+          <a:solidFill>
+            <a:schemeClr val="bg2"/>
+          </a:solidFill>
+          <a:ln w="9525">
+            <a:solidFill>
+              <a:schemeClr val="accent5"/>
+            </a:solidFill>
+            <a:prstDash val="solid"/>
+          </a:ln>
+        </p:spPr>
+      </p:sp>
+      <p:sp>
+        <p:nvSpPr>
+          <p:cNvPr id="20" name="Text 18"/>
+          <p:cNvSpPr txBox="1"/>
+          <p:nvPr/>
+        </p:nvSpPr>
+        <p:spPr>
+          <a:xfrm>
+            <a:off x="10098786" y="1536192"/>
+            <a:ext cx="1407109" cy="905256"/>
+          </a:xfrm>
+          <a:prstGeom prst="rect">
+            <a:avLst/>
+          </a:prstGeom>
+          <a:noFill/>
+          <a:ln/>
+        </p:spPr>
+        <p:txBody>
+          <a:bodyPr wrap="square" lIns="0" tIns="0" rIns="0" bIns="0" rtlCol="0" anchor="ctr"/>
+          <a:lstStyle/>
+          <a:p>
+            <a:pPr algn="ctr" indent="0" marL="0">
+              <a:buNone/>
+            </a:pPr>
+            <a:r>
+              <a:rPr lang="en-US" sz="1500" b="1" dirty="0">
+                <a:solidFill>
+                  <a:schemeClr val="tx1"/>
+                </a:solidFill>
+              </a:rPr>
+              <a:t>Station sol</a:t>
+            </a:r>
+            <a:endParaRPr lang="en-US" sz="1500" dirty="0"/>
+          </a:p>
+          <a:p>
+            <a:pPr algn="ctr" indent="0" marL="0">
+              <a:buNone/>
+            </a:pPr>
+            <a:r>
+              <a:rPr lang="en-US" sz="1200" dirty="0">
+                <a:solidFill>
+                  <a:schemeClr val="tx2"/>
+                </a:solidFill>
+              </a:rPr>
+              <a:t>par la liaison sécurisée</a:t>
+            </a:r>
+            <a:endParaRPr lang="en-US" sz="1500" dirty="0"/>
+          </a:p>
+        </p:txBody>
+      </p:sp>
+      <p:sp>
+        <p:nvSpPr>
+          <p:cNvPr id="21" name="Text 19"/>
+          <p:cNvSpPr txBox="1"/>
+          <p:nvPr/>
+        </p:nvSpPr>
+        <p:spPr>
+          <a:xfrm>
+            <a:off x="594360" y="2880360"/>
+            <a:ext cx="2377440" cy="365760"/>
+          </a:xfrm>
+          <a:prstGeom prst="rect">
+            <a:avLst/>
+          </a:prstGeom>
+          <a:noFill/>
+          <a:ln/>
+        </p:spPr>
+        <p:txBody>
+          <a:bodyPr wrap="square" lIns="0" tIns="0" rIns="0" bIns="0" rtlCol="0" anchor="ctr"/>
+          <a:lstStyle/>
+          <a:p>
             <a:pPr indent="0" marL="0">
               <a:buNone/>
             </a:pPr>
@@ -7068,7 +8124,7 @@
                   <a:schemeClr val="accent1"/>
                 </a:solidFill>
               </a:rPr>
-              <a:t>Le modèle et ses données</a:t>
+              <a:t>Matériel</a:t>
             </a:r>
             <a:endParaRPr lang="en-US" sz="1800" dirty="0"/>
           </a:p>
@@ -7076,14 +8132,14 @@
       </p:sp>
       <p:sp>
         <p:nvSpPr>
-          <p:cNvPr id="5" name="Text 3"/>
+          <p:cNvPr id="22" name="Text 20"/>
           <p:cNvSpPr txBox="1"/>
           <p:nvPr/>
         </p:nvSpPr>
         <p:spPr>
           <a:xfrm>
-            <a:off x="594360" y="1874520"/>
-            <a:ext cx="5227168" cy="4023360"/>
+            <a:off x="594360" y="3337560"/>
+            <a:ext cx="2377440" cy="2560320"/>
           </a:xfrm>
           <a:prstGeom prst="rect">
             <a:avLst/>
@@ -7103,14 +8159,14 @@
               <a:buChar char="•"/>
             </a:pPr>
             <a:r>
-              <a:rPr lang="en-US" sz="1700" dirty="0">
+              <a:rPr lang="en-US" sz="1500" dirty="0">
                 <a:solidFill>
                   <a:schemeClr val="tx1"/>
                 </a:solidFill>
               </a:rPr>
-              <a:t>YOLOv8s pré-entraîné, adapté par fine-tuning</a:t>
-            </a:r>
-            <a:endParaRPr lang="en-US" sz="1700" dirty="0"/>
+              <a:t>Raspberry Pi 5</a:t>
+            </a:r>
+            <a:endParaRPr lang="en-US" sz="1500" dirty="0"/>
           </a:p>
           <a:p>
             <a:pPr marL="228600" indent="-228600">
@@ -7121,14 +8177,14 @@
               <a:buChar char="•"/>
             </a:pPr>
             <a:r>
-              <a:rPr lang="en-US" sz="1700" dirty="0">
+              <a:rPr lang="en-US" sz="1500" dirty="0">
                 <a:solidFill>
                   <a:schemeClr val="tx1"/>
                 </a:solidFill>
               </a:rPr>
-              <a:t>FOD-A : plus de 30 000 débris de piste annotés</a:t>
-            </a:r>
-            <a:endParaRPr lang="en-US" sz="1700" dirty="0"/>
+              <a:t>AI HAT+ 26 TOPS (puce Hailo-8)</a:t>
+            </a:r>
+            <a:endParaRPr lang="en-US" sz="1500" dirty="0"/>
           </a:p>
           <a:p>
             <a:pPr marL="228600" indent="-228600">
@@ -7139,15 +8195,73 @@
               <a:buChar char="•"/>
             </a:pPr>
             <a:r>
-              <a:rPr lang="en-US" sz="1700" dirty="0">
+              <a:rPr lang="en-US" sz="1500" dirty="0">
                 <a:solidFill>
                   <a:schemeClr val="tx1"/>
                 </a:solidFill>
               </a:rPr>
-              <a:t>Images prises avec notre caméra, à l'angle de vue du drone</a:t>
-            </a:r>
-            <a:endParaRPr lang="en-US" sz="1700" dirty="0"/>
-          </a:p>
+              <a:t>Séparé du contrôleur de vol</a:t>
+            </a:r>
+            <a:endParaRPr lang="en-US" sz="1500" dirty="0"/>
+          </a:p>
+        </p:txBody>
+      </p:sp>
+      <p:sp>
+        <p:nvSpPr>
+          <p:cNvPr id="23" name="Text 21"/>
+          <p:cNvSpPr txBox="1"/>
+          <p:nvPr/>
+        </p:nvSpPr>
+        <p:spPr>
+          <a:xfrm>
+            <a:off x="3337560" y="2880360"/>
+            <a:ext cx="2377440" cy="365760"/>
+          </a:xfrm>
+          <a:prstGeom prst="rect">
+            <a:avLst/>
+          </a:prstGeom>
+          <a:noFill/>
+          <a:ln/>
+        </p:spPr>
+        <p:txBody>
+          <a:bodyPr wrap="square" lIns="0" tIns="0" rIns="0" bIns="0" rtlCol="0" anchor="ctr"/>
+          <a:lstStyle/>
+          <a:p>
+            <a:pPr indent="0" marL="0">
+              <a:buNone/>
+            </a:pPr>
+            <a:r>
+              <a:rPr lang="en-US" sz="1800" b="1" dirty="0">
+                <a:solidFill>
+                  <a:schemeClr val="accent1"/>
+                </a:solidFill>
+              </a:rPr>
+              <a:t>Ce qu'il détecte</a:t>
+            </a:r>
+            <a:endParaRPr lang="en-US" sz="1800" dirty="0"/>
+          </a:p>
+        </p:txBody>
+      </p:sp>
+      <p:sp>
+        <p:nvSpPr>
+          <p:cNvPr id="24" name="Text 22"/>
+          <p:cNvSpPr txBox="1"/>
+          <p:nvPr/>
+        </p:nvSpPr>
+        <p:spPr>
+          <a:xfrm>
+            <a:off x="3337560" y="3337560"/>
+            <a:ext cx="2377440" cy="2560320"/>
+          </a:xfrm>
+          <a:prstGeom prst="rect">
+            <a:avLst/>
+          </a:prstGeom>
+          <a:noFill/>
+          <a:ln/>
+        </p:spPr>
+        <p:txBody>
+          <a:bodyPr wrap="square" lIns="0" tIns="0" rIns="0" bIns="0" rtlCol="0" anchor="t"/>
+          <a:lstStyle/>
           <a:p>
             <a:pPr marL="228600" indent="-228600">
               <a:spcAft>
@@ -7157,73 +8271,15 @@
               <a:buChar char="•"/>
             </a:pPr>
             <a:r>
-              <a:rPr lang="en-US" sz="1700" dirty="0">
+              <a:rPr lang="en-US" sz="1500" dirty="0">
                 <a:solidFill>
                   <a:schemeClr val="tx1"/>
                 </a:solidFill>
               </a:rPr>
-              <a:t>Scènes vides et pièges (ombres, marquages) contre les fausses alertes</a:t>
-            </a:r>
-            <a:endParaRPr lang="en-US" sz="1700" dirty="0"/>
-          </a:p>
-        </p:txBody>
-      </p:sp>
-      <p:sp>
-        <p:nvSpPr>
-          <p:cNvPr id="6" name="Text 4"/>
-          <p:cNvSpPr txBox="1"/>
-          <p:nvPr/>
-        </p:nvSpPr>
-        <p:spPr>
-          <a:xfrm>
-            <a:off x="6370168" y="1417320"/>
-            <a:ext cx="5227168" cy="365760"/>
-          </a:xfrm>
-          <a:prstGeom prst="rect">
-            <a:avLst/>
-          </a:prstGeom>
-          <a:noFill/>
-          <a:ln/>
-        </p:spPr>
-        <p:txBody>
-          <a:bodyPr wrap="square" lIns="0" tIns="0" rIns="0" bIns="0" rtlCol="0" anchor="ctr"/>
-          <a:lstStyle/>
-          <a:p>
-            <a:pPr indent="0" marL="0">
-              <a:buNone/>
-            </a:pPr>
-            <a:r>
-              <a:rPr lang="en-US" sz="1800" b="1" dirty="0">
-                <a:solidFill>
-                  <a:schemeClr val="accent1"/>
-                </a:solidFill>
-              </a:rPr>
-              <a:t>Ce que l'IA fait, et ne fait pas</a:t>
-            </a:r>
-            <a:endParaRPr lang="en-US" sz="1800" dirty="0"/>
-          </a:p>
-        </p:txBody>
-      </p:sp>
-      <p:sp>
-        <p:nvSpPr>
-          <p:cNvPr id="7" name="Text 5"/>
-          <p:cNvSpPr txBox="1"/>
-          <p:nvPr/>
-        </p:nvSpPr>
-        <p:spPr>
-          <a:xfrm>
-            <a:off x="6370168" y="1874520"/>
-            <a:ext cx="5227168" cy="4023360"/>
-          </a:xfrm>
-          <a:prstGeom prst="rect">
-            <a:avLst/>
-          </a:prstGeom>
-          <a:noFill/>
-          <a:ln/>
-        </p:spPr>
-        <p:txBody>
-          <a:bodyPr wrap="square" lIns="0" tIns="0" rIns="0" bIns="0" rtlCol="0" anchor="t"/>
-          <a:lstStyle/>
+              <a:t>Personnes</a:t>
+            </a:r>
+            <a:endParaRPr lang="en-US" sz="1500" dirty="0"/>
+          </a:p>
           <a:p>
             <a:pPr marL="228600" indent="-228600">
               <a:spcAft>
@@ -7233,14 +8289,14 @@
               <a:buChar char="•"/>
             </a:pPr>
             <a:r>
-              <a:rPr lang="en-US" sz="1700" dirty="0">
+              <a:rPr lang="en-US" sz="1500" dirty="0">
                 <a:solidFill>
                   <a:schemeClr val="tx1"/>
                 </a:solidFill>
               </a:rPr>
-              <a:t>Un objet inconnu est signalé « à vérifier », avec son image</a:t>
-            </a:r>
-            <a:endParaRPr lang="en-US" sz="1700" dirty="0"/>
+              <a:t>Véhicules</a:t>
+            </a:r>
+            <a:endParaRPr lang="en-US" sz="1500" dirty="0"/>
           </a:p>
           <a:p>
             <a:pPr marL="228600" indent="-228600">
@@ -7251,50 +8307,214 @@
               <a:buChar char="•"/>
             </a:pPr>
             <a:r>
-              <a:rPr lang="en-US" sz="1700" dirty="0">
+              <a:rPr lang="en-US" sz="1500" dirty="0">
                 <a:solidFill>
                   <a:schemeClr val="tx1"/>
                 </a:solidFill>
               </a:rPr>
-              <a:t>Sans liaison, les alertes sont gardées à bord puis envoyées</a:t>
-            </a:r>
-            <a:endParaRPr lang="en-US" sz="1700" dirty="0"/>
-          </a:p>
-          <a:p>
-            <a:pPr marL="228600" indent="-228600">
-              <a:spcAft>
-                <a:spcPts val="800"/>
-              </a:spcAft>
-              <a:buSzPct val="100000"/>
-              <a:buChar char="•"/>
-            </a:pPr>
-            <a:r>
-              <a:rPr lang="en-US" sz="1700" dirty="0">
-                <a:solidFill>
-                  <a:schemeClr val="tx1"/>
-                </a:solidFill>
-              </a:rPr>
-              <a:t>Elle aide l'opérateur, la décision reste humaine</a:t>
-            </a:r>
-            <a:endParaRPr lang="en-US" sz="1700" dirty="0"/>
-          </a:p>
-          <a:p>
-            <a:pPr marL="228600" indent="-228600">
-              <a:spcAft>
-                <a:spcPts val="800"/>
-              </a:spcAft>
-              <a:buSzPct val="100000"/>
-              <a:buChar char="•"/>
-            </a:pPr>
-            <a:r>
-              <a:rPr lang="en-US" sz="1700" dirty="0">
-                <a:solidFill>
-                  <a:schemeClr val="tx1"/>
-                </a:solidFill>
-              </a:rPr>
-              <a:t>Elle ne commande jamais le drone</a:t>
-            </a:r>
-            <a:endParaRPr lang="en-US" sz="1700" dirty="0"/>
+              <a:t>Débris et objets au sol</a:t>
+            </a:r>
+            <a:endParaRPr lang="en-US" sz="1500" dirty="0"/>
+          </a:p>
+        </p:txBody>
+      </p:sp>
+      <p:pic>
+        <p:nvPicPr>
+          <p:cNvPr id="25" name="Image 0" descr="Raspberry Pi 5">    </p:cNvPr>
+          <p:cNvPicPr>
+            <a:picLocks noChangeAspect="1"/>
+          </p:cNvPicPr>
+          <p:nvPr/>
+        </p:nvPicPr>
+        <p:blipFill>
+          <a:blip r:embed="rId1"/>
+          <a:stretch>
+            <a:fillRect/>
+          </a:stretch>
+        </p:blipFill>
+        <p:spPr>
+          <a:xfrm>
+            <a:off x="6080760" y="3378251"/>
+            <a:ext cx="2621128" cy="1747418"/>
+          </a:xfrm>
+          <a:prstGeom prst="rect">
+            <a:avLst/>
+          </a:prstGeom>
+        </p:spPr>
+      </p:pic>
+      <p:sp>
+        <p:nvSpPr>
+          <p:cNvPr id="26" name="Cadre raspberry_pi5"/>
+          <p:cNvSpPr/>
+          <p:nvPr/>
+        </p:nvSpPr>
+        <p:spPr>
+          <a:xfrm>
+            <a:off x="6080760" y="3378251"/>
+            <a:ext cx="2621128" cy="1747418"/>
+          </a:xfrm>
+          <a:prstGeom prst="rect">
+            <a:avLst/>
+          </a:prstGeom>
+          <a:ln w="9525">
+            <a:solidFill>
+              <a:schemeClr val="accent5"/>
+            </a:solidFill>
+            <a:prstDash val="solid"/>
+          </a:ln>
+        </p:spPr>
+      </p:sp>
+      <p:sp>
+        <p:nvSpPr>
+          <p:cNvPr id="27" name="Text 24"/>
+          <p:cNvSpPr txBox="1"/>
+          <p:nvPr/>
+        </p:nvSpPr>
+        <p:spPr>
+          <a:xfrm>
+            <a:off x="6080760" y="5180533"/>
+            <a:ext cx="2621128" cy="256032"/>
+          </a:xfrm>
+          <a:prstGeom prst="rect">
+            <a:avLst/>
+          </a:prstGeom>
+          <a:noFill/>
+          <a:ln/>
+        </p:spPr>
+        <p:txBody>
+          <a:bodyPr wrap="square" lIns="0" tIns="0" rIns="0" bIns="0" rtlCol="0" anchor="ctr"/>
+          <a:lstStyle/>
+          <a:p>
+            <a:pPr indent="0" marL="0">
+              <a:buNone/>
+            </a:pPr>
+            <a:r>
+              <a:rPr lang="en-US" sz="1100" i="1" dirty="0">
+                <a:solidFill>
+                  <a:schemeClr val="tx2"/>
+                </a:solidFill>
+              </a:rPr>
+              <a:t>Raspberry Pi 5</a:t>
+            </a:r>
+            <a:endParaRPr lang="en-US" sz="1100" dirty="0"/>
+          </a:p>
+        </p:txBody>
+      </p:sp>
+      <p:pic>
+        <p:nvPicPr>
+          <p:cNvPr id="28" name="Image 1" descr="AI HAT+ (puce Hailo-8) monté sur le Pi">    </p:cNvPr>
+          <p:cNvPicPr>
+            <a:picLocks noChangeAspect="1"/>
+          </p:cNvPicPr>
+          <p:nvPr/>
+        </p:nvPicPr>
+        <p:blipFill>
+          <a:blip r:embed="rId2"/>
+          <a:stretch>
+            <a:fillRect/>
+          </a:stretch>
+        </p:blipFill>
+        <p:spPr>
+          <a:xfrm>
+            <a:off x="8976208" y="3378251"/>
+            <a:ext cx="2621128" cy="1747418"/>
+          </a:xfrm>
+          <a:prstGeom prst="rect">
+            <a:avLst/>
+          </a:prstGeom>
+        </p:spPr>
+      </p:pic>
+      <p:sp>
+        <p:nvSpPr>
+          <p:cNvPr id="29" name="Cadre ai_hat_plus"/>
+          <p:cNvSpPr/>
+          <p:nvPr/>
+        </p:nvSpPr>
+        <p:spPr>
+          <a:xfrm>
+            <a:off x="8976208" y="3378251"/>
+            <a:ext cx="2621128" cy="1747418"/>
+          </a:xfrm>
+          <a:prstGeom prst="rect">
+            <a:avLst/>
+          </a:prstGeom>
+          <a:ln w="9525">
+            <a:solidFill>
+              <a:schemeClr val="accent5"/>
+            </a:solidFill>
+            <a:prstDash val="solid"/>
+          </a:ln>
+        </p:spPr>
+      </p:sp>
+      <p:sp>
+        <p:nvSpPr>
+          <p:cNvPr id="30" name="Text 26"/>
+          <p:cNvSpPr txBox="1"/>
+          <p:nvPr/>
+        </p:nvSpPr>
+        <p:spPr>
+          <a:xfrm>
+            <a:off x="8976208" y="5180533"/>
+            <a:ext cx="2621128" cy="256032"/>
+          </a:xfrm>
+          <a:prstGeom prst="rect">
+            <a:avLst/>
+          </a:prstGeom>
+          <a:noFill/>
+          <a:ln/>
+        </p:spPr>
+        <p:txBody>
+          <a:bodyPr wrap="square" lIns="0" tIns="0" rIns="0" bIns="0" rtlCol="0" anchor="ctr"/>
+          <a:lstStyle/>
+          <a:p>
+            <a:pPr indent="0" marL="0">
+              <a:buNone/>
+            </a:pPr>
+            <a:r>
+              <a:rPr lang="en-US" sz="1100" i="1" dirty="0">
+                <a:solidFill>
+                  <a:schemeClr val="tx2"/>
+                </a:solidFill>
+              </a:rPr>
+              <a:t>AI HAT+ (puce Hailo-8) monté sur le Pi</a:t>
+            </a:r>
+            <a:endParaRPr lang="en-US" sz="1100" dirty="0"/>
+          </a:p>
+        </p:txBody>
+      </p:sp>
+      <p:sp>
+        <p:nvSpPr>
+          <p:cNvPr id="31" name="Text 27"/>
+          <p:cNvSpPr txBox="1"/>
+          <p:nvPr/>
+        </p:nvSpPr>
+        <p:spPr>
+          <a:xfrm>
+            <a:off x="594360" y="6053328"/>
+            <a:ext cx="11002975" cy="201168"/>
+          </a:xfrm>
+          <a:prstGeom prst="rect">
+            <a:avLst/>
+          </a:prstGeom>
+          <a:noFill/>
+          <a:ln/>
+        </p:spPr>
+        <p:txBody>
+          <a:bodyPr wrap="square" lIns="0" tIns="0" rIns="0" bIns="0" rtlCol="0" anchor="ctr"/>
+          <a:lstStyle/>
+          <a:p>
+            <a:pPr indent="0" marL="0">
+              <a:buNone/>
+            </a:pPr>
+            <a:r>
+              <a:rPr lang="en-US" sz="900" i="1" dirty="0">
+                <a:solidFill>
+                  <a:schemeClr val="tx2"/>
+                </a:solidFill>
+              </a:rPr>
+              <a:t>Photos de composants (exemples) : wiki ArduPilot, CC BY-SA 3.0 ; Raspberry Pi Ltd, CC BY-SA 4.0.</a:t>
+            </a:r>
+            <a:endParaRPr lang="en-US" sz="900" dirty="0"/>
           </a:p>
         </p:txBody>
       </p:sp>
@@ -7400,7 +8620,7 @@
                   <a:schemeClr val="tx1"/>
                 </a:solidFill>
               </a:rPr>
-              <a:t>Station sol et back-end</a:t>
+              <a:t>Données et fiabilité de l'IA</a:t>
             </a:r>
             <a:endParaRPr lang="en-US" sz="3000" dirty="0"/>
           </a:p>
@@ -7436,7 +8656,7 @@
                   <a:schemeClr val="tx2"/>
                 </a:solidFill>
               </a:rPr>
-              <a:t>Angelo LOGO ADANTO</a:t>
+              <a:t>Roger KAINWANG</a:t>
             </a:r>
             <a:endParaRPr lang="en-US" sz="1000" dirty="0"/>
           </a:p>
@@ -7472,7 +8692,7 @@
                   <a:schemeClr val="accent1"/>
                 </a:solidFill>
               </a:rPr>
-              <a:t>La station sol (Angelo)</a:t>
+              <a:t>Le modèle et ses données</a:t>
             </a:r>
             <a:endParaRPr lang="en-US" sz="1800" dirty="0"/>
           </a:p>
@@ -7487,7 +8707,7 @@
         <p:spPr>
           <a:xfrm>
             <a:off x="594360" y="1874520"/>
-            <a:ext cx="5227168" cy="2560320"/>
+            <a:ext cx="5227168" cy="4023360"/>
           </a:xfrm>
           <a:prstGeom prst="rect">
             <a:avLst/>
@@ -7512,7 +8732,7 @@
                   <a:schemeClr val="tx1"/>
                 </a:solidFill>
               </a:rPr>
-              <a:t>Flutter : version mobile et web</a:t>
+              <a:t>YOLOv8s pré-entraîné, adapté par fine-tuning</a:t>
             </a:r>
             <a:endParaRPr lang="en-US" sz="1700" dirty="0"/>
           </a:p>
@@ -7530,7 +8750,7 @@
                   <a:schemeClr val="tx1"/>
                 </a:solidFill>
               </a:rPr>
-              <a:t>Préparation de la mission et zone autorisée</a:t>
+              <a:t>FOD-A : plus de 30 000 débris de piste annotés</a:t>
             </a:r>
             <a:endParaRPr lang="en-US" sz="1700" dirty="0"/>
           </a:p>
@@ -7548,7 +8768,7 @@
                   <a:schemeClr val="tx1"/>
                 </a:solidFill>
               </a:rPr>
-              <a:t>Télémétrie MAVLink en direct</a:t>
+              <a:t>Images prises avec notre caméra, à l'angle de vue du drone</a:t>
             </a:r>
             <a:endParaRPr lang="en-US" sz="1700" dirty="0"/>
           </a:p>
@@ -7566,7 +8786,7 @@
                   <a:schemeClr val="tx1"/>
                 </a:solidFill>
               </a:rPr>
-              <a:t>Alertes de l'IA avec image, vidéo enregistrée</a:t>
+              <a:t>Scènes vides et pièges (ombres, marquages) contre les fausses alertes</a:t>
             </a:r>
             <a:endParaRPr lang="en-US" sz="1700" dirty="0"/>
           </a:p>
@@ -7602,7 +8822,7 @@
                   <a:schemeClr val="accent1"/>
                 </a:solidFill>
               </a:rPr>
-              <a:t>Le back-end (Cédric)</a:t>
+              <a:t>Ce que l'IA fait, et ne fait pas</a:t>
             </a:r>
             <a:endParaRPr lang="en-US" sz="1800" dirty="0"/>
           </a:p>
@@ -7617,7 +8837,7 @@
         <p:spPr>
           <a:xfrm>
             <a:off x="6370168" y="1874520"/>
-            <a:ext cx="5227168" cy="2560320"/>
+            <a:ext cx="5227168" cy="4023360"/>
           </a:xfrm>
           <a:prstGeom prst="rect">
             <a:avLst/>
@@ -7642,7 +8862,7 @@
                   <a:schemeClr val="tx1"/>
                 </a:solidFill>
               </a:rPr>
-              <a:t>API REST et base MySQL</a:t>
+              <a:t>Un objet inconnu est signalé « à vérifier », avec son image</a:t>
             </a:r>
             <a:endParaRPr lang="en-US" sz="1700" dirty="0"/>
           </a:p>
@@ -7660,7 +8880,7 @@
                   <a:schemeClr val="tx1"/>
                 </a:solidFill>
               </a:rPr>
-              <a:t>Historique des vols, télémétrie et alertes</a:t>
+              <a:t>Sans liaison, les alertes sont gardées à bord puis envoyées</a:t>
             </a:r>
             <a:endParaRPr lang="en-US" sz="1700" dirty="0"/>
           </a:p>
@@ -7678,7 +8898,7 @@
                   <a:schemeClr val="tx1"/>
                 </a:solidFill>
               </a:rPr>
-              <a:t>Format d'alerte commun à toute l'équipe</a:t>
+              <a:t>Elle aide l'opérateur, la décision reste humaine</a:t>
             </a:r>
             <a:endParaRPr lang="en-US" sz="1700" dirty="0"/>
           </a:p>
@@ -7696,68 +8916,7 @@
                   <a:schemeClr val="tx1"/>
                 </a:solidFill>
               </a:rPr>
-              <a:t>Journaux de vol signés</a:t>
-            </a:r>
-            <a:endParaRPr lang="en-US" sz="1700" dirty="0"/>
-          </a:p>
-        </p:txBody>
-      </p:sp>
-      <p:sp>
-        <p:nvSpPr>
-          <p:cNvPr id="8" name="Encadré"/>
-          <p:cNvSpPr/>
-          <p:nvPr/>
-        </p:nvSpPr>
-        <p:spPr>
-          <a:xfrm>
-            <a:off x="594360" y="4617720"/>
-            <a:ext cx="11002975" cy="685800"/>
-          </a:xfrm>
-          <a:prstGeom prst="rect">
-            <a:avLst/>
-          </a:prstGeom>
-          <a:solidFill>
-            <a:schemeClr val="bg2"/>
-          </a:solidFill>
-          <a:ln w="9525">
-            <a:solidFill>
-              <a:schemeClr val="accent5"/>
-            </a:solidFill>
-            <a:prstDash val="solid"/>
-          </a:ln>
-        </p:spPr>
-      </p:sp>
-      <p:sp>
-        <p:nvSpPr>
-          <p:cNvPr id="9" name="Text 7"/>
-          <p:cNvSpPr txBox="1"/>
-          <p:nvPr/>
-        </p:nvSpPr>
-        <p:spPr>
-          <a:xfrm>
-            <a:off x="822960" y="4617720"/>
-            <a:ext cx="10545775" cy="685800"/>
-          </a:xfrm>
-          <a:prstGeom prst="rect">
-            <a:avLst/>
-          </a:prstGeom>
-          <a:noFill/>
-          <a:ln/>
-        </p:spPr>
-        <p:txBody>
-          <a:bodyPr wrap="square" lIns="0" tIns="0" rIns="0" bIns="0" rtlCol="0" anchor="ctr"/>
-          <a:lstStyle/>
-          <a:p>
-            <a:pPr indent="0" marL="0">
-              <a:buNone/>
-            </a:pPr>
-            <a:r>
-              <a:rPr lang="en-US" sz="1700" dirty="0">
-                <a:solidFill>
-                  <a:schemeClr val="tx1"/>
-                </a:solidFill>
-              </a:rPr>
-              <a:t>L'opérateur n'a pas à fixer la vidéo : le drone lui signale ce qu'il faut regarder.</a:t>
+              <a:t>Elle ne commande jamais le drone</a:t>
             </a:r>
             <a:endParaRPr lang="en-US" sz="1700" dirty="0"/>
           </a:p>
@@ -7865,7 +9024,7 @@
                   <a:schemeClr val="tx1"/>
                 </a:solidFill>
               </a:rPr>
-              <a:t>Trois liaisons indépendantes</a:t>
+              <a:t>Station sol et back-end</a:t>
             </a:r>
             <a:endParaRPr lang="en-US" sz="3000" dirty="0"/>
           </a:p>
@@ -7901,6 +9060,471 @@
                   <a:schemeClr val="tx2"/>
                 </a:solidFill>
               </a:rPr>
+              <a:t>Angelo LOGO ADANTO</a:t>
+            </a:r>
+            <a:endParaRPr lang="en-US" sz="1000" dirty="0"/>
+          </a:p>
+        </p:txBody>
+      </p:sp>
+      <p:sp>
+        <p:nvSpPr>
+          <p:cNvPr id="4" name="Text 2"/>
+          <p:cNvSpPr txBox="1"/>
+          <p:nvPr/>
+        </p:nvSpPr>
+        <p:spPr>
+          <a:xfrm>
+            <a:off x="594360" y="1417320"/>
+            <a:ext cx="5227168" cy="365760"/>
+          </a:xfrm>
+          <a:prstGeom prst="rect">
+            <a:avLst/>
+          </a:prstGeom>
+          <a:noFill/>
+          <a:ln/>
+        </p:spPr>
+        <p:txBody>
+          <a:bodyPr wrap="square" lIns="0" tIns="0" rIns="0" bIns="0" rtlCol="0" anchor="ctr"/>
+          <a:lstStyle/>
+          <a:p>
+            <a:pPr indent="0" marL="0">
+              <a:buNone/>
+            </a:pPr>
+            <a:r>
+              <a:rPr lang="en-US" sz="1800" b="1" dirty="0">
+                <a:solidFill>
+                  <a:schemeClr val="accent1"/>
+                </a:solidFill>
+              </a:rPr>
+              <a:t>La station sol (Angelo)</a:t>
+            </a:r>
+            <a:endParaRPr lang="en-US" sz="1800" dirty="0"/>
+          </a:p>
+        </p:txBody>
+      </p:sp>
+      <p:sp>
+        <p:nvSpPr>
+          <p:cNvPr id="5" name="Text 3"/>
+          <p:cNvSpPr txBox="1"/>
+          <p:nvPr/>
+        </p:nvSpPr>
+        <p:spPr>
+          <a:xfrm>
+            <a:off x="594360" y="1874520"/>
+            <a:ext cx="5227168" cy="2560320"/>
+          </a:xfrm>
+          <a:prstGeom prst="rect">
+            <a:avLst/>
+          </a:prstGeom>
+          <a:noFill/>
+          <a:ln/>
+        </p:spPr>
+        <p:txBody>
+          <a:bodyPr wrap="square" lIns="0" tIns="0" rIns="0" bIns="0" rtlCol="0" anchor="t"/>
+          <a:lstStyle/>
+          <a:p>
+            <a:pPr marL="228600" indent="-228600">
+              <a:spcAft>
+                <a:spcPts val="800"/>
+              </a:spcAft>
+              <a:buSzPct val="100000"/>
+              <a:buChar char="•"/>
+            </a:pPr>
+            <a:r>
+              <a:rPr lang="en-US" sz="1700" dirty="0">
+                <a:solidFill>
+                  <a:schemeClr val="tx1"/>
+                </a:solidFill>
+              </a:rPr>
+              <a:t>Flutter : version mobile et web</a:t>
+            </a:r>
+            <a:endParaRPr lang="en-US" sz="1700" dirty="0"/>
+          </a:p>
+          <a:p>
+            <a:pPr marL="228600" indent="-228600">
+              <a:spcAft>
+                <a:spcPts val="800"/>
+              </a:spcAft>
+              <a:buSzPct val="100000"/>
+              <a:buChar char="•"/>
+            </a:pPr>
+            <a:r>
+              <a:rPr lang="en-US" sz="1700" dirty="0">
+                <a:solidFill>
+                  <a:schemeClr val="tx1"/>
+                </a:solidFill>
+              </a:rPr>
+              <a:t>Préparation de la mission et zone autorisée</a:t>
+            </a:r>
+            <a:endParaRPr lang="en-US" sz="1700" dirty="0"/>
+          </a:p>
+          <a:p>
+            <a:pPr marL="228600" indent="-228600">
+              <a:spcAft>
+                <a:spcPts val="800"/>
+              </a:spcAft>
+              <a:buSzPct val="100000"/>
+              <a:buChar char="•"/>
+            </a:pPr>
+            <a:r>
+              <a:rPr lang="en-US" sz="1700" dirty="0">
+                <a:solidFill>
+                  <a:schemeClr val="tx1"/>
+                </a:solidFill>
+              </a:rPr>
+              <a:t>Télémétrie MAVLink en direct</a:t>
+            </a:r>
+            <a:endParaRPr lang="en-US" sz="1700" dirty="0"/>
+          </a:p>
+          <a:p>
+            <a:pPr marL="228600" indent="-228600">
+              <a:spcAft>
+                <a:spcPts val="800"/>
+              </a:spcAft>
+              <a:buSzPct val="100000"/>
+              <a:buChar char="•"/>
+            </a:pPr>
+            <a:r>
+              <a:rPr lang="en-US" sz="1700" dirty="0">
+                <a:solidFill>
+                  <a:schemeClr val="tx1"/>
+                </a:solidFill>
+              </a:rPr>
+              <a:t>Alertes de l'IA avec image, vidéo enregistrée</a:t>
+            </a:r>
+            <a:endParaRPr lang="en-US" sz="1700" dirty="0"/>
+          </a:p>
+        </p:txBody>
+      </p:sp>
+      <p:sp>
+        <p:nvSpPr>
+          <p:cNvPr id="6" name="Text 4"/>
+          <p:cNvSpPr txBox="1"/>
+          <p:nvPr/>
+        </p:nvSpPr>
+        <p:spPr>
+          <a:xfrm>
+            <a:off x="6370168" y="1417320"/>
+            <a:ext cx="5227168" cy="365760"/>
+          </a:xfrm>
+          <a:prstGeom prst="rect">
+            <a:avLst/>
+          </a:prstGeom>
+          <a:noFill/>
+          <a:ln/>
+        </p:spPr>
+        <p:txBody>
+          <a:bodyPr wrap="square" lIns="0" tIns="0" rIns="0" bIns="0" rtlCol="0" anchor="ctr"/>
+          <a:lstStyle/>
+          <a:p>
+            <a:pPr indent="0" marL="0">
+              <a:buNone/>
+            </a:pPr>
+            <a:r>
+              <a:rPr lang="en-US" sz="1800" b="1" dirty="0">
+                <a:solidFill>
+                  <a:schemeClr val="accent1"/>
+                </a:solidFill>
+              </a:rPr>
+              <a:t>Le back-end (Cédric)</a:t>
+            </a:r>
+            <a:endParaRPr lang="en-US" sz="1800" dirty="0"/>
+          </a:p>
+        </p:txBody>
+      </p:sp>
+      <p:sp>
+        <p:nvSpPr>
+          <p:cNvPr id="7" name="Text 5"/>
+          <p:cNvSpPr txBox="1"/>
+          <p:nvPr/>
+        </p:nvSpPr>
+        <p:spPr>
+          <a:xfrm>
+            <a:off x="6370168" y="1874520"/>
+            <a:ext cx="5227168" cy="2560320"/>
+          </a:xfrm>
+          <a:prstGeom prst="rect">
+            <a:avLst/>
+          </a:prstGeom>
+          <a:noFill/>
+          <a:ln/>
+        </p:spPr>
+        <p:txBody>
+          <a:bodyPr wrap="square" lIns="0" tIns="0" rIns="0" bIns="0" rtlCol="0" anchor="t"/>
+          <a:lstStyle/>
+          <a:p>
+            <a:pPr marL="228600" indent="-228600">
+              <a:spcAft>
+                <a:spcPts val="800"/>
+              </a:spcAft>
+              <a:buSzPct val="100000"/>
+              <a:buChar char="•"/>
+            </a:pPr>
+            <a:r>
+              <a:rPr lang="en-US" sz="1700" dirty="0">
+                <a:solidFill>
+                  <a:schemeClr val="tx1"/>
+                </a:solidFill>
+              </a:rPr>
+              <a:t>API REST et base MySQL</a:t>
+            </a:r>
+            <a:endParaRPr lang="en-US" sz="1700" dirty="0"/>
+          </a:p>
+          <a:p>
+            <a:pPr marL="228600" indent="-228600">
+              <a:spcAft>
+                <a:spcPts val="800"/>
+              </a:spcAft>
+              <a:buSzPct val="100000"/>
+              <a:buChar char="•"/>
+            </a:pPr>
+            <a:r>
+              <a:rPr lang="en-US" sz="1700" dirty="0">
+                <a:solidFill>
+                  <a:schemeClr val="tx1"/>
+                </a:solidFill>
+              </a:rPr>
+              <a:t>Historique des vols, télémétrie et alertes</a:t>
+            </a:r>
+            <a:endParaRPr lang="en-US" sz="1700" dirty="0"/>
+          </a:p>
+          <a:p>
+            <a:pPr marL="228600" indent="-228600">
+              <a:spcAft>
+                <a:spcPts val="800"/>
+              </a:spcAft>
+              <a:buSzPct val="100000"/>
+              <a:buChar char="•"/>
+            </a:pPr>
+            <a:r>
+              <a:rPr lang="en-US" sz="1700" dirty="0">
+                <a:solidFill>
+                  <a:schemeClr val="tx1"/>
+                </a:solidFill>
+              </a:rPr>
+              <a:t>Format d'alerte commun à toute l'équipe</a:t>
+            </a:r>
+            <a:endParaRPr lang="en-US" sz="1700" dirty="0"/>
+          </a:p>
+          <a:p>
+            <a:pPr marL="228600" indent="-228600">
+              <a:spcAft>
+                <a:spcPts val="800"/>
+              </a:spcAft>
+              <a:buSzPct val="100000"/>
+              <a:buChar char="•"/>
+            </a:pPr>
+            <a:r>
+              <a:rPr lang="en-US" sz="1700" dirty="0">
+                <a:solidFill>
+                  <a:schemeClr val="tx1"/>
+                </a:solidFill>
+              </a:rPr>
+              <a:t>Journaux de vol signés</a:t>
+            </a:r>
+            <a:endParaRPr lang="en-US" sz="1700" dirty="0"/>
+          </a:p>
+        </p:txBody>
+      </p:sp>
+      <p:sp>
+        <p:nvSpPr>
+          <p:cNvPr id="8" name="Encadré"/>
+          <p:cNvSpPr/>
+          <p:nvPr/>
+        </p:nvSpPr>
+        <p:spPr>
+          <a:xfrm>
+            <a:off x="594360" y="4617720"/>
+            <a:ext cx="11002975" cy="685800"/>
+          </a:xfrm>
+          <a:prstGeom prst="rect">
+            <a:avLst/>
+          </a:prstGeom>
+          <a:solidFill>
+            <a:schemeClr val="bg2"/>
+          </a:solidFill>
+          <a:ln w="9525">
+            <a:solidFill>
+              <a:schemeClr val="accent5"/>
+            </a:solidFill>
+            <a:prstDash val="solid"/>
+          </a:ln>
+        </p:spPr>
+      </p:sp>
+      <p:sp>
+        <p:nvSpPr>
+          <p:cNvPr id="9" name="Text 7"/>
+          <p:cNvSpPr txBox="1"/>
+          <p:nvPr/>
+        </p:nvSpPr>
+        <p:spPr>
+          <a:xfrm>
+            <a:off x="822960" y="4617720"/>
+            <a:ext cx="10545775" cy="685800"/>
+          </a:xfrm>
+          <a:prstGeom prst="rect">
+            <a:avLst/>
+          </a:prstGeom>
+          <a:noFill/>
+          <a:ln/>
+        </p:spPr>
+        <p:txBody>
+          <a:bodyPr wrap="square" lIns="0" tIns="0" rIns="0" bIns="0" rtlCol="0" anchor="ctr"/>
+          <a:lstStyle/>
+          <a:p>
+            <a:pPr indent="0" marL="0">
+              <a:buNone/>
+            </a:pPr>
+            <a:r>
+              <a:rPr lang="en-US" sz="1700" dirty="0">
+                <a:solidFill>
+                  <a:schemeClr val="tx1"/>
+                </a:solidFill>
+              </a:rPr>
+              <a:t>L'opérateur n'a pas à fixer la vidéo : le drone lui signale ce qu'il faut regarder.</a:t>
+            </a:r>
+            <a:endParaRPr lang="en-US" sz="1700" dirty="0"/>
+          </a:p>
+        </p:txBody>
+      </p:sp>
+      <p:sp>
+        <p:nvSpPr>
+          <p:cNvPr id="25" name="Slide Number Placeholder 0"/>
+          <p:cNvSpPr>
+            <a:spLocks noGrp="1"/>
+          </p:cNvSpPr>
+          <p:nvPr>
+            <p:ph type="sldNum" sz="quarter" idx="4294967295"/>
+          </p:nvPr>
+        </p:nvSpPr>
+        <p:spPr>
+          <a:xfrm>
+            <a:off x="11231575" y="6382512"/>
+            <a:ext cx="365760" cy="274320"/>
+          </a:xfrm>
+          <a:prstGeom prst="rect">
+            <a:avLst/>
+          </a:prstGeom>
+          <a:extLst>
+            <a:ext uri="{C572A759-6A51-4108-AA02-DFA0A04FC94B}">
+              <ma14:wrappingTextBoxFlag xmlns:ma14="http://schemas.microsoft.com/office/mac/drawingml/2011/main" val="0"/>
+            </a:ext>
+          </a:extLst>
+        </p:spPr>
+        <p:txBody>
+          <a:bodyPr lIns="0" tIns="0" rIns="0" bIns="0"/>
+          <a:lstStyle>
+            <a:lvl1pPr>
+              <a:defRPr sz="1000">
+                <a:solidFill>
+                  <a:schemeClr val="tx2"/>
+                </a:solidFill>
+              </a:defRPr>
+            </a:lvl1pPr>
+          </a:lstStyle>
+          <a:p>
+            <a:pPr algn="r"/>
+            <a:fld id="{F7021451-1387-4CA6-816F-3879F97B5CBC}" type="slidenum">
+              <a:rPr b="0" lang="en-US"/>
+              <a:t>15</a:t>
+            </a:fld>
+            <a:endParaRPr lang="en-US"/>
+          </a:p>
+        </p:txBody>
+      </p:sp>
+    </p:spTree>
+  </p:cSld>
+  <p:clrMapOvr>
+    <a:masterClrMapping/>
+  </p:clrMapOvr>
+</p:sld>
+</file>
+
+<file path=ppt/slides/slide16.xml><?xml version="1.0" encoding="utf-8"?>
+<p:sld xmlns:a="http://schemas.openxmlformats.org/drawingml/2006/main" xmlns:r="http://schemas.openxmlformats.org/officeDocument/2006/relationships" xmlns:p="http://schemas.openxmlformats.org/presentationml/2006/main">
+  <p:cSld name="Slide 16">
+    <p:spTree>
+      <p:nvGrpSpPr>
+        <p:cNvPr id="1" name=""/>
+        <p:cNvGrpSpPr/>
+        <p:nvPr/>
+      </p:nvGrpSpPr>
+      <p:grpSpPr>
+        <a:xfrm>
+          <a:off x="0" y="0"/>
+          <a:ext cx="0" cy="0"/>
+          <a:chOff x="0" y="0"/>
+          <a:chExt cx="0" cy="0"/>
+        </a:xfrm>
+      </p:grpSpPr>
+      <p:sp>
+        <p:nvSpPr>
+          <p:cNvPr id="2" name="Text 0"/>
+          <p:cNvSpPr/>
+          <p:nvPr>
+            <p:ph idx="100" type="title" hasCustomPrompt="1"/>
+          </p:nvPr>
+        </p:nvSpPr>
+        <p:spPr>
+          <a:xfrm>
+            <a:off x="594360" y="411480"/>
+            <a:ext cx="11002975" cy="685800"/>
+          </a:xfrm>
+          <a:prstGeom prst="rect">
+            <a:avLst/>
+          </a:prstGeom>
+          <a:noFill/>
+          <a:ln/>
+        </p:spPr>
+        <p:txBody>
+          <a:bodyPr wrap="square" lIns="0" tIns="0" rIns="0" bIns="0" rtlCol="0" anchor="ctr"/>
+          <a:lstStyle/>
+          <a:p>
+            <a:pPr algn="l" indent="0" marL="0">
+              <a:buNone/>
+            </a:pPr>
+            <a:r>
+              <a:rPr lang="en-US" sz="3000" b="1" dirty="0">
+                <a:solidFill>
+                  <a:schemeClr val="tx1"/>
+                </a:solidFill>
+              </a:rPr>
+              <a:t>Trois liaisons indépendantes</a:t>
+            </a:r>
+            <a:endParaRPr lang="en-US" sz="3000" dirty="0"/>
+          </a:p>
+        </p:txBody>
+      </p:sp>
+      <p:sp>
+        <p:nvSpPr>
+          <p:cNvPr id="3" name="Text 1"/>
+          <p:cNvSpPr txBox="1"/>
+          <p:nvPr/>
+        </p:nvSpPr>
+        <p:spPr>
+          <a:xfrm>
+            <a:off x="7025335" y="6382512"/>
+            <a:ext cx="4069080" cy="274320"/>
+          </a:xfrm>
+          <a:prstGeom prst="rect">
+            <a:avLst/>
+          </a:prstGeom>
+          <a:noFill/>
+          <a:ln/>
+        </p:spPr>
+        <p:txBody>
+          <a:bodyPr wrap="square" lIns="0" tIns="0" rIns="0" bIns="0" rtlCol="0" anchor="ctr"/>
+          <a:lstStyle/>
+          <a:p>
+            <a:pPr algn="r" indent="0" marL="0">
+              <a:buNone/>
+            </a:pPr>
+            <a:r>
+              <a:rPr lang="en-US" sz="1000" dirty="0">
+                <a:solidFill>
+                  <a:schemeClr val="tx2"/>
+                </a:solidFill>
+              </a:rPr>
               <a:t>Makafui de MEDEIROS</a:t>
             </a:r>
             <a:endParaRPr lang="en-US" sz="1000" dirty="0"/>
@@ -7909,7 +9533,7 @@
       </p:sp>
       <p:graphicFrame>
         <p:nvGraphicFramePr>
-          <p:cNvPr id="16" name="Table 0"/>
+          <p:cNvPr id="17" name="Table 0"/>
           <p:cNvGraphicFramePr>
             <a:graphicFrameLocks noGrp="1"/>
           </p:cNvGraphicFramePr>
@@ -7934,7 +9558,7 @@
                 <a:gridCol w="4572000"/>
                 <a:gridCol w="2773375"/>
               </a:tblGrid>
-              <a:tr h="566928">
+              <a:tr h="457200">
                 <a:tc>
                   <a:txBody>
                     <a:bodyPr/>
@@ -8065,7 +9689,7 @@
                   </a:tcPr>
                 </a:tc>
               </a:tr>
-              <a:tr h="566928">
+              <a:tr h="457200">
                 <a:tc>
                   <a:txBody>
                     <a:bodyPr/>
@@ -8187,7 +9811,7 @@
                   </a:tcPr>
                 </a:tc>
               </a:tr>
-              <a:tr h="566928">
+              <a:tr h="457200">
                 <a:tc>
                   <a:txBody>
                     <a:bodyPr/>
@@ -8309,7 +9933,7 @@
                   </a:tcPr>
                 </a:tc>
               </a:tr>
-              <a:tr h="566928">
+              <a:tr h="457200">
                 <a:tc>
                   <a:txBody>
                     <a:bodyPr/>
@@ -8431,49 +10055,127 @@
                   </a:tcPr>
                 </a:tc>
               </a:tr>
+              <a:tr h="457200">
+                <a:tc>
+                  <a:txBody>
+                    <a:bodyPr/>
+                    <a:lstStyle/>
+                    <a:p>
+                      <a:pPr indent="0" marL="0">
+                        <a:buNone/>
+                      </a:pPr>
+                      <a:r>
+                        <a:rPr lang="en-US" sz="1600" b="1" dirty="0">
+                          <a:solidFill>
+                            <a:schemeClr val="tx1"/>
+                          </a:solidFill>
+                        </a:rPr>
+                        <a:t>Écartée : 4G</a:t>
+                      </a:r>
+                      <a:endParaRPr lang="en-US" sz="1600" dirty="0"/>
+                    </a:p>
+                  </a:txBody>
+                  <a:tcPr marL="109728" marR="109728" marT="36576" marB="36576" anchor="ctr">
+                    <a:lnL w="0" cap="flat" cmpd="sng" algn="ctr">
+                      <a:noFill/>
+                    </a:lnL>
+                    <a:lnR w="0" cap="flat" cmpd="sng" algn="ctr">
+                      <a:noFill/>
+                    </a:lnR>
+                    <a:lnT w="0" cap="flat" cmpd="sng" algn="ctr">
+                      <a:noFill/>
+                    </a:lnT>
+                    <a:lnB w="9525" cap="flat" cmpd="sng" algn="ctr">
+                      <a:solidFill>
+                        <a:srgbClr val="D3D9DE"/>
+                      </a:solidFill>
+                      <a:prstDash val="solid"/>
+                      <a:round/>
+                      <a:headEnd type="none" w="med" len="med"/>
+                      <a:tailEnd type="none" w="med" len="med"/>
+                    </a:lnB>
+                  </a:tcPr>
+                </a:tc>
+                <a:tc>
+                  <a:txBody>
+                    <a:bodyPr/>
+                    <a:lstStyle/>
+                    <a:p>
+                      <a:pPr indent="0" marL="0">
+                        <a:buNone/>
+                      </a:pPr>
+                      <a:r>
+                        <a:rPr lang="en-US" sz="1600" dirty="0">
+                          <a:solidFill>
+                            <a:schemeClr val="tx1"/>
+                          </a:solidFill>
+                        </a:rPr>
+                        <a:t>Couverture incertaine ; satellite à l'essai en secours</a:t>
+                      </a:r>
+                      <a:endParaRPr lang="en-US" sz="1600" dirty="0"/>
+                    </a:p>
+                  </a:txBody>
+                  <a:tcPr marL="109728" marR="109728" marT="36576" marB="36576" anchor="ctr">
+                    <a:lnL w="0" cap="flat" cmpd="sng" algn="ctr">
+                      <a:noFill/>
+                    </a:lnL>
+                    <a:lnR w="0" cap="flat" cmpd="sng" algn="ctr">
+                      <a:noFill/>
+                    </a:lnR>
+                    <a:lnT w="0" cap="flat" cmpd="sng" algn="ctr">
+                      <a:noFill/>
+                    </a:lnT>
+                    <a:lnB w="9525" cap="flat" cmpd="sng" algn="ctr">
+                      <a:solidFill>
+                        <a:srgbClr val="D3D9DE"/>
+                      </a:solidFill>
+                      <a:prstDash val="solid"/>
+                      <a:round/>
+                      <a:headEnd type="none" w="med" len="med"/>
+                      <a:tailEnd type="none" w="med" len="med"/>
+                    </a:lnB>
+                  </a:tcPr>
+                </a:tc>
+                <a:tc>
+                  <a:txBody>
+                    <a:bodyPr/>
+                    <a:lstStyle/>
+                    <a:p>
+                      <a:pPr indent="0" marL="0">
+                        <a:buNone/>
+                      </a:pPr>
+                      <a:endParaRPr lang="en-US" sz="1600" dirty="0"/>
+                    </a:p>
+                  </a:txBody>
+                  <a:tcPr marL="109728" marR="109728" marT="36576" marB="36576" anchor="ctr">
+                    <a:lnL w="0" cap="flat" cmpd="sng" algn="ctr">
+                      <a:noFill/>
+                    </a:lnL>
+                    <a:lnR w="0" cap="flat" cmpd="sng" algn="ctr">
+                      <a:noFill/>
+                    </a:lnR>
+                    <a:lnT w="0" cap="flat" cmpd="sng" algn="ctr">
+                      <a:noFill/>
+                    </a:lnT>
+                    <a:lnB w="9525" cap="flat" cmpd="sng" algn="ctr">
+                      <a:solidFill>
+                        <a:srgbClr val="D3D9DE"/>
+                      </a:solidFill>
+                      <a:prstDash val="solid"/>
+                      <a:round/>
+                      <a:headEnd type="none" w="med" len="med"/>
+                      <a:tailEnd type="none" w="med" len="med"/>
+                    </a:lnB>
+                  </a:tcPr>
+                </a:tc>
+              </a:tr>
             </a:tbl>
           </a:graphicData>
         </a:graphic>
       </p:graphicFrame>
-      <p:sp>
-        <p:nvSpPr>
-          <p:cNvPr id="5" name="Text 2"/>
-          <p:cNvSpPr txBox="1"/>
-          <p:nvPr/>
-        </p:nvSpPr>
-        <p:spPr>
-          <a:xfrm>
-            <a:off x="594360" y="4050792"/>
-            <a:ext cx="11002975" cy="411480"/>
-          </a:xfrm>
-          <a:prstGeom prst="rect">
-            <a:avLst/>
-          </a:prstGeom>
-          <a:noFill/>
-          <a:ln/>
-        </p:spPr>
-        <p:txBody>
-          <a:bodyPr wrap="square" lIns="0" tIns="0" rIns="0" bIns="0" rtlCol="0" anchor="ctr"/>
-          <a:lstStyle/>
-          <a:p>
-            <a:pPr indent="0" marL="0">
-              <a:buNone/>
-            </a:pPr>
-            <a:r>
-              <a:rPr lang="en-US" sz="1600" dirty="0">
-                <a:solidFill>
-                  <a:schemeClr val="tx2"/>
-                </a:solidFill>
-              </a:rPr>
-              <a:t>Écartée : la 4G (couverture incertaine). La liaison satellite est à l'essai comme secours.</a:t>
-            </a:r>
-            <a:endParaRPr lang="en-US" sz="1600" dirty="0"/>
-          </a:p>
-        </p:txBody>
-      </p:sp>
       <p:pic>
         <p:nvPicPr>
-          <p:cNvPr id="6" name="Image 0" descr="Antennes placées hors des zones en carbone">    </p:cNvPr>
+          <p:cNvPr id="5" name="Image 0" descr="Radio de télémétrie longue portée (type RFD900)">    </p:cNvPr>
           <p:cNvPicPr>
             <a:picLocks noChangeAspect="1"/>
           </p:cNvPicPr>
@@ -8487,8 +10189,8 @@
         </p:blipFill>
         <p:spPr>
           <a:xfrm>
-            <a:off x="4224884" y="4645152"/>
-            <a:ext cx="3741928" cy="1161288"/>
+            <a:off x="2262921" y="4114800"/>
+            <a:ext cx="1981486" cy="1508760"/>
           </a:xfrm>
           <a:prstGeom prst="rect">
             <a:avLst/>
@@ -8497,14 +10199,14 @@
       </p:pic>
       <p:sp>
         <p:nvSpPr>
-          <p:cNvPr id="7" name="Cadre z_face_centre"/>
+          <p:cNvPr id="6" name="Cadre radio_longue_portee"/>
           <p:cNvSpPr/>
           <p:nvPr/>
         </p:nvSpPr>
         <p:spPr>
           <a:xfrm>
-            <a:off x="4224884" y="4645152"/>
-            <a:ext cx="3741928" cy="1161288"/>
+            <a:off x="2262921" y="4114800"/>
+            <a:ext cx="1981486" cy="1508760"/>
           </a:xfrm>
           <a:prstGeom prst="rect">
             <a:avLst/>
@@ -8519,14 +10221,14 @@
       </p:sp>
       <p:sp>
         <p:nvSpPr>
-          <p:cNvPr id="8" name="Text 4"/>
+          <p:cNvPr id="7" name="Text 3"/>
           <p:cNvSpPr txBox="1"/>
           <p:nvPr/>
         </p:nvSpPr>
         <p:spPr>
           <a:xfrm>
-            <a:off x="4224884" y="5861304"/>
-            <a:ext cx="3741928" cy="256032"/>
+            <a:off x="2262921" y="5678424"/>
+            <a:ext cx="1981486" cy="256032"/>
           </a:xfrm>
           <a:prstGeom prst="rect">
             <a:avLst/>
@@ -8547,9 +10249,127 @@
                   <a:schemeClr val="tx2"/>
                 </a:solidFill>
               </a:rPr>
-              <a:t>Antennes placées hors des zones en carbone</a:t>
+              <a:t>Radio de télémétrie longue portée (type RFD900)</a:t>
             </a:r>
             <a:endParaRPr lang="en-US" sz="1100" dirty="0"/>
+          </a:p>
+        </p:txBody>
+      </p:sp>
+      <p:pic>
+        <p:nvPicPr>
+          <p:cNvPr id="8" name="Image 1" descr="Radiocommandes et récepteurs">    </p:cNvPr>
+          <p:cNvPicPr>
+            <a:picLocks noChangeAspect="1"/>
+          </p:cNvPicPr>
+          <p:nvPr/>
+        </p:nvPicPr>
+        <p:blipFill>
+          <a:blip r:embed="rId2"/>
+          <a:stretch>
+            <a:fillRect/>
+          </a:stretch>
+        </p:blipFill>
+        <p:spPr>
+          <a:xfrm>
+            <a:off x="7932191" y="4114800"/>
+            <a:ext cx="2011680" cy="1508760"/>
+          </a:xfrm>
+          <a:prstGeom prst="rect">
+            <a:avLst/>
+          </a:prstGeom>
+        </p:spPr>
+      </p:pic>
+      <p:sp>
+        <p:nvSpPr>
+          <p:cNvPr id="9" name="Cadre radios_rc"/>
+          <p:cNvSpPr/>
+          <p:nvPr/>
+        </p:nvSpPr>
+        <p:spPr>
+          <a:xfrm>
+            <a:off x="7932191" y="4114800"/>
+            <a:ext cx="2011680" cy="1508760"/>
+          </a:xfrm>
+          <a:prstGeom prst="rect">
+            <a:avLst/>
+          </a:prstGeom>
+          <a:ln w="9525">
+            <a:solidFill>
+              <a:schemeClr val="accent5"/>
+            </a:solidFill>
+            <a:prstDash val="solid"/>
+          </a:ln>
+        </p:spPr>
+      </p:sp>
+      <p:sp>
+        <p:nvSpPr>
+          <p:cNvPr id="10" name="Text 5"/>
+          <p:cNvSpPr txBox="1"/>
+          <p:nvPr/>
+        </p:nvSpPr>
+        <p:spPr>
+          <a:xfrm>
+            <a:off x="7932191" y="5678424"/>
+            <a:ext cx="2011680" cy="256032"/>
+          </a:xfrm>
+          <a:prstGeom prst="rect">
+            <a:avLst/>
+          </a:prstGeom>
+          <a:noFill/>
+          <a:ln/>
+        </p:spPr>
+        <p:txBody>
+          <a:bodyPr wrap="square" lIns="0" tIns="0" rIns="0" bIns="0" rtlCol="0" anchor="ctr"/>
+          <a:lstStyle/>
+          <a:p>
+            <a:pPr indent="0" marL="0">
+              <a:buNone/>
+            </a:pPr>
+            <a:r>
+              <a:rPr lang="en-US" sz="1100" i="1" dirty="0">
+                <a:solidFill>
+                  <a:schemeClr val="tx2"/>
+                </a:solidFill>
+              </a:rPr>
+              <a:t>Radiocommandes et récepteurs</a:t>
+            </a:r>
+            <a:endParaRPr lang="en-US" sz="1100" dirty="0"/>
+          </a:p>
+        </p:txBody>
+      </p:sp>
+      <p:sp>
+        <p:nvSpPr>
+          <p:cNvPr id="11" name="Text 6"/>
+          <p:cNvSpPr txBox="1"/>
+          <p:nvPr/>
+        </p:nvSpPr>
+        <p:spPr>
+          <a:xfrm>
+            <a:off x="594360" y="6053328"/>
+            <a:ext cx="11002975" cy="201168"/>
+          </a:xfrm>
+          <a:prstGeom prst="rect">
+            <a:avLst/>
+          </a:prstGeom>
+          <a:noFill/>
+          <a:ln/>
+        </p:spPr>
+        <p:txBody>
+          <a:bodyPr wrap="square" lIns="0" tIns="0" rIns="0" bIns="0" rtlCol="0" anchor="ctr"/>
+          <a:lstStyle/>
+          <a:p>
+            <a:pPr indent="0" marL="0">
+              <a:buNone/>
+            </a:pPr>
+            <a:r>
+              <a:rPr lang="en-US" sz="900" i="1" dirty="0">
+                <a:solidFill>
+                  <a:schemeClr val="tx2"/>
+                </a:solidFill>
+              </a:rPr>
+              <a:t>Photos de composants (exemples) : wiki ArduPilot, CC BY-SA 3.0 ; Raspberry Pi Ltd, CC BY-SA 4.0.</a:t>
+            </a:r>
+            <a:endParaRPr lang="en-US" sz="900" dirty="0"/>
           </a:p>
         </p:txBody>
       </p:sp>
@@ -8592,7 +10412,7 @@
             <a:pPr algn="r"/>
             <a:fld id="{F7021451-1387-4CA6-816F-3879F97B5CBC}" type="slidenum">
               <a:rPr b="0" lang="en-US"/>
-              <a:t>15</a:t>
+              <a:t>16</a:t>
             </a:fld>
             <a:endParaRPr lang="en-US"/>
           </a:p>
@@ -8606,9 +10426,9 @@
 </p:sld>
 </file>
 
-<file path=ppt/slides/slide16.xml><?xml version="1.0" encoding="utf-8"?>
+<file path=ppt/slides/slide17.xml><?xml version="1.0" encoding="utf-8"?>
 <p:sld xmlns:a="http://schemas.openxmlformats.org/drawingml/2006/main" xmlns:r="http://schemas.openxmlformats.org/officeDocument/2006/relationships" xmlns:p="http://schemas.openxmlformats.org/presentationml/2006/main">
-  <p:cSld name="Slide 16">
+  <p:cSld name="Slide 17">
     <p:spTree>
       <p:nvGrpSpPr>
         <p:cNvPr id="1" name=""/>
@@ -8699,7 +10519,7 @@
       </p:sp>
       <p:graphicFrame>
         <p:nvGraphicFramePr>
-          <p:cNvPr id="17" name="Table 0"/>
+          <p:cNvPr id="18" name="Table 0"/>
           <p:cNvGraphicFramePr>
             <a:graphicFrameLocks noGrp="1"/>
           </p:cNvGraphicFramePr>
@@ -9428,7 +11248,7 @@
             <a:pPr algn="r"/>
             <a:fld id="{F7021451-1387-4CA6-816F-3879F97B5CBC}" type="slidenum">
               <a:rPr b="0" lang="en-US"/>
-              <a:t>16</a:t>
+              <a:t>17</a:t>
             </a:fld>
             <a:endParaRPr lang="en-US"/>
           </a:p>
@@ -9442,9 +11262,9 @@
 </p:sld>
 </file>
 
-<file path=ppt/slides/slide17.xml><?xml version="1.0" encoding="utf-8"?>
+<file path=ppt/slides/slide18.xml><?xml version="1.0" encoding="utf-8"?>
 <p:sld xmlns:a="http://schemas.openxmlformats.org/drawingml/2006/main" xmlns:r="http://schemas.openxmlformats.org/officeDocument/2006/relationships" xmlns:p="http://schemas.openxmlformats.org/presentationml/2006/main">
-  <p:cSld name="Slide 17">
+  <p:cSld name="Slide 18">
     <p:spTree>
       <p:nvGrpSpPr>
         <p:cNvPr id="1" name=""/>
@@ -9535,7 +11355,7 @@
       </p:sp>
       <p:graphicFrame>
         <p:nvGraphicFramePr>
-          <p:cNvPr id="18" name="Table 0"/>
+          <p:cNvPr id="19" name="Table 0"/>
           <p:cNvGraphicFramePr>
             <a:graphicFrameLocks noGrp="1"/>
           </p:cNvGraphicFramePr>
@@ -10428,507 +12248,6 @@
             <a:pPr algn="r"/>
             <a:fld id="{F7021451-1387-4CA6-816F-3879F97B5CBC}" type="slidenum">
               <a:rPr b="0" lang="en-US"/>
-              <a:t>17</a:t>
-            </a:fld>
-            <a:endParaRPr lang="en-US"/>
-          </a:p>
-        </p:txBody>
-      </p:sp>
-    </p:spTree>
-  </p:cSld>
-  <p:clrMapOvr>
-    <a:masterClrMapping/>
-  </p:clrMapOvr>
-</p:sld>
-</file>
-
-<file path=ppt/slides/slide18.xml><?xml version="1.0" encoding="utf-8"?>
-<p:sld xmlns:a="http://schemas.openxmlformats.org/drawingml/2006/main" xmlns:r="http://schemas.openxmlformats.org/officeDocument/2006/relationships" xmlns:p="http://schemas.openxmlformats.org/presentationml/2006/main">
-  <p:cSld name="Slide 18">
-    <p:spTree>
-      <p:nvGrpSpPr>
-        <p:cNvPr id="1" name=""/>
-        <p:cNvGrpSpPr/>
-        <p:nvPr/>
-      </p:nvGrpSpPr>
-      <p:grpSpPr>
-        <a:xfrm>
-          <a:off x="0" y="0"/>
-          <a:ext cx="0" cy="0"/>
-          <a:chOff x="0" y="0"/>
-          <a:chExt cx="0" cy="0"/>
-        </a:xfrm>
-      </p:grpSpPr>
-      <p:sp>
-        <p:nvSpPr>
-          <p:cNvPr id="2" name="Text 0"/>
-          <p:cNvSpPr/>
-          <p:nvPr>
-            <p:ph idx="100" type="title" hasCustomPrompt="1"/>
-          </p:nvPr>
-        </p:nvSpPr>
-        <p:spPr>
-          <a:xfrm>
-            <a:off x="594360" y="411480"/>
-            <a:ext cx="11002975" cy="685800"/>
-          </a:xfrm>
-          <a:prstGeom prst="rect">
-            <a:avLst/>
-          </a:prstGeom>
-          <a:noFill/>
-          <a:ln/>
-        </p:spPr>
-        <p:txBody>
-          <a:bodyPr wrap="square" lIns="0" tIns="0" rIns="0" bIns="0" rtlCol="0" anchor="ctr"/>
-          <a:lstStyle/>
-          <a:p>
-            <a:pPr algn="l" indent="0" marL="0">
-              <a:buNone/>
-            </a:pPr>
-            <a:r>
-              <a:rPr lang="en-US" sz="3000" b="1" dirty="0">
-                <a:solidFill>
-                  <a:schemeClr val="tx1"/>
-                </a:solidFill>
-              </a:rPr>
-              <a:t>La réglementation</a:t>
-            </a:r>
-            <a:endParaRPr lang="en-US" sz="3000" dirty="0"/>
-          </a:p>
-        </p:txBody>
-      </p:sp>
-      <p:sp>
-        <p:nvSpPr>
-          <p:cNvPr id="3" name="Text 1"/>
-          <p:cNvSpPr txBox="1"/>
-          <p:nvPr/>
-        </p:nvSpPr>
-        <p:spPr>
-          <a:xfrm>
-            <a:off x="7025335" y="6382512"/>
-            <a:ext cx="4069080" cy="274320"/>
-          </a:xfrm>
-          <a:prstGeom prst="rect">
-            <a:avLst/>
-          </a:prstGeom>
-          <a:noFill/>
-          <a:ln/>
-        </p:spPr>
-        <p:txBody>
-          <a:bodyPr wrap="square" lIns="0" tIns="0" rIns="0" bIns="0" rtlCol="0" anchor="ctr"/>
-          <a:lstStyle/>
-          <a:p>
-            <a:pPr algn="r" indent="0" marL="0">
-              <a:buNone/>
-            </a:pPr>
-            <a:r>
-              <a:rPr lang="en-US" sz="1000" dirty="0">
-                <a:solidFill>
-                  <a:schemeClr val="tx2"/>
-                </a:solidFill>
-              </a:rPr>
-              <a:t>Cédric KODJOVI</a:t>
-            </a:r>
-            <a:endParaRPr lang="en-US" sz="1000" dirty="0"/>
-          </a:p>
-        </p:txBody>
-      </p:sp>
-      <p:sp>
-        <p:nvSpPr>
-          <p:cNvPr id="4" name="Text 2"/>
-          <p:cNvSpPr txBox="1"/>
-          <p:nvPr/>
-        </p:nvSpPr>
-        <p:spPr>
-          <a:xfrm>
-            <a:off x="594360" y="1417320"/>
-            <a:ext cx="5227168" cy="365760"/>
-          </a:xfrm>
-          <a:prstGeom prst="rect">
-            <a:avLst/>
-          </a:prstGeom>
-          <a:noFill/>
-          <a:ln/>
-        </p:spPr>
-        <p:txBody>
-          <a:bodyPr wrap="square" lIns="0" tIns="0" rIns="0" bIns="0" rtlCol="0" anchor="ctr"/>
-          <a:lstStyle/>
-          <a:p>
-            <a:pPr indent="0" marL="0">
-              <a:buNone/>
-            </a:pPr>
-            <a:r>
-              <a:rPr lang="en-US" sz="1800" b="1" dirty="0">
-                <a:solidFill>
-                  <a:schemeClr val="accent1"/>
-                </a:solidFill>
-              </a:rPr>
-              <a:t>Le vol</a:t>
-            </a:r>
-            <a:endParaRPr lang="en-US" sz="1800" dirty="0"/>
-          </a:p>
-        </p:txBody>
-      </p:sp>
-      <p:sp>
-        <p:nvSpPr>
-          <p:cNvPr id="5" name="Text 3"/>
-          <p:cNvSpPr txBox="1"/>
-          <p:nvPr/>
-        </p:nvSpPr>
-        <p:spPr>
-          <a:xfrm>
-            <a:off x="594360" y="1874520"/>
-            <a:ext cx="5227168" cy="2834640"/>
-          </a:xfrm>
-          <a:prstGeom prst="rect">
-            <a:avLst/>
-          </a:prstGeom>
-          <a:noFill/>
-          <a:ln/>
-        </p:spPr>
-        <p:txBody>
-          <a:bodyPr wrap="square" lIns="0" tIns="0" rIns="0" bIns="0" rtlCol="0" anchor="t"/>
-          <a:lstStyle/>
-          <a:p>
-            <a:pPr marL="228600" indent="-228600">
-              <a:spcAft>
-                <a:spcPts val="800"/>
-              </a:spcAft>
-              <a:buSzPct val="100000"/>
-              <a:buChar char="•"/>
-            </a:pPr>
-            <a:r>
-              <a:rPr lang="en-US" sz="1600" dirty="0">
-                <a:solidFill>
-                  <a:schemeClr val="tx1"/>
-                </a:solidFill>
-              </a:rPr>
-              <a:t>Autorisation de l'ANAC Togo avant tout vol</a:t>
-            </a:r>
-            <a:endParaRPr lang="en-US" sz="1600" dirty="0"/>
-          </a:p>
-          <a:p>
-            <a:pPr marL="228600" indent="-228600">
-              <a:spcAft>
-                <a:spcPts val="800"/>
-              </a:spcAft>
-              <a:buSzPct val="100000"/>
-              <a:buChar char="•"/>
-            </a:pPr>
-            <a:r>
-              <a:rPr lang="en-US" sz="1600" dirty="0">
-                <a:solidFill>
-                  <a:schemeClr val="tx1"/>
-                </a:solidFill>
-              </a:rPr>
-              <a:t>Vol en vue directe du télépilote, sauf autorisation</a:t>
-            </a:r>
-            <a:endParaRPr lang="en-US" sz="1600" dirty="0"/>
-          </a:p>
-          <a:p>
-            <a:pPr marL="228600" indent="-228600">
-              <a:spcAft>
-                <a:spcPts val="800"/>
-              </a:spcAft>
-              <a:buSzPct val="100000"/>
-              <a:buChar char="•"/>
-            </a:pPr>
-            <a:r>
-              <a:rPr lang="en-US" sz="1600" dirty="0">
-                <a:solidFill>
-                  <a:schemeClr val="tx1"/>
-                </a:solidFill>
-              </a:rPr>
-              <a:t>Hauteur et zone limitées, géorepérage activé</a:t>
-            </a:r>
-            <a:endParaRPr lang="en-US" sz="1600" dirty="0"/>
-          </a:p>
-          <a:p>
-            <a:pPr marL="228600" indent="-228600">
-              <a:spcAft>
-                <a:spcPts val="800"/>
-              </a:spcAft>
-              <a:buSzPct val="100000"/>
-              <a:buChar char="•"/>
-            </a:pPr>
-            <a:r>
-              <a:rPr lang="en-US" sz="1600" dirty="0">
-                <a:solidFill>
-                  <a:schemeClr val="tx1"/>
-                </a:solidFill>
-              </a:rPr>
-              <a:t>Pas de vol au-dessus de la foule ni près d'un aérodrome sans accord</a:t>
-            </a:r>
-            <a:endParaRPr lang="en-US" sz="1600" dirty="0"/>
-          </a:p>
-          <a:p>
-            <a:pPr marL="228600" indent="-228600">
-              <a:spcAft>
-                <a:spcPts val="800"/>
-              </a:spcAft>
-              <a:buSzPct val="100000"/>
-              <a:buChar char="•"/>
-            </a:pPr>
-            <a:r>
-              <a:rPr lang="en-US" sz="1600" dirty="0">
-                <a:solidFill>
-                  <a:schemeClr val="tx1"/>
-                </a:solidFill>
-              </a:rPr>
-              <a:t>Télépilote formé, check-lists avant et après vol</a:t>
-            </a:r>
-            <a:endParaRPr lang="en-US" sz="1600" dirty="0"/>
-          </a:p>
-        </p:txBody>
-      </p:sp>
-      <p:sp>
-        <p:nvSpPr>
-          <p:cNvPr id="6" name="Text 4"/>
-          <p:cNvSpPr txBox="1"/>
-          <p:nvPr/>
-        </p:nvSpPr>
-        <p:spPr>
-          <a:xfrm>
-            <a:off x="6370168" y="1417320"/>
-            <a:ext cx="5227168" cy="365760"/>
-          </a:xfrm>
-          <a:prstGeom prst="rect">
-            <a:avLst/>
-          </a:prstGeom>
-          <a:noFill/>
-          <a:ln/>
-        </p:spPr>
-        <p:txBody>
-          <a:bodyPr wrap="square" lIns="0" tIns="0" rIns="0" bIns="0" rtlCol="0" anchor="ctr"/>
-          <a:lstStyle/>
-          <a:p>
-            <a:pPr indent="0" marL="0">
-              <a:buNone/>
-            </a:pPr>
-            <a:r>
-              <a:rPr lang="en-US" sz="1800" b="1" dirty="0">
-                <a:solidFill>
-                  <a:schemeClr val="accent1"/>
-                </a:solidFill>
-              </a:rPr>
-              <a:t>Les ondes et les données</a:t>
-            </a:r>
-            <a:endParaRPr lang="en-US" sz="1800" dirty="0"/>
-          </a:p>
-        </p:txBody>
-      </p:sp>
-      <p:sp>
-        <p:nvSpPr>
-          <p:cNvPr id="7" name="Text 5"/>
-          <p:cNvSpPr txBox="1"/>
-          <p:nvPr/>
-        </p:nvSpPr>
-        <p:spPr>
-          <a:xfrm>
-            <a:off x="6370168" y="1874520"/>
-            <a:ext cx="5227168" cy="2834640"/>
-          </a:xfrm>
-          <a:prstGeom prst="rect">
-            <a:avLst/>
-          </a:prstGeom>
-          <a:noFill/>
-          <a:ln/>
-        </p:spPr>
-        <p:txBody>
-          <a:bodyPr wrap="square" lIns="0" tIns="0" rIns="0" bIns="0" rtlCol="0" anchor="t"/>
-          <a:lstStyle/>
-          <a:p>
-            <a:pPr marL="228600" indent="-228600">
-              <a:spcAft>
-                <a:spcPts val="800"/>
-              </a:spcAft>
-              <a:buSzPct val="100000"/>
-              <a:buChar char="•"/>
-            </a:pPr>
-            <a:r>
-              <a:rPr lang="en-US" sz="1600" dirty="0">
-                <a:solidFill>
-                  <a:schemeClr val="tx1"/>
-                </a:solidFill>
-              </a:rPr>
-              <a:t>Fréquences radio autorisées par l'ARCEP</a:t>
-            </a:r>
-            <a:endParaRPr lang="en-US" sz="1600" dirty="0"/>
-          </a:p>
-          <a:p>
-            <a:pPr marL="228600" indent="-228600">
-              <a:spcAft>
-                <a:spcPts val="800"/>
-              </a:spcAft>
-              <a:buSzPct val="100000"/>
-              <a:buChar char="•"/>
-            </a:pPr>
-            <a:r>
-              <a:rPr lang="en-US" sz="1600" dirty="0">
-                <a:solidFill>
-                  <a:schemeClr val="tx1"/>
-                </a:solidFill>
-              </a:rPr>
-              <a:t>Protection des données personnelles (loi togolaise de 2019)</a:t>
-            </a:r>
-            <a:endParaRPr lang="en-US" sz="1600" dirty="0"/>
-          </a:p>
-          <a:p>
-            <a:pPr marL="228600" indent="-228600">
-              <a:spcAft>
-                <a:spcPts val="800"/>
-              </a:spcAft>
-              <a:buSzPct val="100000"/>
-              <a:buChar char="•"/>
-            </a:pPr>
-            <a:r>
-              <a:rPr lang="en-US" sz="1600" dirty="0">
-                <a:solidFill>
-                  <a:schemeClr val="tx1"/>
-                </a:solidFill>
-              </a:rPr>
-              <a:t>Pas de reconnaissance faciale, images d'alerte seulement</a:t>
-            </a:r>
-            <a:endParaRPr lang="en-US" sz="1600" dirty="0"/>
-          </a:p>
-          <a:p>
-            <a:pPr marL="228600" indent="-228600">
-              <a:spcAft>
-                <a:spcPts val="800"/>
-              </a:spcAft>
-              <a:buSzPct val="100000"/>
-              <a:buChar char="•"/>
-            </a:pPr>
-            <a:r>
-              <a:rPr lang="en-US" sz="1600" dirty="0">
-                <a:solidFill>
-                  <a:schemeClr val="tx1"/>
-                </a:solidFill>
-              </a:rPr>
-              <a:t>Accès aux données réservé aux personnes autorisées</a:t>
-            </a:r>
-            <a:endParaRPr lang="en-US" sz="1600" dirty="0"/>
-          </a:p>
-          <a:p>
-            <a:pPr marL="228600" indent="-228600">
-              <a:spcAft>
-                <a:spcPts val="800"/>
-              </a:spcAft>
-              <a:buSzPct val="100000"/>
-              <a:buChar char="•"/>
-            </a:pPr>
-            <a:r>
-              <a:rPr lang="en-US" sz="1600" dirty="0">
-                <a:solidFill>
-                  <a:schemeClr val="tx1"/>
-                </a:solidFill>
-              </a:rPr>
-              <a:t>Essais sur site uniquement avec l'accord de l'exploitant</a:t>
-            </a:r>
-            <a:endParaRPr lang="en-US" sz="1600" dirty="0"/>
-          </a:p>
-        </p:txBody>
-      </p:sp>
-      <p:sp>
-        <p:nvSpPr>
-          <p:cNvPr id="8" name="Encadré"/>
-          <p:cNvSpPr/>
-          <p:nvPr/>
-        </p:nvSpPr>
-        <p:spPr>
-          <a:xfrm>
-            <a:off x="594360" y="4892040"/>
-            <a:ext cx="11002975" cy="685800"/>
-          </a:xfrm>
-          <a:prstGeom prst="rect">
-            <a:avLst/>
-          </a:prstGeom>
-          <a:solidFill>
-            <a:schemeClr val="bg2"/>
-          </a:solidFill>
-          <a:ln w="9525">
-            <a:solidFill>
-              <a:schemeClr val="accent5"/>
-            </a:solidFill>
-            <a:prstDash val="solid"/>
-          </a:ln>
-        </p:spPr>
-      </p:sp>
-      <p:sp>
-        <p:nvSpPr>
-          <p:cNvPr id="9" name="Text 7"/>
-          <p:cNvSpPr txBox="1"/>
-          <p:nvPr/>
-        </p:nvSpPr>
-        <p:spPr>
-          <a:xfrm>
-            <a:off x="822960" y="4892040"/>
-            <a:ext cx="10545775" cy="685800"/>
-          </a:xfrm>
-          <a:prstGeom prst="rect">
-            <a:avLst/>
-          </a:prstGeom>
-          <a:noFill/>
-          <a:ln/>
-        </p:spPr>
-        <p:txBody>
-          <a:bodyPr wrap="square" lIns="0" tIns="0" rIns="0" bIns="0" rtlCol="0" anchor="ctr"/>
-          <a:lstStyle/>
-          <a:p>
-            <a:pPr indent="0" marL="0">
-              <a:buNone/>
-            </a:pPr>
-            <a:r>
-              <a:rPr lang="en-US" sz="1700" dirty="0">
-                <a:solidFill>
-                  <a:schemeClr val="tx1"/>
-                </a:solidFill>
-              </a:rPr>
-              <a:t>Nous ne volons qu'avec les autorisations nécessaires, et nous respectons le règlement du concours.</a:t>
-            </a:r>
-            <a:endParaRPr lang="en-US" sz="1700" dirty="0"/>
-          </a:p>
-        </p:txBody>
-      </p:sp>
-      <p:sp>
-        <p:nvSpPr>
-          <p:cNvPr id="25" name="Slide Number Placeholder 0"/>
-          <p:cNvSpPr>
-            <a:spLocks noGrp="1"/>
-          </p:cNvSpPr>
-          <p:nvPr>
-            <p:ph type="sldNum" sz="quarter" idx="4294967295"/>
-          </p:nvPr>
-        </p:nvSpPr>
-        <p:spPr>
-          <a:xfrm>
-            <a:off x="11231575" y="6382512"/>
-            <a:ext cx="365760" cy="274320"/>
-          </a:xfrm>
-          <a:prstGeom prst="rect">
-            <a:avLst/>
-          </a:prstGeom>
-          <a:extLst>
-            <a:ext uri="{C572A759-6A51-4108-AA02-DFA0A04FC94B}">
-              <ma14:wrappingTextBoxFlag xmlns:ma14="http://schemas.microsoft.com/office/mac/drawingml/2011/main" val="0"/>
-            </a:ext>
-          </a:extLst>
-        </p:spPr>
-        <p:txBody>
-          <a:bodyPr lIns="0" tIns="0" rIns="0" bIns="0"/>
-          <a:lstStyle>
-            <a:lvl1pPr>
-              <a:defRPr sz="1000">
-                <a:solidFill>
-                  <a:schemeClr val="tx2"/>
-                </a:solidFill>
-              </a:defRPr>
-            </a:lvl1pPr>
-          </a:lstStyle>
-          <a:p>
-            <a:pPr algn="r"/>
-            <a:fld id="{F7021451-1387-4CA6-816F-3879F97B5CBC}" type="slidenum">
-              <a:rPr b="0" lang="en-US"/>
               <a:t>18</a:t>
             </a:fld>
             <a:endParaRPr lang="en-US"/>
@@ -10992,7 +12311,7 @@
                   <a:schemeClr val="tx1"/>
                 </a:solidFill>
               </a:rPr>
-              <a:t>La sécurité</a:t>
+              <a:t>La réglementation</a:t>
             </a:r>
             <a:endParaRPr lang="en-US" sz="3000" dirty="0"/>
           </a:p>
@@ -11028,7 +12347,7 @@
                   <a:schemeClr val="tx2"/>
                 </a:solidFill>
               </a:rPr>
-              <a:t>Makafui de MEDEIROS</a:t>
+              <a:t>Cédric KODJOVI</a:t>
             </a:r>
             <a:endParaRPr lang="en-US" sz="1000" dirty="0"/>
           </a:p>
@@ -11064,7 +12383,7 @@
                   <a:schemeClr val="accent1"/>
                 </a:solidFill>
               </a:rPr>
-              <a:t>Sécurité du vol</a:t>
+              <a:t>Le vol</a:t>
             </a:r>
             <a:endParaRPr lang="en-US" sz="1800" dirty="0"/>
           </a:p>
@@ -11104,7 +12423,7 @@
                   <a:schemeClr val="tx1"/>
                 </a:solidFill>
               </a:rPr>
-              <a:t>Contrôleur de vol séparé du module IA</a:t>
+              <a:t>Autorisation de l'ANAC Togo avant tout vol</a:t>
             </a:r>
             <a:endParaRPr lang="en-US" sz="1600" dirty="0"/>
           </a:p>
@@ -11122,7 +12441,7 @@
                   <a:schemeClr val="tx1"/>
                 </a:solidFill>
               </a:rPr>
-              <a:t>Retour automatique au point de départ (RTH)</a:t>
+              <a:t>Vol en vue directe du télépilote, sauf autorisation</a:t>
             </a:r>
             <a:endParaRPr lang="en-US" sz="1600" dirty="0"/>
           </a:p>
@@ -11140,7 +12459,7 @@
                   <a:schemeClr val="tx1"/>
                 </a:solidFill>
               </a:rPr>
-              <a:t>Fail-safe radio, batterie et GPS</a:t>
+              <a:t>Hauteur et zone limitées, géorepérage activé</a:t>
             </a:r>
             <a:endParaRPr lang="en-US" sz="1600" dirty="0"/>
           </a:p>
@@ -11158,7 +12477,7 @@
                   <a:schemeClr val="tx1"/>
                 </a:solidFill>
               </a:rPr>
-              <a:t>Coupure d'urgence des moteurs</a:t>
+              <a:t>Pas de vol au-dessus de la foule ni près d'un aérodrome sans accord</a:t>
             </a:r>
             <a:endParaRPr lang="en-US" sz="1600" dirty="0"/>
           </a:p>
@@ -11176,10 +12495,68 @@
                   <a:schemeClr val="tx1"/>
                 </a:solidFill>
               </a:rPr>
-              <a:t>Géorepérage : zone et hauteur maximales</a:t>
+              <a:t>Télépilote formé, check-lists avant et après vol</a:t>
             </a:r>
             <a:endParaRPr lang="en-US" sz="1600" dirty="0"/>
           </a:p>
+        </p:txBody>
+      </p:sp>
+      <p:sp>
+        <p:nvSpPr>
+          <p:cNvPr id="6" name="Text 4"/>
+          <p:cNvSpPr txBox="1"/>
+          <p:nvPr/>
+        </p:nvSpPr>
+        <p:spPr>
+          <a:xfrm>
+            <a:off x="6370168" y="1417320"/>
+            <a:ext cx="5227168" cy="365760"/>
+          </a:xfrm>
+          <a:prstGeom prst="rect">
+            <a:avLst/>
+          </a:prstGeom>
+          <a:noFill/>
+          <a:ln/>
+        </p:spPr>
+        <p:txBody>
+          <a:bodyPr wrap="square" lIns="0" tIns="0" rIns="0" bIns="0" rtlCol="0" anchor="ctr"/>
+          <a:lstStyle/>
+          <a:p>
+            <a:pPr indent="0" marL="0">
+              <a:buNone/>
+            </a:pPr>
+            <a:r>
+              <a:rPr lang="en-US" sz="1800" b="1" dirty="0">
+                <a:solidFill>
+                  <a:schemeClr val="accent1"/>
+                </a:solidFill>
+              </a:rPr>
+              <a:t>Les ondes et les données</a:t>
+            </a:r>
+            <a:endParaRPr lang="en-US" sz="1800" dirty="0"/>
+          </a:p>
+        </p:txBody>
+      </p:sp>
+      <p:sp>
+        <p:nvSpPr>
+          <p:cNvPr id="7" name="Text 5"/>
+          <p:cNvSpPr txBox="1"/>
+          <p:nvPr/>
+        </p:nvSpPr>
+        <p:spPr>
+          <a:xfrm>
+            <a:off x="6370168" y="1874520"/>
+            <a:ext cx="5227168" cy="2834640"/>
+          </a:xfrm>
+          <a:prstGeom prst="rect">
+            <a:avLst/>
+          </a:prstGeom>
+          <a:noFill/>
+          <a:ln/>
+        </p:spPr>
+        <p:txBody>
+          <a:bodyPr wrap="square" lIns="0" tIns="0" rIns="0" bIns="0" rtlCol="0" anchor="t"/>
+          <a:lstStyle/>
           <a:p>
             <a:pPr marL="228600" indent="-228600">
               <a:spcAft>
@@ -11194,68 +12571,10 @@
                   <a:schemeClr val="tx1"/>
                 </a:solidFill>
               </a:rPr>
-              <a:t>Vérifications automatiques avant décollage</a:t>
+              <a:t>Fréquences radio autorisées par l'ARCEP</a:t>
             </a:r>
             <a:endParaRPr lang="en-US" sz="1600" dirty="0"/>
           </a:p>
-        </p:txBody>
-      </p:sp>
-      <p:sp>
-        <p:nvSpPr>
-          <p:cNvPr id="6" name="Text 4"/>
-          <p:cNvSpPr txBox="1"/>
-          <p:nvPr/>
-        </p:nvSpPr>
-        <p:spPr>
-          <a:xfrm>
-            <a:off x="6370168" y="1417320"/>
-            <a:ext cx="5227168" cy="365760"/>
-          </a:xfrm>
-          <a:prstGeom prst="rect">
-            <a:avLst/>
-          </a:prstGeom>
-          <a:noFill/>
-          <a:ln/>
-        </p:spPr>
-        <p:txBody>
-          <a:bodyPr wrap="square" lIns="0" tIns="0" rIns="0" bIns="0" rtlCol="0" anchor="ctr"/>
-          <a:lstStyle/>
-          <a:p>
-            <a:pPr indent="0" marL="0">
-              <a:buNone/>
-            </a:pPr>
-            <a:r>
-              <a:rPr lang="en-US" sz="1800" b="1" dirty="0">
-                <a:solidFill>
-                  <a:schemeClr val="accent1"/>
-                </a:solidFill>
-              </a:rPr>
-              <a:t>Cybersécurité</a:t>
-            </a:r>
-            <a:endParaRPr lang="en-US" sz="1800" dirty="0"/>
-          </a:p>
-        </p:txBody>
-      </p:sp>
-      <p:sp>
-        <p:nvSpPr>
-          <p:cNvPr id="7" name="Text 5"/>
-          <p:cNvSpPr txBox="1"/>
-          <p:nvPr/>
-        </p:nvSpPr>
-        <p:spPr>
-          <a:xfrm>
-            <a:off x="6370168" y="1874520"/>
-            <a:ext cx="5227168" cy="2834640"/>
-          </a:xfrm>
-          <a:prstGeom prst="rect">
-            <a:avLst/>
-          </a:prstGeom>
-          <a:noFill/>
-          <a:ln/>
-        </p:spPr>
-        <p:txBody>
-          <a:bodyPr wrap="square" lIns="0" tIns="0" rIns="0" bIns="0" rtlCol="0" anchor="t"/>
-          <a:lstStyle/>
           <a:p>
             <a:pPr marL="228600" indent="-228600">
               <a:spcAft>
@@ -11270,7 +12589,7 @@
                   <a:schemeClr val="tx1"/>
                 </a:solidFill>
               </a:rPr>
-              <a:t>Liaison chiffrée</a:t>
+              <a:t>Protection des données personnelles (loi togolaise de 2019)</a:t>
             </a:r>
             <a:endParaRPr lang="en-US" sz="1600" dirty="0"/>
           </a:p>
@@ -11288,7 +12607,7 @@
                   <a:schemeClr val="tx1"/>
                 </a:solidFill>
               </a:rPr>
-              <a:t>Messages MAVLink signés : faux ordres rejetés</a:t>
+              <a:t>Pas de reconnaissance faciale, images d'alerte seulement</a:t>
             </a:r>
             <a:endParaRPr lang="en-US" sz="1600" dirty="0"/>
           </a:p>
@@ -11306,7 +12625,7 @@
                   <a:schemeClr val="tx1"/>
                 </a:solidFill>
               </a:rPr>
-              <a:t>Clé secrète chargée au sol avant le vol</a:t>
+              <a:t>Accès aux données réservé aux personnes autorisées</a:t>
             </a:r>
             <a:endParaRPr lang="en-US" sz="1600" dirty="0"/>
           </a:p>
@@ -11324,43 +12643,7 @@
                   <a:schemeClr val="tx1"/>
                 </a:solidFill>
               </a:rPr>
-              <a:t>Détection du brouillage</a:t>
-            </a:r>
-            <a:endParaRPr lang="en-US" sz="1600" dirty="0"/>
-          </a:p>
-          <a:p>
-            <a:pPr marL="228600" indent="-228600">
-              <a:spcAft>
-                <a:spcPts val="800"/>
-              </a:spcAft>
-              <a:buSzPct val="100000"/>
-              <a:buChar char="•"/>
-            </a:pPr>
-            <a:r>
-              <a:rPr lang="en-US" sz="1600" dirty="0">
-                <a:solidFill>
-                  <a:schemeClr val="tx1"/>
-                </a:solidFill>
-              </a:rPr>
-              <a:t>Anti-leurrage GPS par comparaison des sources</a:t>
-            </a:r>
-            <a:endParaRPr lang="en-US" sz="1600" dirty="0"/>
-          </a:p>
-          <a:p>
-            <a:pPr marL="228600" indent="-228600">
-              <a:spcAft>
-                <a:spcPts val="800"/>
-              </a:spcAft>
-              <a:buSzPct val="100000"/>
-              <a:buChar char="•"/>
-            </a:pPr>
-            <a:r>
-              <a:rPr lang="en-US" sz="1600" dirty="0">
-                <a:solidFill>
-                  <a:schemeClr val="tx1"/>
-                </a:solidFill>
-              </a:rPr>
-              <a:t>Journaux de vol signés : toute modification se voit</a:t>
+              <a:t>Essais sur site uniquement avec l'accord de l'exploitant</a:t>
             </a:r>
             <a:endParaRPr lang="en-US" sz="1600" dirty="0"/>
           </a:p>
@@ -11421,7 +12704,7 @@
                   <a:schemeClr val="tx1"/>
                 </a:solidFill>
               </a:rPr>
-              <a:t>En dernier recours, le canal d'urgence indépendant permet toujours de faire revenir le drone ou de couper les moteurs.</a:t>
+              <a:t>Nous ne volons qu'avec les autorisations nécessaires, et nous respectons le règlement du concours.</a:t>
             </a:r>
             <a:endParaRPr lang="en-US" sz="1700" dirty="0"/>
           </a:p>
@@ -12015,7 +13298,7 @@
                   <a:schemeClr val="tx1"/>
                 </a:solidFill>
               </a:rPr>
-              <a:t>Domaines d'application</a:t>
+              <a:t>La sécurité</a:t>
             </a:r>
             <a:endParaRPr lang="en-US" sz="3000" dirty="0"/>
           </a:p>
@@ -12051,6 +13334,543 @@
                   <a:schemeClr val="tx2"/>
                 </a:solidFill>
               </a:rPr>
+              <a:t>Makafui de MEDEIROS</a:t>
+            </a:r>
+            <a:endParaRPr lang="en-US" sz="1000" dirty="0"/>
+          </a:p>
+        </p:txBody>
+      </p:sp>
+      <p:sp>
+        <p:nvSpPr>
+          <p:cNvPr id="4" name="Text 2"/>
+          <p:cNvSpPr txBox="1"/>
+          <p:nvPr/>
+        </p:nvSpPr>
+        <p:spPr>
+          <a:xfrm>
+            <a:off x="594360" y="1417320"/>
+            <a:ext cx="5227168" cy="365760"/>
+          </a:xfrm>
+          <a:prstGeom prst="rect">
+            <a:avLst/>
+          </a:prstGeom>
+          <a:noFill/>
+          <a:ln/>
+        </p:spPr>
+        <p:txBody>
+          <a:bodyPr wrap="square" lIns="0" tIns="0" rIns="0" bIns="0" rtlCol="0" anchor="ctr"/>
+          <a:lstStyle/>
+          <a:p>
+            <a:pPr indent="0" marL="0">
+              <a:buNone/>
+            </a:pPr>
+            <a:r>
+              <a:rPr lang="en-US" sz="1800" b="1" dirty="0">
+                <a:solidFill>
+                  <a:schemeClr val="accent1"/>
+                </a:solidFill>
+              </a:rPr>
+              <a:t>Sécurité du vol</a:t>
+            </a:r>
+            <a:endParaRPr lang="en-US" sz="1800" dirty="0"/>
+          </a:p>
+        </p:txBody>
+      </p:sp>
+      <p:sp>
+        <p:nvSpPr>
+          <p:cNvPr id="5" name="Text 3"/>
+          <p:cNvSpPr txBox="1"/>
+          <p:nvPr/>
+        </p:nvSpPr>
+        <p:spPr>
+          <a:xfrm>
+            <a:off x="594360" y="1874520"/>
+            <a:ext cx="5227168" cy="2834640"/>
+          </a:xfrm>
+          <a:prstGeom prst="rect">
+            <a:avLst/>
+          </a:prstGeom>
+          <a:noFill/>
+          <a:ln/>
+        </p:spPr>
+        <p:txBody>
+          <a:bodyPr wrap="square" lIns="0" tIns="0" rIns="0" bIns="0" rtlCol="0" anchor="t"/>
+          <a:lstStyle/>
+          <a:p>
+            <a:pPr marL="228600" indent="-228600">
+              <a:spcAft>
+                <a:spcPts val="800"/>
+              </a:spcAft>
+              <a:buSzPct val="100000"/>
+              <a:buChar char="•"/>
+            </a:pPr>
+            <a:r>
+              <a:rPr lang="en-US" sz="1600" dirty="0">
+                <a:solidFill>
+                  <a:schemeClr val="tx1"/>
+                </a:solidFill>
+              </a:rPr>
+              <a:t>Contrôleur de vol séparé du module IA</a:t>
+            </a:r>
+            <a:endParaRPr lang="en-US" sz="1600" dirty="0"/>
+          </a:p>
+          <a:p>
+            <a:pPr marL="228600" indent="-228600">
+              <a:spcAft>
+                <a:spcPts val="800"/>
+              </a:spcAft>
+              <a:buSzPct val="100000"/>
+              <a:buChar char="•"/>
+            </a:pPr>
+            <a:r>
+              <a:rPr lang="en-US" sz="1600" dirty="0">
+                <a:solidFill>
+                  <a:schemeClr val="tx1"/>
+                </a:solidFill>
+              </a:rPr>
+              <a:t>Retour automatique au point de départ (RTH)</a:t>
+            </a:r>
+            <a:endParaRPr lang="en-US" sz="1600" dirty="0"/>
+          </a:p>
+          <a:p>
+            <a:pPr marL="228600" indent="-228600">
+              <a:spcAft>
+                <a:spcPts val="800"/>
+              </a:spcAft>
+              <a:buSzPct val="100000"/>
+              <a:buChar char="•"/>
+            </a:pPr>
+            <a:r>
+              <a:rPr lang="en-US" sz="1600" dirty="0">
+                <a:solidFill>
+                  <a:schemeClr val="tx1"/>
+                </a:solidFill>
+              </a:rPr>
+              <a:t>Fail-safe radio, batterie et GPS</a:t>
+            </a:r>
+            <a:endParaRPr lang="en-US" sz="1600" dirty="0"/>
+          </a:p>
+          <a:p>
+            <a:pPr marL="228600" indent="-228600">
+              <a:spcAft>
+                <a:spcPts val="800"/>
+              </a:spcAft>
+              <a:buSzPct val="100000"/>
+              <a:buChar char="•"/>
+            </a:pPr>
+            <a:r>
+              <a:rPr lang="en-US" sz="1600" dirty="0">
+                <a:solidFill>
+                  <a:schemeClr val="tx1"/>
+                </a:solidFill>
+              </a:rPr>
+              <a:t>Coupure d'urgence des moteurs</a:t>
+            </a:r>
+            <a:endParaRPr lang="en-US" sz="1600" dirty="0"/>
+          </a:p>
+          <a:p>
+            <a:pPr marL="228600" indent="-228600">
+              <a:spcAft>
+                <a:spcPts val="800"/>
+              </a:spcAft>
+              <a:buSzPct val="100000"/>
+              <a:buChar char="•"/>
+            </a:pPr>
+            <a:r>
+              <a:rPr lang="en-US" sz="1600" dirty="0">
+                <a:solidFill>
+                  <a:schemeClr val="tx1"/>
+                </a:solidFill>
+              </a:rPr>
+              <a:t>Géorepérage : zone et hauteur maximales</a:t>
+            </a:r>
+            <a:endParaRPr lang="en-US" sz="1600" dirty="0"/>
+          </a:p>
+          <a:p>
+            <a:pPr marL="228600" indent="-228600">
+              <a:spcAft>
+                <a:spcPts val="800"/>
+              </a:spcAft>
+              <a:buSzPct val="100000"/>
+              <a:buChar char="•"/>
+            </a:pPr>
+            <a:r>
+              <a:rPr lang="en-US" sz="1600" dirty="0">
+                <a:solidFill>
+                  <a:schemeClr val="tx1"/>
+                </a:solidFill>
+              </a:rPr>
+              <a:t>Vérifications automatiques avant décollage</a:t>
+            </a:r>
+            <a:endParaRPr lang="en-US" sz="1600" dirty="0"/>
+          </a:p>
+        </p:txBody>
+      </p:sp>
+      <p:sp>
+        <p:nvSpPr>
+          <p:cNvPr id="6" name="Text 4"/>
+          <p:cNvSpPr txBox="1"/>
+          <p:nvPr/>
+        </p:nvSpPr>
+        <p:spPr>
+          <a:xfrm>
+            <a:off x="6370168" y="1417320"/>
+            <a:ext cx="5227168" cy="365760"/>
+          </a:xfrm>
+          <a:prstGeom prst="rect">
+            <a:avLst/>
+          </a:prstGeom>
+          <a:noFill/>
+          <a:ln/>
+        </p:spPr>
+        <p:txBody>
+          <a:bodyPr wrap="square" lIns="0" tIns="0" rIns="0" bIns="0" rtlCol="0" anchor="ctr"/>
+          <a:lstStyle/>
+          <a:p>
+            <a:pPr indent="0" marL="0">
+              <a:buNone/>
+            </a:pPr>
+            <a:r>
+              <a:rPr lang="en-US" sz="1800" b="1" dirty="0">
+                <a:solidFill>
+                  <a:schemeClr val="accent1"/>
+                </a:solidFill>
+              </a:rPr>
+              <a:t>Cybersécurité</a:t>
+            </a:r>
+            <a:endParaRPr lang="en-US" sz="1800" dirty="0"/>
+          </a:p>
+        </p:txBody>
+      </p:sp>
+      <p:sp>
+        <p:nvSpPr>
+          <p:cNvPr id="7" name="Text 5"/>
+          <p:cNvSpPr txBox="1"/>
+          <p:nvPr/>
+        </p:nvSpPr>
+        <p:spPr>
+          <a:xfrm>
+            <a:off x="6370168" y="1874520"/>
+            <a:ext cx="5227168" cy="2834640"/>
+          </a:xfrm>
+          <a:prstGeom prst="rect">
+            <a:avLst/>
+          </a:prstGeom>
+          <a:noFill/>
+          <a:ln/>
+        </p:spPr>
+        <p:txBody>
+          <a:bodyPr wrap="square" lIns="0" tIns="0" rIns="0" bIns="0" rtlCol="0" anchor="t"/>
+          <a:lstStyle/>
+          <a:p>
+            <a:pPr marL="228600" indent="-228600">
+              <a:spcAft>
+                <a:spcPts val="800"/>
+              </a:spcAft>
+              <a:buSzPct val="100000"/>
+              <a:buChar char="•"/>
+            </a:pPr>
+            <a:r>
+              <a:rPr lang="en-US" sz="1600" dirty="0">
+                <a:solidFill>
+                  <a:schemeClr val="tx1"/>
+                </a:solidFill>
+              </a:rPr>
+              <a:t>Liaison chiffrée</a:t>
+            </a:r>
+            <a:endParaRPr lang="en-US" sz="1600" dirty="0"/>
+          </a:p>
+          <a:p>
+            <a:pPr marL="228600" indent="-228600">
+              <a:spcAft>
+                <a:spcPts val="800"/>
+              </a:spcAft>
+              <a:buSzPct val="100000"/>
+              <a:buChar char="•"/>
+            </a:pPr>
+            <a:r>
+              <a:rPr lang="en-US" sz="1600" dirty="0">
+                <a:solidFill>
+                  <a:schemeClr val="tx1"/>
+                </a:solidFill>
+              </a:rPr>
+              <a:t>Messages MAVLink signés : faux ordres rejetés</a:t>
+            </a:r>
+            <a:endParaRPr lang="en-US" sz="1600" dirty="0"/>
+          </a:p>
+          <a:p>
+            <a:pPr marL="228600" indent="-228600">
+              <a:spcAft>
+                <a:spcPts val="800"/>
+              </a:spcAft>
+              <a:buSzPct val="100000"/>
+              <a:buChar char="•"/>
+            </a:pPr>
+            <a:r>
+              <a:rPr lang="en-US" sz="1600" dirty="0">
+                <a:solidFill>
+                  <a:schemeClr val="tx1"/>
+                </a:solidFill>
+              </a:rPr>
+              <a:t>Clé secrète chargée au sol avant le vol</a:t>
+            </a:r>
+            <a:endParaRPr lang="en-US" sz="1600" dirty="0"/>
+          </a:p>
+          <a:p>
+            <a:pPr marL="228600" indent="-228600">
+              <a:spcAft>
+                <a:spcPts val="800"/>
+              </a:spcAft>
+              <a:buSzPct val="100000"/>
+              <a:buChar char="•"/>
+            </a:pPr>
+            <a:r>
+              <a:rPr lang="en-US" sz="1600" dirty="0">
+                <a:solidFill>
+                  <a:schemeClr val="tx1"/>
+                </a:solidFill>
+              </a:rPr>
+              <a:t>Détection du brouillage</a:t>
+            </a:r>
+            <a:endParaRPr lang="en-US" sz="1600" dirty="0"/>
+          </a:p>
+          <a:p>
+            <a:pPr marL="228600" indent="-228600">
+              <a:spcAft>
+                <a:spcPts val="800"/>
+              </a:spcAft>
+              <a:buSzPct val="100000"/>
+              <a:buChar char="•"/>
+            </a:pPr>
+            <a:r>
+              <a:rPr lang="en-US" sz="1600" dirty="0">
+                <a:solidFill>
+                  <a:schemeClr val="tx1"/>
+                </a:solidFill>
+              </a:rPr>
+              <a:t>Anti-leurrage GPS par comparaison des sources</a:t>
+            </a:r>
+            <a:endParaRPr lang="en-US" sz="1600" dirty="0"/>
+          </a:p>
+          <a:p>
+            <a:pPr marL="228600" indent="-228600">
+              <a:spcAft>
+                <a:spcPts val="800"/>
+              </a:spcAft>
+              <a:buSzPct val="100000"/>
+              <a:buChar char="•"/>
+            </a:pPr>
+            <a:r>
+              <a:rPr lang="en-US" sz="1600" dirty="0">
+                <a:solidFill>
+                  <a:schemeClr val="tx1"/>
+                </a:solidFill>
+              </a:rPr>
+              <a:t>Journaux de vol signés : toute modification se voit</a:t>
+            </a:r>
+            <a:endParaRPr lang="en-US" sz="1600" dirty="0"/>
+          </a:p>
+        </p:txBody>
+      </p:sp>
+      <p:sp>
+        <p:nvSpPr>
+          <p:cNvPr id="8" name="Encadré"/>
+          <p:cNvSpPr/>
+          <p:nvPr/>
+        </p:nvSpPr>
+        <p:spPr>
+          <a:xfrm>
+            <a:off x="594360" y="4892040"/>
+            <a:ext cx="11002975" cy="685800"/>
+          </a:xfrm>
+          <a:prstGeom prst="rect">
+            <a:avLst/>
+          </a:prstGeom>
+          <a:solidFill>
+            <a:schemeClr val="bg2"/>
+          </a:solidFill>
+          <a:ln w="9525">
+            <a:solidFill>
+              <a:schemeClr val="accent5"/>
+            </a:solidFill>
+            <a:prstDash val="solid"/>
+          </a:ln>
+        </p:spPr>
+      </p:sp>
+      <p:sp>
+        <p:nvSpPr>
+          <p:cNvPr id="9" name="Text 7"/>
+          <p:cNvSpPr txBox="1"/>
+          <p:nvPr/>
+        </p:nvSpPr>
+        <p:spPr>
+          <a:xfrm>
+            <a:off x="822960" y="4892040"/>
+            <a:ext cx="10545775" cy="685800"/>
+          </a:xfrm>
+          <a:prstGeom prst="rect">
+            <a:avLst/>
+          </a:prstGeom>
+          <a:noFill/>
+          <a:ln/>
+        </p:spPr>
+        <p:txBody>
+          <a:bodyPr wrap="square" lIns="0" tIns="0" rIns="0" bIns="0" rtlCol="0" anchor="ctr"/>
+          <a:lstStyle/>
+          <a:p>
+            <a:pPr indent="0" marL="0">
+              <a:buNone/>
+            </a:pPr>
+            <a:r>
+              <a:rPr lang="en-US" sz="1700" dirty="0">
+                <a:solidFill>
+                  <a:schemeClr val="tx1"/>
+                </a:solidFill>
+              </a:rPr>
+              <a:t>En dernier recours, le canal d'urgence indépendant permet toujours de faire revenir le drone ou de couper les moteurs.</a:t>
+            </a:r>
+            <a:endParaRPr lang="en-US" sz="1700" dirty="0"/>
+          </a:p>
+        </p:txBody>
+      </p:sp>
+      <p:sp>
+        <p:nvSpPr>
+          <p:cNvPr id="25" name="Slide Number Placeholder 0"/>
+          <p:cNvSpPr>
+            <a:spLocks noGrp="1"/>
+          </p:cNvSpPr>
+          <p:nvPr>
+            <p:ph type="sldNum" sz="quarter" idx="4294967295"/>
+          </p:nvPr>
+        </p:nvSpPr>
+        <p:spPr>
+          <a:xfrm>
+            <a:off x="11231575" y="6382512"/>
+            <a:ext cx="365760" cy="274320"/>
+          </a:xfrm>
+          <a:prstGeom prst="rect">
+            <a:avLst/>
+          </a:prstGeom>
+          <a:extLst>
+            <a:ext uri="{C572A759-6A51-4108-AA02-DFA0A04FC94B}">
+              <ma14:wrappingTextBoxFlag xmlns:ma14="http://schemas.microsoft.com/office/mac/drawingml/2011/main" val="0"/>
+            </a:ext>
+          </a:extLst>
+        </p:spPr>
+        <p:txBody>
+          <a:bodyPr lIns="0" tIns="0" rIns="0" bIns="0"/>
+          <a:lstStyle>
+            <a:lvl1pPr>
+              <a:defRPr sz="1000">
+                <a:solidFill>
+                  <a:schemeClr val="tx2"/>
+                </a:solidFill>
+              </a:defRPr>
+            </a:lvl1pPr>
+          </a:lstStyle>
+          <a:p>
+            <a:pPr algn="r"/>
+            <a:fld id="{F7021451-1387-4CA6-816F-3879F97B5CBC}" type="slidenum">
+              <a:rPr b="0" lang="en-US"/>
+              <a:t>20</a:t>
+            </a:fld>
+            <a:endParaRPr lang="en-US"/>
+          </a:p>
+        </p:txBody>
+      </p:sp>
+    </p:spTree>
+  </p:cSld>
+  <p:clrMapOvr>
+    <a:masterClrMapping/>
+  </p:clrMapOvr>
+</p:sld>
+</file>
+
+<file path=ppt/slides/slide21.xml><?xml version="1.0" encoding="utf-8"?>
+<p:sld xmlns:a="http://schemas.openxmlformats.org/drawingml/2006/main" xmlns:r="http://schemas.openxmlformats.org/officeDocument/2006/relationships" xmlns:p="http://schemas.openxmlformats.org/presentationml/2006/main">
+  <p:cSld name="Slide 21">
+    <p:spTree>
+      <p:nvGrpSpPr>
+        <p:cNvPr id="1" name=""/>
+        <p:cNvGrpSpPr/>
+        <p:nvPr/>
+      </p:nvGrpSpPr>
+      <p:grpSpPr>
+        <a:xfrm>
+          <a:off x="0" y="0"/>
+          <a:ext cx="0" cy="0"/>
+          <a:chOff x="0" y="0"/>
+          <a:chExt cx="0" cy="0"/>
+        </a:xfrm>
+      </p:grpSpPr>
+      <p:sp>
+        <p:nvSpPr>
+          <p:cNvPr id="2" name="Text 0"/>
+          <p:cNvSpPr/>
+          <p:nvPr>
+            <p:ph idx="100" type="title" hasCustomPrompt="1"/>
+          </p:nvPr>
+        </p:nvSpPr>
+        <p:spPr>
+          <a:xfrm>
+            <a:off x="594360" y="411480"/>
+            <a:ext cx="11002975" cy="685800"/>
+          </a:xfrm>
+          <a:prstGeom prst="rect">
+            <a:avLst/>
+          </a:prstGeom>
+          <a:noFill/>
+          <a:ln/>
+        </p:spPr>
+        <p:txBody>
+          <a:bodyPr wrap="square" lIns="0" tIns="0" rIns="0" bIns="0" rtlCol="0" anchor="ctr"/>
+          <a:lstStyle/>
+          <a:p>
+            <a:pPr algn="l" indent="0" marL="0">
+              <a:buNone/>
+            </a:pPr>
+            <a:r>
+              <a:rPr lang="en-US" sz="3000" b="1" dirty="0">
+                <a:solidFill>
+                  <a:schemeClr val="tx1"/>
+                </a:solidFill>
+              </a:rPr>
+              <a:t>Domaines d'application</a:t>
+            </a:r>
+            <a:endParaRPr lang="en-US" sz="3000" dirty="0"/>
+          </a:p>
+        </p:txBody>
+      </p:sp>
+      <p:sp>
+        <p:nvSpPr>
+          <p:cNvPr id="3" name="Text 1"/>
+          <p:cNvSpPr txBox="1"/>
+          <p:nvPr/>
+        </p:nvSpPr>
+        <p:spPr>
+          <a:xfrm>
+            <a:off x="7025335" y="6382512"/>
+            <a:ext cx="4069080" cy="274320"/>
+          </a:xfrm>
+          <a:prstGeom prst="rect">
+            <a:avLst/>
+          </a:prstGeom>
+          <a:noFill/>
+          <a:ln/>
+        </p:spPr>
+        <p:txBody>
+          <a:bodyPr wrap="square" lIns="0" tIns="0" rIns="0" bIns="0" rtlCol="0" anchor="ctr"/>
+          <a:lstStyle/>
+          <a:p>
+            <a:pPr algn="r" indent="0" marL="0">
+              <a:buNone/>
+            </a:pPr>
+            <a:r>
+              <a:rPr lang="en-US" sz="1000" dirty="0">
+                <a:solidFill>
+                  <a:schemeClr val="tx2"/>
+                </a:solidFill>
+              </a:rPr>
               <a:t>Cédric KODJOVI</a:t>
             </a:r>
             <a:endParaRPr lang="en-US" sz="1000" dirty="0"/>
@@ -12059,7 +13879,7 @@
       </p:sp>
       <p:graphicFrame>
         <p:nvGraphicFramePr>
-          <p:cNvPr id="21" name="Table 0"/>
+          <p:cNvPr id="22" name="Table 0"/>
           <p:cNvGraphicFramePr>
             <a:graphicFrameLocks noGrp="1"/>
           </p:cNvGraphicFramePr>
@@ -12904,740 +14724,6 @@
             <a:pPr algn="r"/>
             <a:fld id="{F7021451-1387-4CA6-816F-3879F97B5CBC}" type="slidenum">
               <a:rPr b="0" lang="en-US"/>
-              <a:t>20</a:t>
-            </a:fld>
-            <a:endParaRPr lang="en-US"/>
-          </a:p>
-        </p:txBody>
-      </p:sp>
-    </p:spTree>
-  </p:cSld>
-  <p:clrMapOvr>
-    <a:masterClrMapping/>
-  </p:clrMapOvr>
-</p:sld>
-</file>
-
-<file path=ppt/slides/slide21.xml><?xml version="1.0" encoding="utf-8"?>
-<p:sld xmlns:a="http://schemas.openxmlformats.org/drawingml/2006/main" xmlns:r="http://schemas.openxmlformats.org/officeDocument/2006/relationships" xmlns:p="http://schemas.openxmlformats.org/presentationml/2006/main">
-  <p:cSld name="Slide 21">
-    <p:spTree>
-      <p:nvGrpSpPr>
-        <p:cNvPr id="1" name=""/>
-        <p:cNvGrpSpPr/>
-        <p:nvPr/>
-      </p:nvGrpSpPr>
-      <p:grpSpPr>
-        <a:xfrm>
-          <a:off x="0" y="0"/>
-          <a:ext cx="0" cy="0"/>
-          <a:chOff x="0" y="0"/>
-          <a:chExt cx="0" cy="0"/>
-        </a:xfrm>
-      </p:grpSpPr>
-      <p:sp>
-        <p:nvSpPr>
-          <p:cNvPr id="2" name="Text 0"/>
-          <p:cNvSpPr/>
-          <p:nvPr>
-            <p:ph idx="100" type="title" hasCustomPrompt="1"/>
-          </p:nvPr>
-        </p:nvSpPr>
-        <p:spPr>
-          <a:xfrm>
-            <a:off x="594360" y="411480"/>
-            <a:ext cx="11002975" cy="685800"/>
-          </a:xfrm>
-          <a:prstGeom prst="rect">
-            <a:avLst/>
-          </a:prstGeom>
-          <a:noFill/>
-          <a:ln/>
-        </p:spPr>
-        <p:txBody>
-          <a:bodyPr wrap="square" lIns="0" tIns="0" rIns="0" bIns="0" rtlCol="0" anchor="ctr"/>
-          <a:lstStyle/>
-          <a:p>
-            <a:pPr algn="l" indent="0" marL="0">
-              <a:buNone/>
-            </a:pPr>
-            <a:r>
-              <a:rPr lang="en-US" sz="3000" b="1" dirty="0">
-                <a:solidFill>
-                  <a:schemeClr val="tx1"/>
-                </a:solidFill>
-              </a:rPr>
-              <a:t>Calendrier</a:t>
-            </a:r>
-            <a:endParaRPr lang="en-US" sz="3000" dirty="0"/>
-          </a:p>
-        </p:txBody>
-      </p:sp>
-      <p:sp>
-        <p:nvSpPr>
-          <p:cNvPr id="3" name="Text 1"/>
-          <p:cNvSpPr txBox="1"/>
-          <p:nvPr/>
-        </p:nvSpPr>
-        <p:spPr>
-          <a:xfrm>
-            <a:off x="7025335" y="6382512"/>
-            <a:ext cx="4069080" cy="274320"/>
-          </a:xfrm>
-          <a:prstGeom prst="rect">
-            <a:avLst/>
-          </a:prstGeom>
-          <a:noFill/>
-          <a:ln/>
-        </p:spPr>
-        <p:txBody>
-          <a:bodyPr wrap="square" lIns="0" tIns="0" rIns="0" bIns="0" rtlCol="0" anchor="ctr"/>
-          <a:lstStyle/>
-          <a:p>
-            <a:pPr algn="r" indent="0" marL="0">
-              <a:buNone/>
-            </a:pPr>
-            <a:r>
-              <a:rPr lang="en-US" sz="1000" dirty="0">
-                <a:solidFill>
-                  <a:schemeClr val="tx2"/>
-                </a:solidFill>
-              </a:rPr>
-              <a:t>Cédric KODJOVI</a:t>
-            </a:r>
-            <a:endParaRPr lang="en-US" sz="1000" dirty="0"/>
-          </a:p>
-        </p:txBody>
-      </p:sp>
-      <p:sp>
-        <p:nvSpPr>
-          <p:cNvPr id="4" name="Shape 2"/>
-          <p:cNvSpPr/>
-          <p:nvPr/>
-        </p:nvSpPr>
-        <p:spPr>
-          <a:xfrm>
-            <a:off x="1783080" y="2103120"/>
-            <a:ext cx="8625535" cy="0"/>
-          </a:xfrm>
-          <a:prstGeom prst="line">
-            <a:avLst/>
-          </a:prstGeom>
-          <a:noFill/>
-          <a:ln w="25400">
-            <a:solidFill>
-              <a:schemeClr val="accent5"/>
-            </a:solidFill>
-            <a:prstDash val="solid"/>
-          </a:ln>
-        </p:spPr>
-      </p:sp>
-      <p:sp>
-        <p:nvSpPr>
-          <p:cNvPr id="5" name="Shape 3"/>
-          <p:cNvSpPr/>
-          <p:nvPr/>
-        </p:nvSpPr>
-        <p:spPr>
-          <a:xfrm>
-            <a:off x="1655064" y="1975104"/>
-            <a:ext cx="256032" cy="256032"/>
-          </a:xfrm>
-          <a:prstGeom prst="ellipse">
-            <a:avLst/>
-          </a:prstGeom>
-          <a:solidFill>
-            <a:schemeClr val="accent1"/>
-          </a:solidFill>
-          <a:ln w="19050">
-            <a:solidFill>
-              <a:schemeClr val="accent1"/>
-            </a:solidFill>
-            <a:prstDash val="solid"/>
-          </a:ln>
-        </p:spPr>
-      </p:sp>
-      <p:sp>
-        <p:nvSpPr>
-          <p:cNvPr id="6" name="Text 4"/>
-          <p:cNvSpPr txBox="1"/>
-          <p:nvPr/>
-        </p:nvSpPr>
-        <p:spPr>
-          <a:xfrm>
-            <a:off x="640080" y="2377440"/>
-            <a:ext cx="2286000" cy="365760"/>
-          </a:xfrm>
-          <a:prstGeom prst="rect">
-            <a:avLst/>
-          </a:prstGeom>
-          <a:noFill/>
-          <a:ln/>
-        </p:spPr>
-        <p:txBody>
-          <a:bodyPr wrap="square" lIns="0" tIns="0" rIns="0" bIns="0" rtlCol="0" anchor="ctr"/>
-          <a:lstStyle/>
-          <a:p>
-            <a:pPr algn="ctr" indent="0" marL="0">
-              <a:buNone/>
-            </a:pPr>
-            <a:r>
-              <a:rPr lang="en-US" sz="1600" b="1" dirty="0">
-                <a:solidFill>
-                  <a:schemeClr val="tx1"/>
-                </a:solidFill>
-              </a:rPr>
-              <a:t>Août</a:t>
-            </a:r>
-            <a:endParaRPr lang="en-US" sz="1600" dirty="0"/>
-          </a:p>
-        </p:txBody>
-      </p:sp>
-      <p:sp>
-        <p:nvSpPr>
-          <p:cNvPr id="7" name="Text 5"/>
-          <p:cNvSpPr txBox="1"/>
-          <p:nvPr/>
-        </p:nvSpPr>
-        <p:spPr>
-          <a:xfrm>
-            <a:off x="640080" y="2761488"/>
-            <a:ext cx="2286000" cy="822960"/>
-          </a:xfrm>
-          <a:prstGeom prst="rect">
-            <a:avLst/>
-          </a:prstGeom>
-          <a:noFill/>
-          <a:ln/>
-        </p:spPr>
-        <p:txBody>
-          <a:bodyPr wrap="square" lIns="0" tIns="0" rIns="0" bIns="0" rtlCol="0" anchor="t"/>
-          <a:lstStyle/>
-          <a:p>
-            <a:pPr algn="ctr" indent="0" marL="0">
-              <a:buNone/>
-            </a:pPr>
-            <a:r>
-              <a:rPr lang="en-US" sz="1400" dirty="0">
-                <a:solidFill>
-                  <a:schemeClr val="tx2"/>
-                </a:solidFill>
-              </a:rPr>
-              <a:t>Candidature et cahier des charges</a:t>
-            </a:r>
-            <a:endParaRPr lang="en-US" sz="1400" dirty="0"/>
-          </a:p>
-        </p:txBody>
-      </p:sp>
-      <p:sp>
-        <p:nvSpPr>
-          <p:cNvPr id="8" name="Shape 6"/>
-          <p:cNvSpPr/>
-          <p:nvPr/>
-        </p:nvSpPr>
-        <p:spPr>
-          <a:xfrm>
-            <a:off x="3811448" y="1975104"/>
-            <a:ext cx="256032" cy="256032"/>
-          </a:xfrm>
-          <a:prstGeom prst="ellipse">
-            <a:avLst/>
-          </a:prstGeom>
-          <a:solidFill>
-            <a:schemeClr val="accent1"/>
-          </a:solidFill>
-          <a:ln w="19050">
-            <a:solidFill>
-              <a:schemeClr val="accent1"/>
-            </a:solidFill>
-            <a:prstDash val="solid"/>
-          </a:ln>
-        </p:spPr>
-      </p:sp>
-      <p:sp>
-        <p:nvSpPr>
-          <p:cNvPr id="9" name="Text 7"/>
-          <p:cNvSpPr txBox="1"/>
-          <p:nvPr/>
-        </p:nvSpPr>
-        <p:spPr>
-          <a:xfrm>
-            <a:off x="2796464" y="2377440"/>
-            <a:ext cx="2286000" cy="365760"/>
-          </a:xfrm>
-          <a:prstGeom prst="rect">
-            <a:avLst/>
-          </a:prstGeom>
-          <a:noFill/>
-          <a:ln/>
-        </p:spPr>
-        <p:txBody>
-          <a:bodyPr wrap="square" lIns="0" tIns="0" rIns="0" bIns="0" rtlCol="0" anchor="ctr"/>
-          <a:lstStyle/>
-          <a:p>
-            <a:pPr algn="ctr" indent="0" marL="0">
-              <a:buNone/>
-            </a:pPr>
-            <a:r>
-              <a:rPr lang="en-US" sz="1600" b="1" dirty="0">
-                <a:solidFill>
-                  <a:schemeClr val="tx1"/>
-                </a:solidFill>
-              </a:rPr>
-              <a:t>Septembre</a:t>
-            </a:r>
-            <a:endParaRPr lang="en-US" sz="1600" dirty="0"/>
-          </a:p>
-        </p:txBody>
-      </p:sp>
-      <p:sp>
-        <p:nvSpPr>
-          <p:cNvPr id="10" name="Text 8"/>
-          <p:cNvSpPr txBox="1"/>
-          <p:nvPr/>
-        </p:nvSpPr>
-        <p:spPr>
-          <a:xfrm>
-            <a:off x="2796464" y="2761488"/>
-            <a:ext cx="2286000" cy="822960"/>
-          </a:xfrm>
-          <a:prstGeom prst="rect">
-            <a:avLst/>
-          </a:prstGeom>
-          <a:noFill/>
-          <a:ln/>
-        </p:spPr>
-        <p:txBody>
-          <a:bodyPr wrap="square" lIns="0" tIns="0" rIns="0" bIns="0" rtlCol="0" anchor="t"/>
-          <a:lstStyle/>
-          <a:p>
-            <a:pPr algn="ctr" indent="0" marL="0">
-              <a:buNone/>
-            </a:pPr>
-            <a:r>
-              <a:rPr lang="en-US" sz="1400" dirty="0">
-                <a:solidFill>
-                  <a:schemeClr val="tx2"/>
-                </a:solidFill>
-              </a:rPr>
-              <a:t>Conception détaillée et dossier</a:t>
-            </a:r>
-            <a:endParaRPr lang="en-US" sz="1400" dirty="0"/>
-          </a:p>
-        </p:txBody>
-      </p:sp>
-      <p:sp>
-        <p:nvSpPr>
-          <p:cNvPr id="11" name="Shape 9"/>
-          <p:cNvSpPr/>
-          <p:nvPr/>
-        </p:nvSpPr>
-        <p:spPr>
-          <a:xfrm>
-            <a:off x="5967832" y="1975104"/>
-            <a:ext cx="256032" cy="256032"/>
-          </a:xfrm>
-          <a:prstGeom prst="ellipse">
-            <a:avLst/>
-          </a:prstGeom>
-          <a:solidFill>
-            <a:schemeClr val="accent2"/>
-          </a:solidFill>
-          <a:ln w="19050">
-            <a:solidFill>
-              <a:schemeClr val="accent2"/>
-            </a:solidFill>
-            <a:prstDash val="solid"/>
-          </a:ln>
-        </p:spPr>
-      </p:sp>
-      <p:sp>
-        <p:nvSpPr>
-          <p:cNvPr id="12" name="Text 10"/>
-          <p:cNvSpPr txBox="1"/>
-          <p:nvPr/>
-        </p:nvSpPr>
-        <p:spPr>
-          <a:xfrm>
-            <a:off x="4952848" y="2377440"/>
-            <a:ext cx="2286000" cy="365760"/>
-          </a:xfrm>
-          <a:prstGeom prst="rect">
-            <a:avLst/>
-          </a:prstGeom>
-          <a:noFill/>
-          <a:ln/>
-        </p:spPr>
-        <p:txBody>
-          <a:bodyPr wrap="square" lIns="0" tIns="0" rIns="0" bIns="0" rtlCol="0" anchor="ctr"/>
-          <a:lstStyle/>
-          <a:p>
-            <a:pPr algn="ctr" indent="0" marL="0">
-              <a:buNone/>
-            </a:pPr>
-            <a:r>
-              <a:rPr lang="en-US" sz="1600" b="1" dirty="0">
-                <a:solidFill>
-                  <a:schemeClr val="tx1"/>
-                </a:solidFill>
-              </a:rPr>
-              <a:t>Octobre (en cours)</a:t>
-            </a:r>
-            <a:endParaRPr lang="en-US" sz="1600" dirty="0"/>
-          </a:p>
-        </p:txBody>
-      </p:sp>
-      <p:sp>
-        <p:nvSpPr>
-          <p:cNvPr id="13" name="Text 11"/>
-          <p:cNvSpPr txBox="1"/>
-          <p:nvPr/>
-        </p:nvSpPr>
-        <p:spPr>
-          <a:xfrm>
-            <a:off x="4952848" y="2761488"/>
-            <a:ext cx="2286000" cy="822960"/>
-          </a:xfrm>
-          <a:prstGeom prst="rect">
-            <a:avLst/>
-          </a:prstGeom>
-          <a:noFill/>
-          <a:ln/>
-        </p:spPr>
-        <p:txBody>
-          <a:bodyPr wrap="square" lIns="0" tIns="0" rIns="0" bIns="0" rtlCol="0" anchor="t"/>
-          <a:lstStyle/>
-          <a:p>
-            <a:pPr algn="ctr" indent="0" marL="0">
-              <a:buNone/>
-            </a:pPr>
-            <a:r>
-              <a:rPr lang="en-US" sz="1400" dirty="0">
-                <a:solidFill>
-                  <a:schemeClr val="tx2"/>
-                </a:solidFill>
-              </a:rPr>
-              <a:t>Prototypage et intégration</a:t>
-            </a:r>
-            <a:endParaRPr lang="en-US" sz="1400" dirty="0"/>
-          </a:p>
-        </p:txBody>
-      </p:sp>
-      <p:sp>
-        <p:nvSpPr>
-          <p:cNvPr id="14" name="Shape 12"/>
-          <p:cNvSpPr/>
-          <p:nvPr/>
-        </p:nvSpPr>
-        <p:spPr>
-          <a:xfrm>
-            <a:off x="8124215" y="1975104"/>
-            <a:ext cx="256032" cy="256032"/>
-          </a:xfrm>
-          <a:prstGeom prst="ellipse">
-            <a:avLst/>
-          </a:prstGeom>
-          <a:solidFill>
-            <a:schemeClr val="bg1"/>
-          </a:solidFill>
-          <a:ln w="19050">
-            <a:solidFill>
-              <a:schemeClr val="accent6"/>
-            </a:solidFill>
-            <a:prstDash val="solid"/>
-          </a:ln>
-        </p:spPr>
-      </p:sp>
-      <p:sp>
-        <p:nvSpPr>
-          <p:cNvPr id="15" name="Text 13"/>
-          <p:cNvSpPr txBox="1"/>
-          <p:nvPr/>
-        </p:nvSpPr>
-        <p:spPr>
-          <a:xfrm>
-            <a:off x="7109231" y="2377440"/>
-            <a:ext cx="2286000" cy="365760"/>
-          </a:xfrm>
-          <a:prstGeom prst="rect">
-            <a:avLst/>
-          </a:prstGeom>
-          <a:noFill/>
-          <a:ln/>
-        </p:spPr>
-        <p:txBody>
-          <a:bodyPr wrap="square" lIns="0" tIns="0" rIns="0" bIns="0" rtlCol="0" anchor="ctr"/>
-          <a:lstStyle/>
-          <a:p>
-            <a:pPr algn="ctr" indent="0" marL="0">
-              <a:buNone/>
-            </a:pPr>
-            <a:r>
-              <a:rPr lang="en-US" sz="1600" b="1" dirty="0">
-                <a:solidFill>
-                  <a:schemeClr val="tx1"/>
-                </a:solidFill>
-              </a:rPr>
-              <a:t>Novembre</a:t>
-            </a:r>
-            <a:endParaRPr lang="en-US" sz="1600" dirty="0"/>
-          </a:p>
-        </p:txBody>
-      </p:sp>
-      <p:sp>
-        <p:nvSpPr>
-          <p:cNvPr id="16" name="Text 14"/>
-          <p:cNvSpPr txBox="1"/>
-          <p:nvPr/>
-        </p:nvSpPr>
-        <p:spPr>
-          <a:xfrm>
-            <a:off x="7109231" y="2761488"/>
-            <a:ext cx="2286000" cy="822960"/>
-          </a:xfrm>
-          <a:prstGeom prst="rect">
-            <a:avLst/>
-          </a:prstGeom>
-          <a:noFill/>
-          <a:ln/>
-        </p:spPr>
-        <p:txBody>
-          <a:bodyPr wrap="square" lIns="0" tIns="0" rIns="0" bIns="0" rtlCol="0" anchor="t"/>
-          <a:lstStyle/>
-          <a:p>
-            <a:pPr algn="ctr" indent="0" marL="0">
-              <a:buNone/>
-            </a:pPr>
-            <a:r>
-              <a:rPr lang="en-US" sz="1400" dirty="0">
-                <a:solidFill>
-                  <a:schemeClr val="tx2"/>
-                </a:solidFill>
-              </a:rPr>
-              <a:t>Essais au sol, en vol et de sécurité</a:t>
-            </a:r>
-            <a:endParaRPr lang="en-US" sz="1400" dirty="0"/>
-          </a:p>
-        </p:txBody>
-      </p:sp>
-      <p:sp>
-        <p:nvSpPr>
-          <p:cNvPr id="17" name="Shape 15"/>
-          <p:cNvSpPr/>
-          <p:nvPr/>
-        </p:nvSpPr>
-        <p:spPr>
-          <a:xfrm>
-            <a:off x="10280599" y="1975104"/>
-            <a:ext cx="256032" cy="256032"/>
-          </a:xfrm>
-          <a:prstGeom prst="ellipse">
-            <a:avLst/>
-          </a:prstGeom>
-          <a:solidFill>
-            <a:schemeClr val="bg1"/>
-          </a:solidFill>
-          <a:ln w="19050">
-            <a:solidFill>
-              <a:schemeClr val="accent6"/>
-            </a:solidFill>
-            <a:prstDash val="solid"/>
-          </a:ln>
-        </p:spPr>
-      </p:sp>
-      <p:sp>
-        <p:nvSpPr>
-          <p:cNvPr id="18" name="Text 16"/>
-          <p:cNvSpPr txBox="1"/>
-          <p:nvPr/>
-        </p:nvSpPr>
-        <p:spPr>
-          <a:xfrm>
-            <a:off x="9265615" y="2377440"/>
-            <a:ext cx="2286000" cy="365760"/>
-          </a:xfrm>
-          <a:prstGeom prst="rect">
-            <a:avLst/>
-          </a:prstGeom>
-          <a:noFill/>
-          <a:ln/>
-        </p:spPr>
-        <p:txBody>
-          <a:bodyPr wrap="square" lIns="0" tIns="0" rIns="0" bIns="0" rtlCol="0" anchor="ctr"/>
-          <a:lstStyle/>
-          <a:p>
-            <a:pPr algn="ctr" indent="0" marL="0">
-              <a:buNone/>
-            </a:pPr>
-            <a:r>
-              <a:rPr lang="en-US" sz="1600" b="1" dirty="0">
-                <a:solidFill>
-                  <a:schemeClr val="tx1"/>
-                </a:solidFill>
-              </a:rPr>
-              <a:t>Décembre 2026</a:t>
-            </a:r>
-            <a:endParaRPr lang="en-US" sz="1600" dirty="0"/>
-          </a:p>
-        </p:txBody>
-      </p:sp>
-      <p:sp>
-        <p:nvSpPr>
-          <p:cNvPr id="19" name="Text 17"/>
-          <p:cNvSpPr txBox="1"/>
-          <p:nvPr/>
-        </p:nvSpPr>
-        <p:spPr>
-          <a:xfrm>
-            <a:off x="9265615" y="2761488"/>
-            <a:ext cx="2286000" cy="822960"/>
-          </a:xfrm>
-          <a:prstGeom prst="rect">
-            <a:avLst/>
-          </a:prstGeom>
-          <a:noFill/>
-          <a:ln/>
-        </p:spPr>
-        <p:txBody>
-          <a:bodyPr wrap="square" lIns="0" tIns="0" rIns="0" bIns="0" rtlCol="0" anchor="t"/>
-          <a:lstStyle/>
-          <a:p>
-            <a:pPr algn="ctr" indent="0" marL="0">
-              <a:buNone/>
-            </a:pPr>
-            <a:r>
-              <a:rPr lang="en-US" sz="1400" dirty="0">
-                <a:solidFill>
-                  <a:schemeClr val="tx2"/>
-                </a:solidFill>
-              </a:rPr>
-              <a:t>Finale et démonstration</a:t>
-            </a:r>
-            <a:endParaRPr lang="en-US" sz="1400" dirty="0"/>
-          </a:p>
-        </p:txBody>
-      </p:sp>
-      <p:pic>
-        <p:nvPicPr>
-          <p:cNvPr id="20" name="Image 0" descr="Conception SolidWorks terminée">    </p:cNvPr>
-          <p:cNvPicPr>
-            <a:picLocks noChangeAspect="1"/>
-          </p:cNvPicPr>
-          <p:nvPr/>
-        </p:nvPicPr>
-        <p:blipFill>
-          <a:blip r:embed="rId1"/>
-          <a:stretch>
-            <a:fillRect/>
-          </a:stretch>
-        </p:blipFill>
-        <p:spPr>
-          <a:xfrm>
-            <a:off x="3401905" y="3931920"/>
-            <a:ext cx="5387884" cy="1737360"/>
-          </a:xfrm>
-          <a:prstGeom prst="rect">
-            <a:avLst/>
-          </a:prstGeom>
-        </p:spPr>
-      </p:pic>
-      <p:sp>
-        <p:nvSpPr>
-          <p:cNvPr id="21" name="Cadre cao_profil"/>
-          <p:cNvSpPr/>
-          <p:nvPr/>
-        </p:nvSpPr>
-        <p:spPr>
-          <a:xfrm>
-            <a:off x="3401905" y="3931920"/>
-            <a:ext cx="5387884" cy="1737360"/>
-          </a:xfrm>
-          <a:prstGeom prst="rect">
-            <a:avLst/>
-          </a:prstGeom>
-          <a:ln w="9525">
-            <a:solidFill>
-              <a:schemeClr val="accent5"/>
-            </a:solidFill>
-            <a:prstDash val="solid"/>
-          </a:ln>
-        </p:spPr>
-      </p:sp>
-      <p:sp>
-        <p:nvSpPr>
-          <p:cNvPr id="22" name="Text 19"/>
-          <p:cNvSpPr txBox="1"/>
-          <p:nvPr/>
-        </p:nvSpPr>
-        <p:spPr>
-          <a:xfrm>
-            <a:off x="3401905" y="5724144"/>
-            <a:ext cx="5387884" cy="256032"/>
-          </a:xfrm>
-          <a:prstGeom prst="rect">
-            <a:avLst/>
-          </a:prstGeom>
-          <a:noFill/>
-          <a:ln/>
-        </p:spPr>
-        <p:txBody>
-          <a:bodyPr wrap="square" lIns="0" tIns="0" rIns="0" bIns="0" rtlCol="0" anchor="ctr"/>
-          <a:lstStyle/>
-          <a:p>
-            <a:pPr indent="0" marL="0">
-              <a:buNone/>
-            </a:pPr>
-            <a:r>
-              <a:rPr lang="en-US" sz="1100" i="1" dirty="0">
-                <a:solidFill>
-                  <a:schemeClr val="tx2"/>
-                </a:solidFill>
-              </a:rPr>
-              <a:t>Conception SolidWorks terminée</a:t>
-            </a:r>
-            <a:endParaRPr lang="en-US" sz="1100" dirty="0"/>
-          </a:p>
-        </p:txBody>
-      </p:sp>
-      <p:sp>
-        <p:nvSpPr>
-          <p:cNvPr id="25" name="Slide Number Placeholder 0"/>
-          <p:cNvSpPr>
-            <a:spLocks noGrp="1"/>
-          </p:cNvSpPr>
-          <p:nvPr>
-            <p:ph type="sldNum" sz="quarter" idx="4294967295"/>
-          </p:nvPr>
-        </p:nvSpPr>
-        <p:spPr>
-          <a:xfrm>
-            <a:off x="11231575" y="6382512"/>
-            <a:ext cx="365760" cy="274320"/>
-          </a:xfrm>
-          <a:prstGeom prst="rect">
-            <a:avLst/>
-          </a:prstGeom>
-          <a:extLst>
-            <a:ext uri="{C572A759-6A51-4108-AA02-DFA0A04FC94B}">
-              <ma14:wrappingTextBoxFlag xmlns:ma14="http://schemas.microsoft.com/office/mac/drawingml/2011/main" val="0"/>
-            </a:ext>
-          </a:extLst>
-        </p:spPr>
-        <p:txBody>
-          <a:bodyPr lIns="0" tIns="0" rIns="0" bIns="0"/>
-          <a:lstStyle>
-            <a:lvl1pPr>
-              <a:defRPr sz="1000">
-                <a:solidFill>
-                  <a:schemeClr val="tx2"/>
-                </a:solidFill>
-              </a:defRPr>
-            </a:lvl1pPr>
-          </a:lstStyle>
-          <a:p>
-            <a:pPr algn="r"/>
-            <a:fld id="{F7021451-1387-4CA6-816F-3879F97B5CBC}" type="slidenum">
-              <a:rPr b="0" lang="en-US"/>
               <a:t>21</a:t>
             </a:fld>
             <a:endParaRPr lang="en-US"/>
@@ -13701,7 +14787,7 @@
                   <a:schemeClr val="tx1"/>
                 </a:solidFill>
               </a:rPr>
-              <a:t>Budget prévisionnel</a:t>
+              <a:t>Calendrier</a:t>
             </a:r>
             <a:endParaRPr lang="en-US" sz="3000" dirty="0"/>
           </a:p>
@@ -13737,6 +14823,658 @@
                   <a:schemeClr val="tx2"/>
                 </a:solidFill>
               </a:rPr>
+              <a:t>Cédric KODJOVI</a:t>
+            </a:r>
+            <a:endParaRPr lang="en-US" sz="1000" dirty="0"/>
+          </a:p>
+        </p:txBody>
+      </p:sp>
+      <p:sp>
+        <p:nvSpPr>
+          <p:cNvPr id="4" name="Shape 2"/>
+          <p:cNvSpPr/>
+          <p:nvPr/>
+        </p:nvSpPr>
+        <p:spPr>
+          <a:xfrm>
+            <a:off x="1783080" y="2103120"/>
+            <a:ext cx="8625535" cy="0"/>
+          </a:xfrm>
+          <a:prstGeom prst="line">
+            <a:avLst/>
+          </a:prstGeom>
+          <a:noFill/>
+          <a:ln w="25400">
+            <a:solidFill>
+              <a:schemeClr val="accent5"/>
+            </a:solidFill>
+            <a:prstDash val="solid"/>
+          </a:ln>
+        </p:spPr>
+      </p:sp>
+      <p:sp>
+        <p:nvSpPr>
+          <p:cNvPr id="5" name="Shape 3"/>
+          <p:cNvSpPr/>
+          <p:nvPr/>
+        </p:nvSpPr>
+        <p:spPr>
+          <a:xfrm>
+            <a:off x="1655064" y="1975104"/>
+            <a:ext cx="256032" cy="256032"/>
+          </a:xfrm>
+          <a:prstGeom prst="ellipse">
+            <a:avLst/>
+          </a:prstGeom>
+          <a:solidFill>
+            <a:schemeClr val="accent1"/>
+          </a:solidFill>
+          <a:ln w="19050">
+            <a:solidFill>
+              <a:schemeClr val="accent1"/>
+            </a:solidFill>
+            <a:prstDash val="solid"/>
+          </a:ln>
+        </p:spPr>
+      </p:sp>
+      <p:sp>
+        <p:nvSpPr>
+          <p:cNvPr id="6" name="Text 4"/>
+          <p:cNvSpPr txBox="1"/>
+          <p:nvPr/>
+        </p:nvSpPr>
+        <p:spPr>
+          <a:xfrm>
+            <a:off x="640080" y="2377440"/>
+            <a:ext cx="2286000" cy="365760"/>
+          </a:xfrm>
+          <a:prstGeom prst="rect">
+            <a:avLst/>
+          </a:prstGeom>
+          <a:noFill/>
+          <a:ln/>
+        </p:spPr>
+        <p:txBody>
+          <a:bodyPr wrap="square" lIns="0" tIns="0" rIns="0" bIns="0" rtlCol="0" anchor="ctr"/>
+          <a:lstStyle/>
+          <a:p>
+            <a:pPr algn="ctr" indent="0" marL="0">
+              <a:buNone/>
+            </a:pPr>
+            <a:r>
+              <a:rPr lang="en-US" sz="1600" b="1" dirty="0">
+                <a:solidFill>
+                  <a:schemeClr val="tx1"/>
+                </a:solidFill>
+              </a:rPr>
+              <a:t>Août</a:t>
+            </a:r>
+            <a:endParaRPr lang="en-US" sz="1600" dirty="0"/>
+          </a:p>
+        </p:txBody>
+      </p:sp>
+      <p:sp>
+        <p:nvSpPr>
+          <p:cNvPr id="7" name="Text 5"/>
+          <p:cNvSpPr txBox="1"/>
+          <p:nvPr/>
+        </p:nvSpPr>
+        <p:spPr>
+          <a:xfrm>
+            <a:off x="640080" y="2761488"/>
+            <a:ext cx="2286000" cy="822960"/>
+          </a:xfrm>
+          <a:prstGeom prst="rect">
+            <a:avLst/>
+          </a:prstGeom>
+          <a:noFill/>
+          <a:ln/>
+        </p:spPr>
+        <p:txBody>
+          <a:bodyPr wrap="square" lIns="0" tIns="0" rIns="0" bIns="0" rtlCol="0" anchor="t"/>
+          <a:lstStyle/>
+          <a:p>
+            <a:pPr algn="ctr" indent="0" marL="0">
+              <a:buNone/>
+            </a:pPr>
+            <a:r>
+              <a:rPr lang="en-US" sz="1400" dirty="0">
+                <a:solidFill>
+                  <a:schemeClr val="tx2"/>
+                </a:solidFill>
+              </a:rPr>
+              <a:t>Candidature et cahier des charges</a:t>
+            </a:r>
+            <a:endParaRPr lang="en-US" sz="1400" dirty="0"/>
+          </a:p>
+        </p:txBody>
+      </p:sp>
+      <p:sp>
+        <p:nvSpPr>
+          <p:cNvPr id="8" name="Shape 6"/>
+          <p:cNvSpPr/>
+          <p:nvPr/>
+        </p:nvSpPr>
+        <p:spPr>
+          <a:xfrm>
+            <a:off x="3811448" y="1975104"/>
+            <a:ext cx="256032" cy="256032"/>
+          </a:xfrm>
+          <a:prstGeom prst="ellipse">
+            <a:avLst/>
+          </a:prstGeom>
+          <a:solidFill>
+            <a:schemeClr val="accent1"/>
+          </a:solidFill>
+          <a:ln w="19050">
+            <a:solidFill>
+              <a:schemeClr val="accent1"/>
+            </a:solidFill>
+            <a:prstDash val="solid"/>
+          </a:ln>
+        </p:spPr>
+      </p:sp>
+      <p:sp>
+        <p:nvSpPr>
+          <p:cNvPr id="9" name="Text 7"/>
+          <p:cNvSpPr txBox="1"/>
+          <p:nvPr/>
+        </p:nvSpPr>
+        <p:spPr>
+          <a:xfrm>
+            <a:off x="2796464" y="2377440"/>
+            <a:ext cx="2286000" cy="365760"/>
+          </a:xfrm>
+          <a:prstGeom prst="rect">
+            <a:avLst/>
+          </a:prstGeom>
+          <a:noFill/>
+          <a:ln/>
+        </p:spPr>
+        <p:txBody>
+          <a:bodyPr wrap="square" lIns="0" tIns="0" rIns="0" bIns="0" rtlCol="0" anchor="ctr"/>
+          <a:lstStyle/>
+          <a:p>
+            <a:pPr algn="ctr" indent="0" marL="0">
+              <a:buNone/>
+            </a:pPr>
+            <a:r>
+              <a:rPr lang="en-US" sz="1600" b="1" dirty="0">
+                <a:solidFill>
+                  <a:schemeClr val="tx1"/>
+                </a:solidFill>
+              </a:rPr>
+              <a:t>Septembre</a:t>
+            </a:r>
+            <a:endParaRPr lang="en-US" sz="1600" dirty="0"/>
+          </a:p>
+        </p:txBody>
+      </p:sp>
+      <p:sp>
+        <p:nvSpPr>
+          <p:cNvPr id="10" name="Text 8"/>
+          <p:cNvSpPr txBox="1"/>
+          <p:nvPr/>
+        </p:nvSpPr>
+        <p:spPr>
+          <a:xfrm>
+            <a:off x="2796464" y="2761488"/>
+            <a:ext cx="2286000" cy="822960"/>
+          </a:xfrm>
+          <a:prstGeom prst="rect">
+            <a:avLst/>
+          </a:prstGeom>
+          <a:noFill/>
+          <a:ln/>
+        </p:spPr>
+        <p:txBody>
+          <a:bodyPr wrap="square" lIns="0" tIns="0" rIns="0" bIns="0" rtlCol="0" anchor="t"/>
+          <a:lstStyle/>
+          <a:p>
+            <a:pPr algn="ctr" indent="0" marL="0">
+              <a:buNone/>
+            </a:pPr>
+            <a:r>
+              <a:rPr lang="en-US" sz="1400" dirty="0">
+                <a:solidFill>
+                  <a:schemeClr val="tx2"/>
+                </a:solidFill>
+              </a:rPr>
+              <a:t>Conception détaillée et dossier</a:t>
+            </a:r>
+            <a:endParaRPr lang="en-US" sz="1400" dirty="0"/>
+          </a:p>
+        </p:txBody>
+      </p:sp>
+      <p:sp>
+        <p:nvSpPr>
+          <p:cNvPr id="11" name="Shape 9"/>
+          <p:cNvSpPr/>
+          <p:nvPr/>
+        </p:nvSpPr>
+        <p:spPr>
+          <a:xfrm>
+            <a:off x="5967832" y="1975104"/>
+            <a:ext cx="256032" cy="256032"/>
+          </a:xfrm>
+          <a:prstGeom prst="ellipse">
+            <a:avLst/>
+          </a:prstGeom>
+          <a:solidFill>
+            <a:schemeClr val="accent2"/>
+          </a:solidFill>
+          <a:ln w="19050">
+            <a:solidFill>
+              <a:schemeClr val="accent2"/>
+            </a:solidFill>
+            <a:prstDash val="solid"/>
+          </a:ln>
+        </p:spPr>
+      </p:sp>
+      <p:sp>
+        <p:nvSpPr>
+          <p:cNvPr id="12" name="Text 10"/>
+          <p:cNvSpPr txBox="1"/>
+          <p:nvPr/>
+        </p:nvSpPr>
+        <p:spPr>
+          <a:xfrm>
+            <a:off x="4952848" y="2377440"/>
+            <a:ext cx="2286000" cy="365760"/>
+          </a:xfrm>
+          <a:prstGeom prst="rect">
+            <a:avLst/>
+          </a:prstGeom>
+          <a:noFill/>
+          <a:ln/>
+        </p:spPr>
+        <p:txBody>
+          <a:bodyPr wrap="square" lIns="0" tIns="0" rIns="0" bIns="0" rtlCol="0" anchor="ctr"/>
+          <a:lstStyle/>
+          <a:p>
+            <a:pPr algn="ctr" indent="0" marL="0">
+              <a:buNone/>
+            </a:pPr>
+            <a:r>
+              <a:rPr lang="en-US" sz="1600" b="1" dirty="0">
+                <a:solidFill>
+                  <a:schemeClr val="tx1"/>
+                </a:solidFill>
+              </a:rPr>
+              <a:t>Octobre (en cours)</a:t>
+            </a:r>
+            <a:endParaRPr lang="en-US" sz="1600" dirty="0"/>
+          </a:p>
+        </p:txBody>
+      </p:sp>
+      <p:sp>
+        <p:nvSpPr>
+          <p:cNvPr id="13" name="Text 11"/>
+          <p:cNvSpPr txBox="1"/>
+          <p:nvPr/>
+        </p:nvSpPr>
+        <p:spPr>
+          <a:xfrm>
+            <a:off x="4952848" y="2761488"/>
+            <a:ext cx="2286000" cy="822960"/>
+          </a:xfrm>
+          <a:prstGeom prst="rect">
+            <a:avLst/>
+          </a:prstGeom>
+          <a:noFill/>
+          <a:ln/>
+        </p:spPr>
+        <p:txBody>
+          <a:bodyPr wrap="square" lIns="0" tIns="0" rIns="0" bIns="0" rtlCol="0" anchor="t"/>
+          <a:lstStyle/>
+          <a:p>
+            <a:pPr algn="ctr" indent="0" marL="0">
+              <a:buNone/>
+            </a:pPr>
+            <a:r>
+              <a:rPr lang="en-US" sz="1400" dirty="0">
+                <a:solidFill>
+                  <a:schemeClr val="tx2"/>
+                </a:solidFill>
+              </a:rPr>
+              <a:t>Prototypage et intégration</a:t>
+            </a:r>
+            <a:endParaRPr lang="en-US" sz="1400" dirty="0"/>
+          </a:p>
+        </p:txBody>
+      </p:sp>
+      <p:sp>
+        <p:nvSpPr>
+          <p:cNvPr id="14" name="Shape 12"/>
+          <p:cNvSpPr/>
+          <p:nvPr/>
+        </p:nvSpPr>
+        <p:spPr>
+          <a:xfrm>
+            <a:off x="8124215" y="1975104"/>
+            <a:ext cx="256032" cy="256032"/>
+          </a:xfrm>
+          <a:prstGeom prst="ellipse">
+            <a:avLst/>
+          </a:prstGeom>
+          <a:solidFill>
+            <a:schemeClr val="bg1"/>
+          </a:solidFill>
+          <a:ln w="19050">
+            <a:solidFill>
+              <a:schemeClr val="accent6"/>
+            </a:solidFill>
+            <a:prstDash val="solid"/>
+          </a:ln>
+        </p:spPr>
+      </p:sp>
+      <p:sp>
+        <p:nvSpPr>
+          <p:cNvPr id="15" name="Text 13"/>
+          <p:cNvSpPr txBox="1"/>
+          <p:nvPr/>
+        </p:nvSpPr>
+        <p:spPr>
+          <a:xfrm>
+            <a:off x="7109231" y="2377440"/>
+            <a:ext cx="2286000" cy="365760"/>
+          </a:xfrm>
+          <a:prstGeom prst="rect">
+            <a:avLst/>
+          </a:prstGeom>
+          <a:noFill/>
+          <a:ln/>
+        </p:spPr>
+        <p:txBody>
+          <a:bodyPr wrap="square" lIns="0" tIns="0" rIns="0" bIns="0" rtlCol="0" anchor="ctr"/>
+          <a:lstStyle/>
+          <a:p>
+            <a:pPr algn="ctr" indent="0" marL="0">
+              <a:buNone/>
+            </a:pPr>
+            <a:r>
+              <a:rPr lang="en-US" sz="1600" b="1" dirty="0">
+                <a:solidFill>
+                  <a:schemeClr val="tx1"/>
+                </a:solidFill>
+              </a:rPr>
+              <a:t>Novembre</a:t>
+            </a:r>
+            <a:endParaRPr lang="en-US" sz="1600" dirty="0"/>
+          </a:p>
+        </p:txBody>
+      </p:sp>
+      <p:sp>
+        <p:nvSpPr>
+          <p:cNvPr id="16" name="Text 14"/>
+          <p:cNvSpPr txBox="1"/>
+          <p:nvPr/>
+        </p:nvSpPr>
+        <p:spPr>
+          <a:xfrm>
+            <a:off x="7109231" y="2761488"/>
+            <a:ext cx="2286000" cy="822960"/>
+          </a:xfrm>
+          <a:prstGeom prst="rect">
+            <a:avLst/>
+          </a:prstGeom>
+          <a:noFill/>
+          <a:ln/>
+        </p:spPr>
+        <p:txBody>
+          <a:bodyPr wrap="square" lIns="0" tIns="0" rIns="0" bIns="0" rtlCol="0" anchor="t"/>
+          <a:lstStyle/>
+          <a:p>
+            <a:pPr algn="ctr" indent="0" marL="0">
+              <a:buNone/>
+            </a:pPr>
+            <a:r>
+              <a:rPr lang="en-US" sz="1400" dirty="0">
+                <a:solidFill>
+                  <a:schemeClr val="tx2"/>
+                </a:solidFill>
+              </a:rPr>
+              <a:t>Essais au sol, en vol et de sécurité</a:t>
+            </a:r>
+            <a:endParaRPr lang="en-US" sz="1400" dirty="0"/>
+          </a:p>
+        </p:txBody>
+      </p:sp>
+      <p:sp>
+        <p:nvSpPr>
+          <p:cNvPr id="17" name="Shape 15"/>
+          <p:cNvSpPr/>
+          <p:nvPr/>
+        </p:nvSpPr>
+        <p:spPr>
+          <a:xfrm>
+            <a:off x="10280599" y="1975104"/>
+            <a:ext cx="256032" cy="256032"/>
+          </a:xfrm>
+          <a:prstGeom prst="ellipse">
+            <a:avLst/>
+          </a:prstGeom>
+          <a:solidFill>
+            <a:schemeClr val="bg1"/>
+          </a:solidFill>
+          <a:ln w="19050">
+            <a:solidFill>
+              <a:schemeClr val="accent6"/>
+            </a:solidFill>
+            <a:prstDash val="solid"/>
+          </a:ln>
+        </p:spPr>
+      </p:sp>
+      <p:sp>
+        <p:nvSpPr>
+          <p:cNvPr id="18" name="Text 16"/>
+          <p:cNvSpPr txBox="1"/>
+          <p:nvPr/>
+        </p:nvSpPr>
+        <p:spPr>
+          <a:xfrm>
+            <a:off x="9265615" y="2377440"/>
+            <a:ext cx="2286000" cy="365760"/>
+          </a:xfrm>
+          <a:prstGeom prst="rect">
+            <a:avLst/>
+          </a:prstGeom>
+          <a:noFill/>
+          <a:ln/>
+        </p:spPr>
+        <p:txBody>
+          <a:bodyPr wrap="square" lIns="0" tIns="0" rIns="0" bIns="0" rtlCol="0" anchor="ctr"/>
+          <a:lstStyle/>
+          <a:p>
+            <a:pPr algn="ctr" indent="0" marL="0">
+              <a:buNone/>
+            </a:pPr>
+            <a:r>
+              <a:rPr lang="en-US" sz="1600" b="1" dirty="0">
+                <a:solidFill>
+                  <a:schemeClr val="tx1"/>
+                </a:solidFill>
+              </a:rPr>
+              <a:t>Décembre 2026</a:t>
+            </a:r>
+            <a:endParaRPr lang="en-US" sz="1600" dirty="0"/>
+          </a:p>
+        </p:txBody>
+      </p:sp>
+      <p:sp>
+        <p:nvSpPr>
+          <p:cNvPr id="19" name="Text 17"/>
+          <p:cNvSpPr txBox="1"/>
+          <p:nvPr/>
+        </p:nvSpPr>
+        <p:spPr>
+          <a:xfrm>
+            <a:off x="9265615" y="2761488"/>
+            <a:ext cx="2286000" cy="822960"/>
+          </a:xfrm>
+          <a:prstGeom prst="rect">
+            <a:avLst/>
+          </a:prstGeom>
+          <a:noFill/>
+          <a:ln/>
+        </p:spPr>
+        <p:txBody>
+          <a:bodyPr wrap="square" lIns="0" tIns="0" rIns="0" bIns="0" rtlCol="0" anchor="t"/>
+          <a:lstStyle/>
+          <a:p>
+            <a:pPr algn="ctr" indent="0" marL="0">
+              <a:buNone/>
+            </a:pPr>
+            <a:r>
+              <a:rPr lang="en-US" sz="1400" dirty="0">
+                <a:solidFill>
+                  <a:schemeClr val="tx2"/>
+                </a:solidFill>
+              </a:rPr>
+              <a:t>Finale et démonstration</a:t>
+            </a:r>
+            <a:endParaRPr lang="en-US" sz="1400" dirty="0"/>
+          </a:p>
+        </p:txBody>
+      </p:sp>
+      <p:sp>
+        <p:nvSpPr>
+          <p:cNvPr id="25" name="Slide Number Placeholder 0"/>
+          <p:cNvSpPr>
+            <a:spLocks noGrp="1"/>
+          </p:cNvSpPr>
+          <p:nvPr>
+            <p:ph type="sldNum" sz="quarter" idx="4294967295"/>
+          </p:nvPr>
+        </p:nvSpPr>
+        <p:spPr>
+          <a:xfrm>
+            <a:off x="11231575" y="6382512"/>
+            <a:ext cx="365760" cy="274320"/>
+          </a:xfrm>
+          <a:prstGeom prst="rect">
+            <a:avLst/>
+          </a:prstGeom>
+          <a:extLst>
+            <a:ext uri="{C572A759-6A51-4108-AA02-DFA0A04FC94B}">
+              <ma14:wrappingTextBoxFlag xmlns:ma14="http://schemas.microsoft.com/office/mac/drawingml/2011/main" val="0"/>
+            </a:ext>
+          </a:extLst>
+        </p:spPr>
+        <p:txBody>
+          <a:bodyPr lIns="0" tIns="0" rIns="0" bIns="0"/>
+          <a:lstStyle>
+            <a:lvl1pPr>
+              <a:defRPr sz="1000">
+                <a:solidFill>
+                  <a:schemeClr val="tx2"/>
+                </a:solidFill>
+              </a:defRPr>
+            </a:lvl1pPr>
+          </a:lstStyle>
+          <a:p>
+            <a:pPr algn="r"/>
+            <a:fld id="{F7021451-1387-4CA6-816F-3879F97B5CBC}" type="slidenum">
+              <a:rPr b="0" lang="en-US"/>
+              <a:t>22</a:t>
+            </a:fld>
+            <a:endParaRPr lang="en-US"/>
+          </a:p>
+        </p:txBody>
+      </p:sp>
+    </p:spTree>
+  </p:cSld>
+  <p:clrMapOvr>
+    <a:masterClrMapping/>
+  </p:clrMapOvr>
+</p:sld>
+</file>
+
+<file path=ppt/slides/slide23.xml><?xml version="1.0" encoding="utf-8"?>
+<p:sld xmlns:a="http://schemas.openxmlformats.org/drawingml/2006/main" xmlns:r="http://schemas.openxmlformats.org/officeDocument/2006/relationships" xmlns:p="http://schemas.openxmlformats.org/presentationml/2006/main">
+  <p:cSld name="Slide 23">
+    <p:spTree>
+      <p:nvGrpSpPr>
+        <p:cNvPr id="1" name=""/>
+        <p:cNvGrpSpPr/>
+        <p:nvPr/>
+      </p:nvGrpSpPr>
+      <p:grpSpPr>
+        <a:xfrm>
+          <a:off x="0" y="0"/>
+          <a:ext cx="0" cy="0"/>
+          <a:chOff x="0" y="0"/>
+          <a:chExt cx="0" cy="0"/>
+        </a:xfrm>
+      </p:grpSpPr>
+      <p:sp>
+        <p:nvSpPr>
+          <p:cNvPr id="2" name="Text 0"/>
+          <p:cNvSpPr/>
+          <p:nvPr>
+            <p:ph idx="100" type="title" hasCustomPrompt="1"/>
+          </p:nvPr>
+        </p:nvSpPr>
+        <p:spPr>
+          <a:xfrm>
+            <a:off x="594360" y="411480"/>
+            <a:ext cx="11002975" cy="685800"/>
+          </a:xfrm>
+          <a:prstGeom prst="rect">
+            <a:avLst/>
+          </a:prstGeom>
+          <a:noFill/>
+          <a:ln/>
+        </p:spPr>
+        <p:txBody>
+          <a:bodyPr wrap="square" lIns="0" tIns="0" rIns="0" bIns="0" rtlCol="0" anchor="ctr"/>
+          <a:lstStyle/>
+          <a:p>
+            <a:pPr algn="l" indent="0" marL="0">
+              <a:buNone/>
+            </a:pPr>
+            <a:r>
+              <a:rPr lang="en-US" sz="3000" b="1" dirty="0">
+                <a:solidFill>
+                  <a:schemeClr val="tx1"/>
+                </a:solidFill>
+              </a:rPr>
+              <a:t>Budget prévisionnel</a:t>
+            </a:r>
+            <a:endParaRPr lang="en-US" sz="3000" dirty="0"/>
+          </a:p>
+        </p:txBody>
+      </p:sp>
+      <p:sp>
+        <p:nvSpPr>
+          <p:cNvPr id="3" name="Text 1"/>
+          <p:cNvSpPr txBox="1"/>
+          <p:nvPr/>
+        </p:nvSpPr>
+        <p:spPr>
+          <a:xfrm>
+            <a:off x="7025335" y="6382512"/>
+            <a:ext cx="4069080" cy="274320"/>
+          </a:xfrm>
+          <a:prstGeom prst="rect">
+            <a:avLst/>
+          </a:prstGeom>
+          <a:noFill/>
+          <a:ln/>
+        </p:spPr>
+        <p:txBody>
+          <a:bodyPr wrap="square" lIns="0" tIns="0" rIns="0" bIns="0" rtlCol="0" anchor="ctr"/>
+          <a:lstStyle/>
+          <a:p>
+            <a:pPr algn="r" indent="0" marL="0">
+              <a:buNone/>
+            </a:pPr>
+            <a:r>
+              <a:rPr lang="en-US" sz="1000" dirty="0">
+                <a:solidFill>
+                  <a:schemeClr val="tx2"/>
+                </a:solidFill>
+              </a:rPr>
               <a:t>Israel AWADE</a:t>
             </a:r>
             <a:endParaRPr lang="en-US" sz="1000" dirty="0"/>
@@ -13745,7 +15483,7 @@
       </p:sp>
       <p:graphicFrame>
         <p:nvGraphicFramePr>
-          <p:cNvPr id="23" name="Table 0"/>
+          <p:cNvPr id="24" name="Table 0"/>
           <p:cNvGraphicFramePr>
             <a:graphicFrameLocks noGrp="1"/>
           </p:cNvGraphicFramePr>
@@ -14510,7 +16248,7 @@
             <a:pPr algn="r"/>
             <a:fld id="{F7021451-1387-4CA6-816F-3879F97B5CBC}" type="slidenum">
               <a:rPr b="0" lang="en-US"/>
-              <a:t>22</a:t>
+              <a:t>23</a:t>
             </a:fld>
             <a:endParaRPr lang="en-US"/>
           </a:p>
@@ -14524,9 +16262,9 @@
 </p:sld>
 </file>
 
-<file path=ppt/slides/slide23.xml><?xml version="1.0" encoding="utf-8"?>
+<file path=ppt/slides/slide24.xml><?xml version="1.0" encoding="utf-8"?>
 <p:sld xmlns:a="http://schemas.openxmlformats.org/drawingml/2006/main" xmlns:r="http://schemas.openxmlformats.org/officeDocument/2006/relationships" xmlns:p="http://schemas.openxmlformats.org/presentationml/2006/main">
-  <p:cSld name="Slide 23">
+  <p:cSld name="Slide 24">
     <p:spTree>
       <p:nvGrpSpPr>
         <p:cNvPr id="1" name=""/>
@@ -16529,7 +18267,7 @@
       </p:sp>
       <p:pic>
         <p:nvPicPr>
-          <p:cNvPr id="8" name="Image 0" descr="Nacelles et moteurs avant, vue de dessus">    </p:cNvPr>
+          <p:cNvPr id="8" name="Image 0" descr="Moteur sans balais (brushless)">    </p:cNvPr>
           <p:cNvPicPr>
             <a:picLocks noChangeAspect="1"/>
           </p:cNvPicPr>
@@ -16543,8 +18281,8 @@
         </p:blipFill>
         <p:spPr>
           <a:xfrm>
-            <a:off x="6923777" y="1417320"/>
-            <a:ext cx="3876261" cy="1783080"/>
+            <a:off x="7376008" y="1417320"/>
+            <a:ext cx="2971800" cy="1783080"/>
           </a:xfrm>
           <a:prstGeom prst="rect">
             <a:avLst/>
@@ -16553,14 +18291,14 @@
       </p:pic>
       <p:sp>
         <p:nvSpPr>
-          <p:cNvPr id="9" name="Cadre z_dessus_avant"/>
+          <p:cNvPr id="9" name="Cadre moteur_brushless"/>
           <p:cNvSpPr/>
           <p:nvPr/>
         </p:nvSpPr>
         <p:spPr>
           <a:xfrm>
-            <a:off x="6923777" y="1417320"/>
-            <a:ext cx="3876261" cy="1783080"/>
+            <a:off x="7376008" y="1417320"/>
+            <a:ext cx="2971800" cy="1783080"/>
           </a:xfrm>
           <a:prstGeom prst="rect">
             <a:avLst/>
@@ -16581,8 +18319,8 @@
         </p:nvSpPr>
         <p:spPr>
           <a:xfrm>
-            <a:off x="6923777" y="3255264"/>
-            <a:ext cx="3876261" cy="256032"/>
+            <a:off x="7376008" y="3255264"/>
+            <a:ext cx="2971800" cy="256032"/>
           </a:xfrm>
           <a:prstGeom prst="rect">
             <a:avLst/>
@@ -16603,7 +18341,7 @@
                   <a:schemeClr val="tx2"/>
                 </a:solidFill>
               </a:rPr>
-              <a:t>Nacelles et moteurs avant, vue de dessus</a:t>
+              <a:t>Moteur sans balais (brushless)</a:t>
             </a:r>
             <a:endParaRPr lang="en-US" sz="1100" dirty="0"/>
           </a:p>
@@ -16611,7 +18349,7 @@
       </p:sp>
       <p:pic>
         <p:nvPicPr>
-          <p:cNvPr id="11" name="Image 1" descr="Moteur, servo de basculement et nez, vue de profil">    </p:cNvPr>
+          <p:cNvPr id="11" name="Image 1" descr="Variateur (ESC) relié à un moteur">    </p:cNvPr>
           <p:cNvPicPr>
             <a:picLocks noChangeAspect="1"/>
           </p:cNvPicPr>
@@ -16625,8 +18363,8 @@
         </p:blipFill>
         <p:spPr>
           <a:xfrm>
-            <a:off x="7550819" y="3886200"/>
-            <a:ext cx="2622176" cy="1783080"/>
+            <a:off x="7802652" y="3886200"/>
+            <a:ext cx="2118511" cy="1783080"/>
           </a:xfrm>
           <a:prstGeom prst="rect">
             <a:avLst/>
@@ -16635,14 +18373,14 @@
       </p:pic>
       <p:sp>
         <p:nvSpPr>
-          <p:cNvPr id="12" name="Cadre z_nacelle"/>
+          <p:cNvPr id="12" name="Cadre esc_moteur"/>
           <p:cNvSpPr/>
           <p:nvPr/>
         </p:nvSpPr>
         <p:spPr>
           <a:xfrm>
-            <a:off x="7550819" y="3886200"/>
-            <a:ext cx="2622176" cy="1783080"/>
+            <a:off x="7802652" y="3886200"/>
+            <a:ext cx="2118511" cy="1783080"/>
           </a:xfrm>
           <a:prstGeom prst="rect">
             <a:avLst/>
@@ -16663,8 +18401,8 @@
         </p:nvSpPr>
         <p:spPr>
           <a:xfrm>
-            <a:off x="7550819" y="5724144"/>
-            <a:ext cx="2622176" cy="256032"/>
+            <a:off x="7802652" y="5724144"/>
+            <a:ext cx="2118511" cy="256032"/>
           </a:xfrm>
           <a:prstGeom prst="rect">
             <a:avLst/>
@@ -16685,9 +18423,45 @@
                   <a:schemeClr val="tx2"/>
                 </a:solidFill>
               </a:rPr>
-              <a:t>Moteur, servo de basculement et nez, vue de profil</a:t>
+              <a:t>Variateur (ESC) relié à un moteur</a:t>
             </a:r>
             <a:endParaRPr lang="en-US" sz="1100" dirty="0"/>
+          </a:p>
+        </p:txBody>
+      </p:sp>
+      <p:sp>
+        <p:nvSpPr>
+          <p:cNvPr id="14" name="Text 10"/>
+          <p:cNvSpPr txBox="1"/>
+          <p:nvPr/>
+        </p:nvSpPr>
+        <p:spPr>
+          <a:xfrm>
+            <a:off x="594360" y="6053328"/>
+            <a:ext cx="11002975" cy="201168"/>
+          </a:xfrm>
+          <a:prstGeom prst="rect">
+            <a:avLst/>
+          </a:prstGeom>
+          <a:noFill/>
+          <a:ln/>
+        </p:spPr>
+        <p:txBody>
+          <a:bodyPr wrap="square" lIns="0" tIns="0" rIns="0" bIns="0" rtlCol="0" anchor="ctr"/>
+          <a:lstStyle/>
+          <a:p>
+            <a:pPr indent="0" marL="0">
+              <a:buNone/>
+            </a:pPr>
+            <a:r>
+              <a:rPr lang="en-US" sz="900" i="1" dirty="0">
+                <a:solidFill>
+                  <a:schemeClr val="tx2"/>
+                </a:solidFill>
+              </a:rPr>
+              <a:t>Photos de composants (exemples) : wiki ArduPilot, CC BY-SA 3.0 ; Raspberry Pi Ltd, CC BY-SA 4.0.</a:t>
+            </a:r>
+            <a:endParaRPr lang="en-US" sz="900" dirty="0"/>
           </a:p>
         </p:txBody>
       </p:sp>
@@ -17061,7 +18835,7 @@
       </p:sp>
       <p:pic>
         <p:nvPicPr>
-          <p:cNvPr id="8" name="Image 0" descr="Moteur arrière et empennage en V, vue de dessus">    </p:cNvPr>
+          <p:cNvPr id="8" name="Image 0" descr="Gouverne d'empennage en V et sa commande par servo">    </p:cNvPr>
           <p:cNvPicPr>
             <a:picLocks noChangeAspect="1"/>
           </p:cNvPicPr>
@@ -17075,8 +18849,8 @@
         </p:blipFill>
         <p:spPr>
           <a:xfrm>
-            <a:off x="7376008" y="1417320"/>
-            <a:ext cx="2971800" cy="1783080"/>
+            <a:off x="6126480" y="1491729"/>
+            <a:ext cx="5470855" cy="4103141"/>
           </a:xfrm>
           <a:prstGeom prst="rect">
             <a:avLst/>
@@ -17085,14 +18859,14 @@
       </p:pic>
       <p:sp>
         <p:nvSpPr>
-          <p:cNvPr id="9" name="Cadre z_dessus_arriere"/>
+          <p:cNvPr id="9" name="Cadre gouverne_servo"/>
           <p:cNvSpPr/>
           <p:nvPr/>
         </p:nvSpPr>
         <p:spPr>
           <a:xfrm>
-            <a:off x="7376008" y="1417320"/>
-            <a:ext cx="2971800" cy="1783080"/>
+            <a:off x="6126480" y="1491729"/>
+            <a:ext cx="5470855" cy="4103141"/>
           </a:xfrm>
           <a:prstGeom prst="rect">
             <a:avLst/>
@@ -17113,8 +18887,8 @@
         </p:nvSpPr>
         <p:spPr>
           <a:xfrm>
-            <a:off x="7376008" y="3255264"/>
-            <a:ext cx="2971800" cy="256032"/>
+            <a:off x="6126480" y="5649735"/>
+            <a:ext cx="5470855" cy="256032"/>
           </a:xfrm>
           <a:prstGeom prst="rect">
             <a:avLst/>
@@ -17135,68 +18909,22 @@
                   <a:schemeClr val="tx2"/>
                 </a:solidFill>
               </a:rPr>
-              <a:t>Moteur arrière et empennage en V, vue de dessus</a:t>
+              <a:t>Gouverne d'empennage en V et sa commande par servo</a:t>
             </a:r>
             <a:endParaRPr lang="en-US" sz="1100" dirty="0"/>
           </a:p>
         </p:txBody>
       </p:sp>
-      <p:pic>
-        <p:nvPicPr>
-          <p:cNvPr id="11" name="Image 1" descr="Queue du drone, vue de profil">    </p:cNvPr>
-          <p:cNvPicPr>
-            <a:picLocks noChangeAspect="1"/>
-          </p:cNvPicPr>
-          <p:nvPr/>
-        </p:nvPicPr>
-        <p:blipFill>
-          <a:blip r:embed="rId2"/>
-          <a:stretch>
-            <a:fillRect/>
-          </a:stretch>
-        </p:blipFill>
-        <p:spPr>
-          <a:xfrm>
-            <a:off x="7376008" y="3886200"/>
-            <a:ext cx="2971800" cy="1783080"/>
-          </a:xfrm>
-          <a:prstGeom prst="rect">
-            <a:avLst/>
-          </a:prstGeom>
-        </p:spPr>
-      </p:pic>
-      <p:sp>
-        <p:nvSpPr>
-          <p:cNvPr id="12" name="Cadre z_queue"/>
-          <p:cNvSpPr/>
-          <p:nvPr/>
-        </p:nvSpPr>
-        <p:spPr>
-          <a:xfrm>
-            <a:off x="7376008" y="3886200"/>
-            <a:ext cx="2971800" cy="1783080"/>
-          </a:xfrm>
-          <a:prstGeom prst="rect">
-            <a:avLst/>
-          </a:prstGeom>
-          <a:ln w="9525">
-            <a:solidFill>
-              <a:schemeClr val="accent5"/>
-            </a:solidFill>
-            <a:prstDash val="solid"/>
-          </a:ln>
-        </p:spPr>
-      </p:sp>
-      <p:sp>
-        <p:nvSpPr>
-          <p:cNvPr id="13" name="Text 9"/>
+      <p:sp>
+        <p:nvSpPr>
+          <p:cNvPr id="11" name="Text 8"/>
           <p:cNvSpPr txBox="1"/>
           <p:nvPr/>
         </p:nvSpPr>
         <p:spPr>
           <a:xfrm>
-            <a:off x="7376008" y="5724144"/>
-            <a:ext cx="2971800" cy="256032"/>
+            <a:off x="594360" y="6053328"/>
+            <a:ext cx="11002975" cy="201168"/>
           </a:xfrm>
           <a:prstGeom prst="rect">
             <a:avLst/>
@@ -17212,14 +18940,14 @@
               <a:buNone/>
             </a:pPr>
             <a:r>
-              <a:rPr lang="en-US" sz="1100" i="1" dirty="0">
+              <a:rPr lang="en-US" sz="900" i="1" dirty="0">
                 <a:solidFill>
                   <a:schemeClr val="tx2"/>
                 </a:solidFill>
               </a:rPr>
-              <a:t>Queue du drone, vue de profil</a:t>
-            </a:r>
-            <a:endParaRPr lang="en-US" sz="1100" dirty="0"/>
+              <a:t>Photos de composants (exemples) : wiki ArduPilot, CC BY-SA 3.0 ; Raspberry Pi Ltd, CC BY-SA 4.0.</a:t>
+            </a:r>
+            <a:endParaRPr lang="en-US" sz="900" dirty="0"/>
           </a:p>
         </p:txBody>
       </p:sp>
@@ -17383,1006 +19111,6 @@
         </p:nvGraphicFramePr>
         <p:xfrm>
           <a:off x="594360" y="1463040"/>
-          <a:ext cx="6949440" cy="914400"/>
-        </p:xfrm>
-        <a:graphic>
-          <a:graphicData uri="http://schemas.openxmlformats.org/drawingml/2006/table">
-            <a:tbl>
-              <a:tblPr/>
-              <a:tblGrid>
-                <a:gridCol w="2743200"/>
-                <a:gridCol w="4206240"/>
-              </a:tblGrid>
-              <a:tr h="457200">
-                <a:tc>
-                  <a:txBody>
-                    <a:bodyPr/>
-                    <a:lstStyle/>
-                    <a:p>
-                      <a:pPr indent="0" marL="0">
-                        <a:buNone/>
-                      </a:pPr>
-                      <a:r>
-                        <a:rPr lang="en-US" sz="1500" b="1" dirty="0">
-                          <a:solidFill>
-                            <a:schemeClr val="accent1"/>
-                          </a:solidFill>
-                        </a:rPr>
-                        <a:t>Élément</a:t>
-                      </a:r>
-                      <a:endParaRPr lang="en-US" sz="1500" dirty="0"/>
-                    </a:p>
-                  </a:txBody>
-                  <a:tcPr marL="109728" marR="109728" marT="36576" marB="36576" anchor="ctr">
-                    <a:lnL w="0" cap="flat" cmpd="sng" algn="ctr">
-                      <a:noFill/>
-                    </a:lnL>
-                    <a:lnR w="0" cap="flat" cmpd="sng" algn="ctr">
-                      <a:noFill/>
-                    </a:lnR>
-                    <a:lnT w="0" cap="flat" cmpd="sng" algn="ctr">
-                      <a:noFill/>
-                    </a:lnT>
-                    <a:lnB w="9525" cap="flat" cmpd="sng" algn="ctr">
-                      <a:solidFill>
-                        <a:srgbClr val="D3D9DE"/>
-                      </a:solidFill>
-                      <a:prstDash val="solid"/>
-                      <a:round/>
-                      <a:headEnd type="none" w="med" len="med"/>
-                      <a:tailEnd type="none" w="med" len="med"/>
-                    </a:lnB>
-                    <a:solidFill>
-                      <a:schemeClr val="bg2"/>
-                    </a:solidFill>
-                  </a:tcPr>
-                </a:tc>
-                <a:tc>
-                  <a:txBody>
-                    <a:bodyPr/>
-                    <a:lstStyle/>
-                    <a:p>
-                      <a:pPr indent="0" marL="0">
-                        <a:buNone/>
-                      </a:pPr>
-                      <a:r>
-                        <a:rPr lang="en-US" sz="1500" b="1" dirty="0">
-                          <a:solidFill>
-                            <a:schemeClr val="accent1"/>
-                          </a:solidFill>
-                        </a:rPr>
-                        <a:t>Choix retenu</a:t>
-                      </a:r>
-                      <a:endParaRPr lang="en-US" sz="1500" dirty="0"/>
-                    </a:p>
-                  </a:txBody>
-                  <a:tcPr marL="109728" marR="109728" marT="36576" marB="36576" anchor="ctr">
-                    <a:lnL w="0" cap="flat" cmpd="sng" algn="ctr">
-                      <a:noFill/>
-                    </a:lnL>
-                    <a:lnR w="0" cap="flat" cmpd="sng" algn="ctr">
-                      <a:noFill/>
-                    </a:lnR>
-                    <a:lnT w="0" cap="flat" cmpd="sng" algn="ctr">
-                      <a:noFill/>
-                    </a:lnT>
-                    <a:lnB w="9525" cap="flat" cmpd="sng" algn="ctr">
-                      <a:solidFill>
-                        <a:srgbClr val="D3D9DE"/>
-                      </a:solidFill>
-                      <a:prstDash val="solid"/>
-                      <a:round/>
-                      <a:headEnd type="none" w="med" len="med"/>
-                      <a:tailEnd type="none" w="med" len="med"/>
-                    </a:lnB>
-                    <a:solidFill>
-                      <a:schemeClr val="bg2"/>
-                    </a:solidFill>
-                  </a:tcPr>
-                </a:tc>
-              </a:tr>
-              <a:tr h="457200">
-                <a:tc>
-                  <a:txBody>
-                    <a:bodyPr/>
-                    <a:lstStyle/>
-                    <a:p>
-                      <a:pPr indent="0" marL="0">
-                        <a:buNone/>
-                      </a:pPr>
-                      <a:r>
-                        <a:rPr lang="en-US" sz="1500" b="1" dirty="0">
-                          <a:solidFill>
-                            <a:schemeClr val="tx1"/>
-                          </a:solidFill>
-                        </a:rPr>
-                        <a:t>Configuration</a:t>
-                      </a:r>
-                      <a:endParaRPr lang="en-US" sz="1500" dirty="0"/>
-                    </a:p>
-                  </a:txBody>
-                  <a:tcPr marL="109728" marR="109728" marT="36576" marB="36576" anchor="ctr">
-                    <a:lnL w="0" cap="flat" cmpd="sng" algn="ctr">
-                      <a:noFill/>
-                    </a:lnL>
-                    <a:lnR w="0" cap="flat" cmpd="sng" algn="ctr">
-                      <a:noFill/>
-                    </a:lnR>
-                    <a:lnT w="0" cap="flat" cmpd="sng" algn="ctr">
-                      <a:noFill/>
-                    </a:lnT>
-                    <a:lnB w="9525" cap="flat" cmpd="sng" algn="ctr">
-                      <a:solidFill>
-                        <a:srgbClr val="D3D9DE"/>
-                      </a:solidFill>
-                      <a:prstDash val="solid"/>
-                      <a:round/>
-                      <a:headEnd type="none" w="med" len="med"/>
-                      <a:tailEnd type="none" w="med" len="med"/>
-                    </a:lnB>
-                  </a:tcPr>
-                </a:tc>
-                <a:tc>
-                  <a:txBody>
-                    <a:bodyPr/>
-                    <a:lstStyle/>
-                    <a:p>
-                      <a:pPr indent="0" marL="0">
-                        <a:buNone/>
-                      </a:pPr>
-                      <a:r>
-                        <a:rPr lang="en-US" sz="1500" dirty="0">
-                          <a:solidFill>
-                            <a:schemeClr val="tx1"/>
-                          </a:solidFill>
-                        </a:rPr>
-                        <a:t>VTOL à rotors basculants, trois moteurs</a:t>
-                      </a:r>
-                      <a:endParaRPr lang="en-US" sz="1500" dirty="0"/>
-                    </a:p>
-                  </a:txBody>
-                  <a:tcPr marL="109728" marR="109728" marT="36576" marB="36576" anchor="ctr">
-                    <a:lnL w="0" cap="flat" cmpd="sng" algn="ctr">
-                      <a:noFill/>
-                    </a:lnL>
-                    <a:lnR w="0" cap="flat" cmpd="sng" algn="ctr">
-                      <a:noFill/>
-                    </a:lnR>
-                    <a:lnT w="0" cap="flat" cmpd="sng" algn="ctr">
-                      <a:noFill/>
-                    </a:lnT>
-                    <a:lnB w="9525" cap="flat" cmpd="sng" algn="ctr">
-                      <a:solidFill>
-                        <a:srgbClr val="D3D9DE"/>
-                      </a:solidFill>
-                      <a:prstDash val="solid"/>
-                      <a:round/>
-                      <a:headEnd type="none" w="med" len="med"/>
-                      <a:tailEnd type="none" w="med" len="med"/>
-                    </a:lnB>
-                  </a:tcPr>
-                </a:tc>
-              </a:tr>
-              <a:tr h="457200">
-                <a:tc>
-                  <a:txBody>
-                    <a:bodyPr/>
-                    <a:lstStyle/>
-                    <a:p>
-                      <a:pPr indent="0" marL="0">
-                        <a:buNone/>
-                      </a:pPr>
-                      <a:r>
-                        <a:rPr lang="en-US" sz="1500" b="1" dirty="0">
-                          <a:solidFill>
-                            <a:schemeClr val="tx1"/>
-                          </a:solidFill>
-                        </a:rPr>
-                        <a:t>Propulsion</a:t>
-                      </a:r>
-                      <a:endParaRPr lang="en-US" sz="1500" dirty="0"/>
-                    </a:p>
-                  </a:txBody>
-                  <a:tcPr marL="109728" marR="109728" marT="36576" marB="36576" anchor="ctr">
-                    <a:lnL w="0" cap="flat" cmpd="sng" algn="ctr">
-                      <a:noFill/>
-                    </a:lnL>
-                    <a:lnR w="0" cap="flat" cmpd="sng" algn="ctr">
-                      <a:noFill/>
-                    </a:lnR>
-                    <a:lnT w="0" cap="flat" cmpd="sng" algn="ctr">
-                      <a:noFill/>
-                    </a:lnT>
-                    <a:lnB w="9525" cap="flat" cmpd="sng" algn="ctr">
-                      <a:solidFill>
-                        <a:srgbClr val="D3D9DE"/>
-                      </a:solidFill>
-                      <a:prstDash val="solid"/>
-                      <a:round/>
-                      <a:headEnd type="none" w="med" len="med"/>
-                      <a:tailEnd type="none" w="med" len="med"/>
-                    </a:lnB>
-                  </a:tcPr>
-                </a:tc>
-                <a:tc>
-                  <a:txBody>
-                    <a:bodyPr/>
-                    <a:lstStyle/>
-                    <a:p>
-                      <a:pPr indent="0" marL="0">
-                        <a:buNone/>
-                      </a:pPr>
-                      <a:r>
-                        <a:rPr lang="en-US" sz="1500" dirty="0">
-                          <a:solidFill>
-                            <a:schemeClr val="tx1"/>
-                          </a:solidFill>
-                        </a:rPr>
-                        <a:t>2 moteurs avant basculants + 1 moteur arrière</a:t>
-                      </a:r>
-                      <a:endParaRPr lang="en-US" sz="1500" dirty="0"/>
-                    </a:p>
-                  </a:txBody>
-                  <a:tcPr marL="109728" marR="109728" marT="36576" marB="36576" anchor="ctr">
-                    <a:lnL w="0" cap="flat" cmpd="sng" algn="ctr">
-                      <a:noFill/>
-                    </a:lnL>
-                    <a:lnR w="0" cap="flat" cmpd="sng" algn="ctr">
-                      <a:noFill/>
-                    </a:lnR>
-                    <a:lnT w="0" cap="flat" cmpd="sng" algn="ctr">
-                      <a:noFill/>
-                    </a:lnT>
-                    <a:lnB w="9525" cap="flat" cmpd="sng" algn="ctr">
-                      <a:solidFill>
-                        <a:srgbClr val="D3D9DE"/>
-                      </a:solidFill>
-                      <a:prstDash val="solid"/>
-                      <a:round/>
-                      <a:headEnd type="none" w="med" len="med"/>
-                      <a:tailEnd type="none" w="med" len="med"/>
-                    </a:lnB>
-                  </a:tcPr>
-                </a:tc>
-              </a:tr>
-              <a:tr h="457200">
-                <a:tc>
-                  <a:txBody>
-                    <a:bodyPr/>
-                    <a:lstStyle/>
-                    <a:p>
-                      <a:pPr indent="0" marL="0">
-                        <a:buNone/>
-                      </a:pPr>
-                      <a:r>
-                        <a:rPr lang="en-US" sz="1500" b="1" dirty="0">
-                          <a:solidFill>
-                            <a:schemeClr val="tx1"/>
-                          </a:solidFill>
-                        </a:rPr>
-                        <a:t>Empennage</a:t>
-                      </a:r>
-                      <a:endParaRPr lang="en-US" sz="1500" dirty="0"/>
-                    </a:p>
-                  </a:txBody>
-                  <a:tcPr marL="109728" marR="109728" marT="36576" marB="36576" anchor="ctr">
-                    <a:lnL w="0" cap="flat" cmpd="sng" algn="ctr">
-                      <a:noFill/>
-                    </a:lnL>
-                    <a:lnR w="0" cap="flat" cmpd="sng" algn="ctr">
-                      <a:noFill/>
-                    </a:lnR>
-                    <a:lnT w="0" cap="flat" cmpd="sng" algn="ctr">
-                      <a:noFill/>
-                    </a:lnT>
-                    <a:lnB w="9525" cap="flat" cmpd="sng" algn="ctr">
-                      <a:solidFill>
-                        <a:srgbClr val="D3D9DE"/>
-                      </a:solidFill>
-                      <a:prstDash val="solid"/>
-                      <a:round/>
-                      <a:headEnd type="none" w="med" len="med"/>
-                      <a:tailEnd type="none" w="med" len="med"/>
-                    </a:lnB>
-                  </a:tcPr>
-                </a:tc>
-                <a:tc>
-                  <a:txBody>
-                    <a:bodyPr/>
-                    <a:lstStyle/>
-                    <a:p>
-                      <a:pPr indent="0" marL="0">
-                        <a:buNone/>
-                      </a:pPr>
-                      <a:r>
-                        <a:rPr lang="en-US" sz="1500" dirty="0">
-                          <a:solidFill>
-                            <a:schemeClr val="tx1"/>
-                          </a:solidFill>
-                        </a:rPr>
-                        <a:t>En V</a:t>
-                      </a:r>
-                      <a:endParaRPr lang="en-US" sz="1500" dirty="0"/>
-                    </a:p>
-                  </a:txBody>
-                  <a:tcPr marL="109728" marR="109728" marT="36576" marB="36576" anchor="ctr">
-                    <a:lnL w="0" cap="flat" cmpd="sng" algn="ctr">
-                      <a:noFill/>
-                    </a:lnL>
-                    <a:lnR w="0" cap="flat" cmpd="sng" algn="ctr">
-                      <a:noFill/>
-                    </a:lnR>
-                    <a:lnT w="0" cap="flat" cmpd="sng" algn="ctr">
-                      <a:noFill/>
-                    </a:lnT>
-                    <a:lnB w="9525" cap="flat" cmpd="sng" algn="ctr">
-                      <a:solidFill>
-                        <a:srgbClr val="D3D9DE"/>
-                      </a:solidFill>
-                      <a:prstDash val="solid"/>
-                      <a:round/>
-                      <a:headEnd type="none" w="med" len="med"/>
-                      <a:tailEnd type="none" w="med" len="med"/>
-                    </a:lnB>
-                  </a:tcPr>
-                </a:tc>
-              </a:tr>
-              <a:tr h="457200">
-                <a:tc>
-                  <a:txBody>
-                    <a:bodyPr/>
-                    <a:lstStyle/>
-                    <a:p>
-                      <a:pPr indent="0" marL="0">
-                        <a:buNone/>
-                      </a:pPr>
-                      <a:r>
-                        <a:rPr lang="en-US" sz="1500" b="1" dirty="0">
-                          <a:solidFill>
-                            <a:schemeClr val="tx1"/>
-                          </a:solidFill>
-                        </a:rPr>
-                        <a:t>Autonomie visée</a:t>
-                      </a:r>
-                      <a:endParaRPr lang="en-US" sz="1500" dirty="0"/>
-                    </a:p>
-                  </a:txBody>
-                  <a:tcPr marL="109728" marR="109728" marT="36576" marB="36576" anchor="ctr">
-                    <a:lnL w="0" cap="flat" cmpd="sng" algn="ctr">
-                      <a:noFill/>
-                    </a:lnL>
-                    <a:lnR w="0" cap="flat" cmpd="sng" algn="ctr">
-                      <a:noFill/>
-                    </a:lnR>
-                    <a:lnT w="0" cap="flat" cmpd="sng" algn="ctr">
-                      <a:noFill/>
-                    </a:lnT>
-                    <a:lnB w="9525" cap="flat" cmpd="sng" algn="ctr">
-                      <a:solidFill>
-                        <a:srgbClr val="D3D9DE"/>
-                      </a:solidFill>
-                      <a:prstDash val="solid"/>
-                      <a:round/>
-                      <a:headEnd type="none" w="med" len="med"/>
-                      <a:tailEnd type="none" w="med" len="med"/>
-                    </a:lnB>
-                  </a:tcPr>
-                </a:tc>
-                <a:tc>
-                  <a:txBody>
-                    <a:bodyPr/>
-                    <a:lstStyle/>
-                    <a:p>
-                      <a:pPr indent="0" marL="0">
-                        <a:buNone/>
-                      </a:pPr>
-                      <a:r>
-                        <a:rPr lang="en-US" sz="1500" dirty="0">
-                          <a:solidFill>
-                            <a:schemeClr val="tx1"/>
-                          </a:solidFill>
-                        </a:rPr>
-                        <a:t>30 à 45 minutes</a:t>
-                      </a:r>
-                      <a:endParaRPr lang="en-US" sz="1500" dirty="0"/>
-                    </a:p>
-                  </a:txBody>
-                  <a:tcPr marL="109728" marR="109728" marT="36576" marB="36576" anchor="ctr">
-                    <a:lnL w="0" cap="flat" cmpd="sng" algn="ctr">
-                      <a:noFill/>
-                    </a:lnL>
-                    <a:lnR w="0" cap="flat" cmpd="sng" algn="ctr">
-                      <a:noFill/>
-                    </a:lnR>
-                    <a:lnT w="0" cap="flat" cmpd="sng" algn="ctr">
-                      <a:noFill/>
-                    </a:lnT>
-                    <a:lnB w="9525" cap="flat" cmpd="sng" algn="ctr">
-                      <a:solidFill>
-                        <a:srgbClr val="D3D9DE"/>
-                      </a:solidFill>
-                      <a:prstDash val="solid"/>
-                      <a:round/>
-                      <a:headEnd type="none" w="med" len="med"/>
-                      <a:tailEnd type="none" w="med" len="med"/>
-                    </a:lnB>
-                  </a:tcPr>
-                </a:tc>
-              </a:tr>
-              <a:tr h="457200">
-                <a:tc>
-                  <a:txBody>
-                    <a:bodyPr/>
-                    <a:lstStyle/>
-                    <a:p>
-                      <a:pPr indent="0" marL="0">
-                        <a:buNone/>
-                      </a:pPr>
-                      <a:r>
-                        <a:rPr lang="en-US" sz="1500" b="1" dirty="0">
-                          <a:solidFill>
-                            <a:schemeClr val="tx1"/>
-                          </a:solidFill>
-                        </a:rPr>
-                        <a:t>Contrôleur de vol</a:t>
-                      </a:r>
-                      <a:endParaRPr lang="en-US" sz="1500" dirty="0"/>
-                    </a:p>
-                  </a:txBody>
-                  <a:tcPr marL="109728" marR="109728" marT="36576" marB="36576" anchor="ctr">
-                    <a:lnL w="0" cap="flat" cmpd="sng" algn="ctr">
-                      <a:noFill/>
-                    </a:lnL>
-                    <a:lnR w="0" cap="flat" cmpd="sng" algn="ctr">
-                      <a:noFill/>
-                    </a:lnR>
-                    <a:lnT w="0" cap="flat" cmpd="sng" algn="ctr">
-                      <a:noFill/>
-                    </a:lnT>
-                    <a:lnB w="9525" cap="flat" cmpd="sng" algn="ctr">
-                      <a:solidFill>
-                        <a:srgbClr val="D3D9DE"/>
-                      </a:solidFill>
-                      <a:prstDash val="solid"/>
-                      <a:round/>
-                      <a:headEnd type="none" w="med" len="med"/>
-                      <a:tailEnd type="none" w="med" len="med"/>
-                    </a:lnB>
-                  </a:tcPr>
-                </a:tc>
-                <a:tc>
-                  <a:txBody>
-                    <a:bodyPr/>
-                    <a:lstStyle/>
-                    <a:p>
-                      <a:pPr indent="0" marL="0">
-                        <a:buNone/>
-                      </a:pPr>
-                      <a:r>
-                        <a:rPr lang="en-US" sz="1500" dirty="0">
-                          <a:solidFill>
-                            <a:schemeClr val="tx1"/>
-                          </a:solidFill>
-                        </a:rPr>
-                        <a:t>STM32H743 sous ArduPilot</a:t>
-                      </a:r>
-                      <a:endParaRPr lang="en-US" sz="1500" dirty="0"/>
-                    </a:p>
-                  </a:txBody>
-                  <a:tcPr marL="109728" marR="109728" marT="36576" marB="36576" anchor="ctr">
-                    <a:lnL w="0" cap="flat" cmpd="sng" algn="ctr">
-                      <a:noFill/>
-                    </a:lnL>
-                    <a:lnR w="0" cap="flat" cmpd="sng" algn="ctr">
-                      <a:noFill/>
-                    </a:lnR>
-                    <a:lnT w="0" cap="flat" cmpd="sng" algn="ctr">
-                      <a:noFill/>
-                    </a:lnT>
-                    <a:lnB w="9525" cap="flat" cmpd="sng" algn="ctr">
-                      <a:solidFill>
-                        <a:srgbClr val="D3D9DE"/>
-                      </a:solidFill>
-                      <a:prstDash val="solid"/>
-                      <a:round/>
-                      <a:headEnd type="none" w="med" len="med"/>
-                      <a:tailEnd type="none" w="med" len="med"/>
-                    </a:lnB>
-                  </a:tcPr>
-                </a:tc>
-              </a:tr>
-              <a:tr h="457200">
-                <a:tc>
-                  <a:txBody>
-                    <a:bodyPr/>
-                    <a:lstStyle/>
-                    <a:p>
-                      <a:pPr indent="0" marL="0">
-                        <a:buNone/>
-                      </a:pPr>
-                      <a:r>
-                        <a:rPr lang="en-US" sz="1500" b="1" dirty="0">
-                          <a:solidFill>
-                            <a:schemeClr val="tx1"/>
-                          </a:solidFill>
-                        </a:rPr>
-                        <a:t>Module IA</a:t>
-                      </a:r>
-                      <a:endParaRPr lang="en-US" sz="1500" dirty="0"/>
-                    </a:p>
-                  </a:txBody>
-                  <a:tcPr marL="109728" marR="109728" marT="36576" marB="36576" anchor="ctr">
-                    <a:lnL w="0" cap="flat" cmpd="sng" algn="ctr">
-                      <a:noFill/>
-                    </a:lnL>
-                    <a:lnR w="0" cap="flat" cmpd="sng" algn="ctr">
-                      <a:noFill/>
-                    </a:lnR>
-                    <a:lnT w="0" cap="flat" cmpd="sng" algn="ctr">
-                      <a:noFill/>
-                    </a:lnT>
-                    <a:lnB w="9525" cap="flat" cmpd="sng" algn="ctr">
-                      <a:solidFill>
-                        <a:srgbClr val="D3D9DE"/>
-                      </a:solidFill>
-                      <a:prstDash val="solid"/>
-                      <a:round/>
-                      <a:headEnd type="none" w="med" len="med"/>
-                      <a:tailEnd type="none" w="med" len="med"/>
-                    </a:lnB>
-                  </a:tcPr>
-                </a:tc>
-                <a:tc>
-                  <a:txBody>
-                    <a:bodyPr/>
-                    <a:lstStyle/>
-                    <a:p>
-                      <a:pPr indent="0" marL="0">
-                        <a:buNone/>
-                      </a:pPr>
-                      <a:r>
-                        <a:rPr lang="en-US" sz="1500" dirty="0">
-                          <a:solidFill>
-                            <a:schemeClr val="tx1"/>
-                          </a:solidFill>
-                        </a:rPr>
-                        <a:t>Raspberry Pi 5 + AI HAT+ (Hailo-8)</a:t>
-                      </a:r>
-                      <a:endParaRPr lang="en-US" sz="1500" dirty="0"/>
-                    </a:p>
-                  </a:txBody>
-                  <a:tcPr marL="109728" marR="109728" marT="36576" marB="36576" anchor="ctr">
-                    <a:lnL w="0" cap="flat" cmpd="sng" algn="ctr">
-                      <a:noFill/>
-                    </a:lnL>
-                    <a:lnR w="0" cap="flat" cmpd="sng" algn="ctr">
-                      <a:noFill/>
-                    </a:lnR>
-                    <a:lnT w="0" cap="flat" cmpd="sng" algn="ctr">
-                      <a:noFill/>
-                    </a:lnT>
-                    <a:lnB w="9525" cap="flat" cmpd="sng" algn="ctr">
-                      <a:solidFill>
-                        <a:srgbClr val="D3D9DE"/>
-                      </a:solidFill>
-                      <a:prstDash val="solid"/>
-                      <a:round/>
-                      <a:headEnd type="none" w="med" len="med"/>
-                      <a:tailEnd type="none" w="med" len="med"/>
-                    </a:lnB>
-                  </a:tcPr>
-                </a:tc>
-              </a:tr>
-              <a:tr h="457200">
-                <a:tc>
-                  <a:txBody>
-                    <a:bodyPr/>
-                    <a:lstStyle/>
-                    <a:p>
-                      <a:pPr indent="0" marL="0">
-                        <a:buNone/>
-                      </a:pPr>
-                      <a:r>
-                        <a:rPr lang="en-US" sz="1500" b="1" dirty="0">
-                          <a:solidFill>
-                            <a:schemeClr val="tx1"/>
-                          </a:solidFill>
-                        </a:rPr>
-                        <a:t>Charge utile</a:t>
-                      </a:r>
-                      <a:endParaRPr lang="en-US" sz="1500" dirty="0"/>
-                    </a:p>
-                  </a:txBody>
-                  <a:tcPr marL="109728" marR="109728" marT="36576" marB="36576" anchor="ctr">
-                    <a:lnL w="0" cap="flat" cmpd="sng" algn="ctr">
-                      <a:noFill/>
-                    </a:lnL>
-                    <a:lnR w="0" cap="flat" cmpd="sng" algn="ctr">
-                      <a:noFill/>
-                    </a:lnR>
-                    <a:lnT w="0" cap="flat" cmpd="sng" algn="ctr">
-                      <a:noFill/>
-                    </a:lnT>
-                    <a:lnB w="9525" cap="flat" cmpd="sng" algn="ctr">
-                      <a:solidFill>
-                        <a:srgbClr val="D3D9DE"/>
-                      </a:solidFill>
-                      <a:prstDash val="solid"/>
-                      <a:round/>
-                      <a:headEnd type="none" w="med" len="med"/>
-                      <a:tailEnd type="none" w="med" len="med"/>
-                    </a:lnB>
-                  </a:tcPr>
-                </a:tc>
-                <a:tc>
-                  <a:txBody>
-                    <a:bodyPr/>
-                    <a:lstStyle/>
-                    <a:p>
-                      <a:pPr indent="0" marL="0">
-                        <a:buNone/>
-                      </a:pPr>
-                      <a:r>
-                        <a:rPr lang="en-US" sz="1500" dirty="0">
-                          <a:solidFill>
-                            <a:schemeClr val="tx1"/>
-                          </a:solidFill>
-                        </a:rPr>
-                        <a:t>Caméra stabilisée jour/nuit</a:t>
-                      </a:r>
-                      <a:endParaRPr lang="en-US" sz="1500" dirty="0"/>
-                    </a:p>
-                  </a:txBody>
-                  <a:tcPr marL="109728" marR="109728" marT="36576" marB="36576" anchor="ctr">
-                    <a:lnL w="0" cap="flat" cmpd="sng" algn="ctr">
-                      <a:noFill/>
-                    </a:lnL>
-                    <a:lnR w="0" cap="flat" cmpd="sng" algn="ctr">
-                      <a:noFill/>
-                    </a:lnR>
-                    <a:lnT w="0" cap="flat" cmpd="sng" algn="ctr">
-                      <a:noFill/>
-                    </a:lnT>
-                    <a:lnB w="9525" cap="flat" cmpd="sng" algn="ctr">
-                      <a:solidFill>
-                        <a:srgbClr val="D3D9DE"/>
-                      </a:solidFill>
-                      <a:prstDash val="solid"/>
-                      <a:round/>
-                      <a:headEnd type="none" w="med" len="med"/>
-                      <a:tailEnd type="none" w="med" len="med"/>
-                    </a:lnB>
-                  </a:tcPr>
-                </a:tc>
-              </a:tr>
-              <a:tr h="457200">
-                <a:tc>
-                  <a:txBody>
-                    <a:bodyPr/>
-                    <a:lstStyle/>
-                    <a:p>
-                      <a:pPr indent="0" marL="0">
-                        <a:buNone/>
-                      </a:pPr>
-                      <a:r>
-                        <a:rPr lang="en-US" sz="1500" b="1" dirty="0">
-                          <a:solidFill>
-                            <a:schemeClr val="tx1"/>
-                          </a:solidFill>
-                        </a:rPr>
-                        <a:t>Liaisons</a:t>
-                      </a:r>
-                      <a:endParaRPr lang="en-US" sz="1500" dirty="0"/>
-                    </a:p>
-                  </a:txBody>
-                  <a:tcPr marL="109728" marR="109728" marT="36576" marB="36576" anchor="ctr">
-                    <a:lnL w="0" cap="flat" cmpd="sng" algn="ctr">
-                      <a:noFill/>
-                    </a:lnL>
-                    <a:lnR w="0" cap="flat" cmpd="sng" algn="ctr">
-                      <a:noFill/>
-                    </a:lnR>
-                    <a:lnT w="0" cap="flat" cmpd="sng" algn="ctr">
-                      <a:noFill/>
-                    </a:lnT>
-                    <a:lnB w="9525" cap="flat" cmpd="sng" algn="ctr">
-                      <a:solidFill>
-                        <a:srgbClr val="D3D9DE"/>
-                      </a:solidFill>
-                      <a:prstDash val="solid"/>
-                      <a:round/>
-                      <a:headEnd type="none" w="med" len="med"/>
-                      <a:tailEnd type="none" w="med" len="med"/>
-                    </a:lnB>
-                  </a:tcPr>
-                </a:tc>
-                <a:tc>
-                  <a:txBody>
-                    <a:bodyPr/>
-                    <a:lstStyle/>
-                    <a:p>
-                      <a:pPr indent="0" marL="0">
-                        <a:buNone/>
-                      </a:pPr>
-                      <a:r>
-                        <a:rPr lang="en-US" sz="1500" dirty="0">
-                          <a:solidFill>
-                            <a:schemeClr val="tx1"/>
-                          </a:solidFill>
-                        </a:rPr>
-                        <a:t>Vidéo HD, radio chiffrée, canal d'urgence</a:t>
-                      </a:r>
-                      <a:endParaRPr lang="en-US" sz="1500" dirty="0"/>
-                    </a:p>
-                  </a:txBody>
-                  <a:tcPr marL="109728" marR="109728" marT="36576" marB="36576" anchor="ctr">
-                    <a:lnL w="0" cap="flat" cmpd="sng" algn="ctr">
-                      <a:noFill/>
-                    </a:lnL>
-                    <a:lnR w="0" cap="flat" cmpd="sng" algn="ctr">
-                      <a:noFill/>
-                    </a:lnR>
-                    <a:lnT w="0" cap="flat" cmpd="sng" algn="ctr">
-                      <a:noFill/>
-                    </a:lnT>
-                    <a:lnB w="9525" cap="flat" cmpd="sng" algn="ctr">
-                      <a:solidFill>
-                        <a:srgbClr val="D3D9DE"/>
-                      </a:solidFill>
-                      <a:prstDash val="solid"/>
-                      <a:round/>
-                      <a:headEnd type="none" w="med" len="med"/>
-                      <a:tailEnd type="none" w="med" len="med"/>
-                    </a:lnB>
-                  </a:tcPr>
-                </a:tc>
-              </a:tr>
-            </a:tbl>
-          </a:graphicData>
-        </a:graphic>
-      </p:graphicFrame>
-      <p:pic>
-        <p:nvPicPr>
-          <p:cNvPr id="5" name="Image 0" descr="Vue de profil (SolidWorks)">    </p:cNvPr>
-          <p:cNvPicPr>
-            <a:picLocks noChangeAspect="1"/>
-          </p:cNvPicPr>
-          <p:nvPr/>
-        </p:nvPicPr>
-        <p:blipFill>
-          <a:blip r:embed="rId1"/>
-          <a:stretch>
-            <a:fillRect/>
-          </a:stretch>
-        </p:blipFill>
-        <p:spPr>
-          <a:xfrm>
-            <a:off x="7909560" y="2331506"/>
-            <a:ext cx="3687775" cy="1189148"/>
-          </a:xfrm>
-          <a:prstGeom prst="rect">
-            <a:avLst/>
-          </a:prstGeom>
-        </p:spPr>
-      </p:pic>
-      <p:sp>
-        <p:nvSpPr>
-          <p:cNvPr id="6" name="Cadre cao_profil"/>
-          <p:cNvSpPr/>
-          <p:nvPr/>
-        </p:nvSpPr>
-        <p:spPr>
-          <a:xfrm>
-            <a:off x="7909560" y="2331506"/>
-            <a:ext cx="3687775" cy="1189148"/>
-          </a:xfrm>
-          <a:prstGeom prst="rect">
-            <a:avLst/>
-          </a:prstGeom>
-          <a:ln w="9525">
-            <a:solidFill>
-              <a:schemeClr val="accent5"/>
-            </a:solidFill>
-            <a:prstDash val="solid"/>
-          </a:ln>
-        </p:spPr>
-      </p:sp>
-      <p:sp>
-        <p:nvSpPr>
-          <p:cNvPr id="7" name="Text 3"/>
-          <p:cNvSpPr txBox="1"/>
-          <p:nvPr/>
-        </p:nvSpPr>
-        <p:spPr>
-          <a:xfrm>
-            <a:off x="7909560" y="3575518"/>
-            <a:ext cx="3687775" cy="256032"/>
-          </a:xfrm>
-          <a:prstGeom prst="rect">
-            <a:avLst/>
-          </a:prstGeom>
-          <a:noFill/>
-          <a:ln/>
-        </p:spPr>
-        <p:txBody>
-          <a:bodyPr wrap="square" lIns="0" tIns="0" rIns="0" bIns="0" rtlCol="0" anchor="ctr"/>
-          <a:lstStyle/>
-          <a:p>
-            <a:pPr indent="0" marL="0">
-              <a:buNone/>
-            </a:pPr>
-            <a:r>
-              <a:rPr lang="en-US" sz="1100" i="1" dirty="0">
-                <a:solidFill>
-                  <a:schemeClr val="tx2"/>
-                </a:solidFill>
-              </a:rPr>
-              <a:t>Vue de profil (SolidWorks)</a:t>
-            </a:r>
-            <a:endParaRPr lang="en-US" sz="1100" dirty="0"/>
-          </a:p>
-        </p:txBody>
-      </p:sp>
-      <p:sp>
-        <p:nvSpPr>
-          <p:cNvPr id="25" name="Slide Number Placeholder 0"/>
-          <p:cNvSpPr>
-            <a:spLocks noGrp="1"/>
-          </p:cNvSpPr>
-          <p:nvPr>
-            <p:ph type="sldNum" sz="quarter" idx="4294967295"/>
-          </p:nvPr>
-        </p:nvSpPr>
-        <p:spPr>
-          <a:xfrm>
-            <a:off x="11231575" y="6382512"/>
-            <a:ext cx="365760" cy="274320"/>
-          </a:xfrm>
-          <a:prstGeom prst="rect">
-            <a:avLst/>
-          </a:prstGeom>
-          <a:extLst>
-            <a:ext uri="{C572A759-6A51-4108-AA02-DFA0A04FC94B}">
-              <ma14:wrappingTextBoxFlag xmlns:ma14="http://schemas.microsoft.com/office/mac/drawingml/2011/main" val="0"/>
-            </a:ext>
-          </a:extLst>
-        </p:spPr>
-        <p:txBody>
-          <a:bodyPr lIns="0" tIns="0" rIns="0" bIns="0"/>
-          <a:lstStyle>
-            <a:lvl1pPr>
-              <a:defRPr sz="1000">
-                <a:solidFill>
-                  <a:schemeClr val="tx2"/>
-                </a:solidFill>
-              </a:defRPr>
-            </a:lvl1pPr>
-          </a:lstStyle>
-          <a:p>
-            <a:pPr algn="r"/>
-            <a:fld id="{F7021451-1387-4CA6-816F-3879F97B5CBC}" type="slidenum">
-              <a:rPr b="0" lang="en-US"/>
-              <a:t>7</a:t>
-            </a:fld>
-            <a:endParaRPr lang="en-US"/>
-          </a:p>
-        </p:txBody>
-      </p:sp>
-    </p:spTree>
-  </p:cSld>
-  <p:clrMapOvr>
-    <a:masterClrMapping/>
-  </p:clrMapOvr>
-</p:sld>
-</file>
-
-<file path=ppt/slides/slide8.xml><?xml version="1.0" encoding="utf-8"?>
-<p:sld xmlns:a="http://schemas.openxmlformats.org/drawingml/2006/main" xmlns:r="http://schemas.openxmlformats.org/officeDocument/2006/relationships" xmlns:p="http://schemas.openxmlformats.org/presentationml/2006/main">
-  <p:cSld name="Slide 8">
-    <p:spTree>
-      <p:nvGrpSpPr>
-        <p:cNvPr id="1" name=""/>
-        <p:cNvGrpSpPr/>
-        <p:nvPr/>
-      </p:nvGrpSpPr>
-      <p:grpSpPr>
-        <a:xfrm>
-          <a:off x="0" y="0"/>
-          <a:ext cx="0" cy="0"/>
-          <a:chOff x="0" y="0"/>
-          <a:chExt cx="0" cy="0"/>
-        </a:xfrm>
-      </p:grpSpPr>
-      <p:sp>
-        <p:nvSpPr>
-          <p:cNvPr id="2" name="Text 0"/>
-          <p:cNvSpPr/>
-          <p:nvPr>
-            <p:ph idx="100" type="title" hasCustomPrompt="1"/>
-          </p:nvPr>
-        </p:nvSpPr>
-        <p:spPr>
-          <a:xfrm>
-            <a:off x="594360" y="411480"/>
-            <a:ext cx="11002975" cy="685800"/>
-          </a:xfrm>
-          <a:prstGeom prst="rect">
-            <a:avLst/>
-          </a:prstGeom>
-          <a:noFill/>
-          <a:ln/>
-        </p:spPr>
-        <p:txBody>
-          <a:bodyPr wrap="square" lIns="0" tIns="0" rIns="0" bIns="0" rtlCol="0" anchor="ctr"/>
-          <a:lstStyle/>
-          <a:p>
-            <a:pPr algn="l" indent="0" marL="0">
-              <a:buNone/>
-            </a:pPr>
-            <a:r>
-              <a:rPr lang="en-US" sz="3000" b="1" dirty="0">
-                <a:solidFill>
-                  <a:schemeClr val="tx1"/>
-                </a:solidFill>
-              </a:rPr>
-              <a:t>Le vol : du décollage vertical à la croisière</a:t>
-            </a:r>
-            <a:endParaRPr lang="en-US" sz="3000" dirty="0"/>
-          </a:p>
-        </p:txBody>
-      </p:sp>
-      <p:sp>
-        <p:nvSpPr>
-          <p:cNvPr id="3" name="Text 1"/>
-          <p:cNvSpPr txBox="1"/>
-          <p:nvPr/>
-        </p:nvSpPr>
-        <p:spPr>
-          <a:xfrm>
-            <a:off x="7025335" y="6382512"/>
-            <a:ext cx="4069080" cy="274320"/>
-          </a:xfrm>
-          <a:prstGeom prst="rect">
-            <a:avLst/>
-          </a:prstGeom>
-          <a:noFill/>
-          <a:ln/>
-        </p:spPr>
-        <p:txBody>
-          <a:bodyPr wrap="square" lIns="0" tIns="0" rIns="0" bIns="0" rtlCol="0" anchor="ctr"/>
-          <a:lstStyle/>
-          <a:p>
-            <a:pPr algn="r" indent="0" marL="0">
-              <a:buNone/>
-            </a:pPr>
-            <a:r>
-              <a:rPr lang="en-US" sz="1000" dirty="0">
-                <a:solidFill>
-                  <a:schemeClr val="tx2"/>
-                </a:solidFill>
-              </a:rPr>
-              <a:t>Angelo LOGO ADANTO</a:t>
-            </a:r>
-            <a:endParaRPr lang="en-US" sz="1000" dirty="0"/>
-          </a:p>
-        </p:txBody>
-      </p:sp>
-      <p:graphicFrame>
-        <p:nvGraphicFramePr>
-          <p:cNvPr id="9" name="Table 0"/>
-          <p:cNvGraphicFramePr>
-            <a:graphicFrameLocks noGrp="1"/>
-          </p:cNvGraphicFramePr>
-          <p:nvPr>
-            <p:extLst>
-              <p:ext uri="{D42A27DB-BD31-4B8C-83A1-F6EECF244321}">
-                <p14:modId xmlns:p14="http://schemas.microsoft.com/office/powerpoint/2010/main" val="1579011935"/>
-              </p:ext>
-            </p:extLst>
-          </p:nvPr>
-        </p:nvGraphicFramePr>
-        <p:xfrm>
-          <a:off x="594360" y="1463040"/>
           <a:ext cx="11002975" cy="914400"/>
         </p:xfrm>
         <a:graphic>
@@ -18390,12 +19118,10 @@
             <a:tbl>
               <a:tblPr/>
               <a:tblGrid>
-                <a:gridCol w="2377440"/>
-                <a:gridCol w="3108960"/>
-                <a:gridCol w="2377440"/>
-                <a:gridCol w="3139135"/>
+                <a:gridCol w="3291840"/>
+                <a:gridCol w="7711135"/>
               </a:tblGrid>
-              <a:tr h="475488">
+              <a:tr h="512064">
                 <a:tc>
                   <a:txBody>
                     <a:bodyPr/>
@@ -18410,7 +19136,7 @@
                             <a:schemeClr val="accent1"/>
                           </a:solidFill>
                         </a:rPr>
-                        <a:t>Phase</a:t>
+                        <a:t>Élément</a:t>
                       </a:r>
                       <a:endParaRPr lang="en-US" sz="1600" dirty="0"/>
                     </a:p>
@@ -18453,93 +19179,7 @@
                             <a:schemeClr val="accent1"/>
                           </a:solidFill>
                         </a:rPr>
-                        <a:t>Moteurs avant</a:t>
-                      </a:r>
-                      <a:endParaRPr lang="en-US" sz="1600" dirty="0"/>
-                    </a:p>
-                  </a:txBody>
-                  <a:tcPr marL="109728" marR="109728" marT="36576" marB="36576" anchor="ctr">
-                    <a:lnL w="0" cap="flat" cmpd="sng" algn="ctr">
-                      <a:noFill/>
-                    </a:lnL>
-                    <a:lnR w="0" cap="flat" cmpd="sng" algn="ctr">
-                      <a:noFill/>
-                    </a:lnR>
-                    <a:lnT w="0" cap="flat" cmpd="sng" algn="ctr">
-                      <a:noFill/>
-                    </a:lnT>
-                    <a:lnB w="9525" cap="flat" cmpd="sng" algn="ctr">
-                      <a:solidFill>
-                        <a:srgbClr val="D3D9DE"/>
-                      </a:solidFill>
-                      <a:prstDash val="solid"/>
-                      <a:round/>
-                      <a:headEnd type="none" w="med" len="med"/>
-                      <a:tailEnd type="none" w="med" len="med"/>
-                    </a:lnB>
-                    <a:solidFill>
-                      <a:schemeClr val="bg2"/>
-                    </a:solidFill>
-                  </a:tcPr>
-                </a:tc>
-                <a:tc>
-                  <a:txBody>
-                    <a:bodyPr/>
-                    <a:lstStyle/>
-                    <a:p>
-                      <a:pPr indent="0" marL="0">
-                        <a:buNone/>
-                      </a:pPr>
-                      <a:r>
-                        <a:rPr lang="en-US" sz="1600" b="1" dirty="0">
-                          <a:solidFill>
-                            <a:schemeClr val="accent1"/>
-                          </a:solidFill>
-                        </a:rPr>
-                        <a:t>Moteur arrière</a:t>
-                      </a:r>
-                      <a:endParaRPr lang="en-US" sz="1600" dirty="0"/>
-                    </a:p>
-                  </a:txBody>
-                  <a:tcPr marL="109728" marR="109728" marT="36576" marB="36576" anchor="ctr">
-                    <a:lnL w="0" cap="flat" cmpd="sng" algn="ctr">
-                      <a:noFill/>
-                    </a:lnL>
-                    <a:lnR w="0" cap="flat" cmpd="sng" algn="ctr">
-                      <a:noFill/>
-                    </a:lnR>
-                    <a:lnT w="0" cap="flat" cmpd="sng" algn="ctr">
-                      <a:noFill/>
-                    </a:lnT>
-                    <a:lnB w="9525" cap="flat" cmpd="sng" algn="ctr">
-                      <a:solidFill>
-                        <a:srgbClr val="D3D9DE"/>
-                      </a:solidFill>
-                      <a:prstDash val="solid"/>
-                      <a:round/>
-                      <a:headEnd type="none" w="med" len="med"/>
-                      <a:tailEnd type="none" w="med" len="med"/>
-                    </a:lnB>
-                    <a:solidFill>
-                      <a:schemeClr val="bg2"/>
-                    </a:solidFill>
-                  </a:tcPr>
-                </a:tc>
-                <a:tc>
-                  <a:txBody>
-                    <a:bodyPr/>
-                    <a:lstStyle/>
-                    <a:p>
-                      <a:pPr indent="0" marL="0">
-                        <a:buNone/>
-                      </a:pPr>
-                      <a:r>
-                        <a:rPr lang="en-US" sz="1600" b="1" dirty="0">
-                          <a:solidFill>
-                            <a:schemeClr val="accent1"/>
-                          </a:solidFill>
-                        </a:rPr>
-                        <a:t>Ce qui porte le drone</a:t>
+                        <a:t>Choix retenu</a:t>
                       </a:r>
                       <a:endParaRPr lang="en-US" sz="1600" dirty="0"/>
                     </a:p>
@@ -18569,7 +19209,7 @@
                   </a:tcPr>
                 </a:tc>
               </a:tr>
-              <a:tr h="475488">
+              <a:tr h="512064">
                 <a:tc>
                   <a:txBody>
                     <a:bodyPr/>
@@ -18584,7 +19224,7 @@
                             <a:schemeClr val="tx1"/>
                           </a:solidFill>
                         </a:rPr>
-                        <a:t>Décollage</a:t>
+                        <a:t>Configuration</a:t>
                       </a:r>
                       <a:endParaRPr lang="en-US" sz="1600" dirty="0"/>
                     </a:p>
@@ -18624,7 +19264,49 @@
                             <a:schemeClr val="tx1"/>
                           </a:solidFill>
                         </a:rPr>
-                        <a:t>Vers le haut</a:t>
+                        <a:t>VTOL à rotors basculants, trois moteurs</a:t>
+                      </a:r>
+                      <a:endParaRPr lang="en-US" sz="1600" dirty="0"/>
+                    </a:p>
+                  </a:txBody>
+                  <a:tcPr marL="109728" marR="109728" marT="36576" marB="36576" anchor="ctr">
+                    <a:lnL w="0" cap="flat" cmpd="sng" algn="ctr">
+                      <a:noFill/>
+                    </a:lnL>
+                    <a:lnR w="0" cap="flat" cmpd="sng" algn="ctr">
+                      <a:noFill/>
+                    </a:lnR>
+                    <a:lnT w="0" cap="flat" cmpd="sng" algn="ctr">
+                      <a:noFill/>
+                    </a:lnT>
+                    <a:lnB w="9525" cap="flat" cmpd="sng" algn="ctr">
+                      <a:solidFill>
+                        <a:srgbClr val="D3D9DE"/>
+                      </a:solidFill>
+                      <a:prstDash val="solid"/>
+                      <a:round/>
+                      <a:headEnd type="none" w="med" len="med"/>
+                      <a:tailEnd type="none" w="med" len="med"/>
+                    </a:lnB>
+                  </a:tcPr>
+                </a:tc>
+              </a:tr>
+              <a:tr h="512064">
+                <a:tc>
+                  <a:txBody>
+                    <a:bodyPr/>
+                    <a:lstStyle/>
+                    <a:p>
+                      <a:pPr indent="0" marL="0">
+                        <a:buNone/>
+                      </a:pPr>
+                      <a:r>
+                        <a:rPr lang="en-US" sz="1600" b="1" dirty="0">
+                          <a:solidFill>
+                            <a:schemeClr val="tx1"/>
+                          </a:solidFill>
+                        </a:rPr>
+                        <a:t>Propulsion</a:t>
                       </a:r>
                       <a:endParaRPr lang="en-US" sz="1600" dirty="0"/>
                     </a:p>
@@ -18664,7 +19346,49 @@
                             <a:schemeClr val="tx1"/>
                           </a:solidFill>
                         </a:rPr>
-                        <a:t>En marche</a:t>
+                        <a:t>2 moteurs avant basculants + 1 moteur arrière</a:t>
+                      </a:r>
+                      <a:endParaRPr lang="en-US" sz="1600" dirty="0"/>
+                    </a:p>
+                  </a:txBody>
+                  <a:tcPr marL="109728" marR="109728" marT="36576" marB="36576" anchor="ctr">
+                    <a:lnL w="0" cap="flat" cmpd="sng" algn="ctr">
+                      <a:noFill/>
+                    </a:lnL>
+                    <a:lnR w="0" cap="flat" cmpd="sng" algn="ctr">
+                      <a:noFill/>
+                    </a:lnR>
+                    <a:lnT w="0" cap="flat" cmpd="sng" algn="ctr">
+                      <a:noFill/>
+                    </a:lnT>
+                    <a:lnB w="9525" cap="flat" cmpd="sng" algn="ctr">
+                      <a:solidFill>
+                        <a:srgbClr val="D3D9DE"/>
+                      </a:solidFill>
+                      <a:prstDash val="solid"/>
+                      <a:round/>
+                      <a:headEnd type="none" w="med" len="med"/>
+                      <a:tailEnd type="none" w="med" len="med"/>
+                    </a:lnB>
+                  </a:tcPr>
+                </a:tc>
+              </a:tr>
+              <a:tr h="512064">
+                <a:tc>
+                  <a:txBody>
+                    <a:bodyPr/>
+                    <a:lstStyle/>
+                    <a:p>
+                      <a:pPr indent="0" marL="0">
+                        <a:buNone/>
+                      </a:pPr>
+                      <a:r>
+                        <a:rPr lang="en-US" sz="1600" b="1" dirty="0">
+                          <a:solidFill>
+                            <a:schemeClr val="tx1"/>
+                          </a:solidFill>
+                        </a:rPr>
+                        <a:t>Empennage</a:t>
                       </a:r>
                       <a:endParaRPr lang="en-US" sz="1600" dirty="0"/>
                     </a:p>
@@ -18704,7 +19428,7 @@
                             <a:schemeClr val="tx1"/>
                           </a:solidFill>
                         </a:rPr>
-                        <a:t>Les trois moteurs</a:t>
+                        <a:t>En V</a:t>
                       </a:r>
                       <a:endParaRPr lang="en-US" sz="1600" dirty="0"/>
                     </a:p>
@@ -18731,7 +19455,7 @@
                   </a:tcPr>
                 </a:tc>
               </a:tr>
-              <a:tr h="475488">
+              <a:tr h="512064">
                 <a:tc>
                   <a:txBody>
                     <a:bodyPr/>
@@ -18746,7 +19470,7 @@
                             <a:schemeClr val="tx1"/>
                           </a:solidFill>
                         </a:rPr>
-                        <a:t>Transition</a:t>
+                        <a:t>Autonomie visée</a:t>
                       </a:r>
                       <a:endParaRPr lang="en-US" sz="1600" dirty="0"/>
                     </a:p>
@@ -18786,7 +19510,49 @@
                             <a:schemeClr val="tx1"/>
                           </a:solidFill>
                         </a:rPr>
-                        <a:t>Basculent progressivement</a:t>
+                        <a:t>30 à 45 minutes</a:t>
+                      </a:r>
+                      <a:endParaRPr lang="en-US" sz="1600" dirty="0"/>
+                    </a:p>
+                  </a:txBody>
+                  <a:tcPr marL="109728" marR="109728" marT="36576" marB="36576" anchor="ctr">
+                    <a:lnL w="0" cap="flat" cmpd="sng" algn="ctr">
+                      <a:noFill/>
+                    </a:lnL>
+                    <a:lnR w="0" cap="flat" cmpd="sng" algn="ctr">
+                      <a:noFill/>
+                    </a:lnR>
+                    <a:lnT w="0" cap="flat" cmpd="sng" algn="ctr">
+                      <a:noFill/>
+                    </a:lnT>
+                    <a:lnB w="9525" cap="flat" cmpd="sng" algn="ctr">
+                      <a:solidFill>
+                        <a:srgbClr val="D3D9DE"/>
+                      </a:solidFill>
+                      <a:prstDash val="solid"/>
+                      <a:round/>
+                      <a:headEnd type="none" w="med" len="med"/>
+                      <a:tailEnd type="none" w="med" len="med"/>
+                    </a:lnB>
+                  </a:tcPr>
+                </a:tc>
+              </a:tr>
+              <a:tr h="512064">
+                <a:tc>
+                  <a:txBody>
+                    <a:bodyPr/>
+                    <a:lstStyle/>
+                    <a:p>
+                      <a:pPr indent="0" marL="0">
+                        <a:buNone/>
+                      </a:pPr>
+                      <a:r>
+                        <a:rPr lang="en-US" sz="1600" b="1" dirty="0">
+                          <a:solidFill>
+                            <a:schemeClr val="tx1"/>
+                          </a:solidFill>
+                        </a:rPr>
+                        <a:t>Contrôleur de vol</a:t>
                       </a:r>
                       <a:endParaRPr lang="en-US" sz="1600" dirty="0"/>
                     </a:p>
@@ -18826,7 +19592,49 @@
                             <a:schemeClr val="tx1"/>
                           </a:solidFill>
                         </a:rPr>
-                        <a:t>En marche</a:t>
+                        <a:t>STM32H743 sous ArduPilot</a:t>
+                      </a:r>
+                      <a:endParaRPr lang="en-US" sz="1600" dirty="0"/>
+                    </a:p>
+                  </a:txBody>
+                  <a:tcPr marL="109728" marR="109728" marT="36576" marB="36576" anchor="ctr">
+                    <a:lnL w="0" cap="flat" cmpd="sng" algn="ctr">
+                      <a:noFill/>
+                    </a:lnL>
+                    <a:lnR w="0" cap="flat" cmpd="sng" algn="ctr">
+                      <a:noFill/>
+                    </a:lnR>
+                    <a:lnT w="0" cap="flat" cmpd="sng" algn="ctr">
+                      <a:noFill/>
+                    </a:lnT>
+                    <a:lnB w="9525" cap="flat" cmpd="sng" algn="ctr">
+                      <a:solidFill>
+                        <a:srgbClr val="D3D9DE"/>
+                      </a:solidFill>
+                      <a:prstDash val="solid"/>
+                      <a:round/>
+                      <a:headEnd type="none" w="med" len="med"/>
+                      <a:tailEnd type="none" w="med" len="med"/>
+                    </a:lnB>
+                  </a:tcPr>
+                </a:tc>
+              </a:tr>
+              <a:tr h="512064">
+                <a:tc>
+                  <a:txBody>
+                    <a:bodyPr/>
+                    <a:lstStyle/>
+                    <a:p>
+                      <a:pPr indent="0" marL="0">
+                        <a:buNone/>
+                      </a:pPr>
+                      <a:r>
+                        <a:rPr lang="en-US" sz="1600" b="1" dirty="0">
+                          <a:solidFill>
+                            <a:schemeClr val="tx1"/>
+                          </a:solidFill>
+                        </a:rPr>
+                        <a:t>Module IA</a:t>
                       </a:r>
                       <a:endParaRPr lang="en-US" sz="1600" dirty="0"/>
                     </a:p>
@@ -18866,7 +19674,7 @@
                             <a:schemeClr val="tx1"/>
                           </a:solidFill>
                         </a:rPr>
-                        <a:t>Les moteurs, puis l'aile</a:t>
+                        <a:t>Raspberry Pi 5 + AI HAT+ (Hailo-8)</a:t>
                       </a:r>
                       <a:endParaRPr lang="en-US" sz="1600" dirty="0"/>
                     </a:p>
@@ -18893,7 +19701,7 @@
                   </a:tcPr>
                 </a:tc>
               </a:tr>
-              <a:tr h="475488">
+              <a:tr h="512064">
                 <a:tc>
                   <a:txBody>
                     <a:bodyPr/>
@@ -18908,7 +19716,7 @@
                             <a:schemeClr val="tx1"/>
                           </a:solidFill>
                         </a:rPr>
-                        <a:t>Croisière</a:t>
+                        <a:t>Charge utile</a:t>
                       </a:r>
                       <a:endParaRPr lang="en-US" sz="1600" dirty="0"/>
                     </a:p>
@@ -18948,7 +19756,49 @@
                             <a:schemeClr val="tx1"/>
                           </a:solidFill>
                         </a:rPr>
-                        <a:t>Vers l'avant, ils tirent</a:t>
+                        <a:t>Caméra stabilisée jour/nuit</a:t>
+                      </a:r>
+                      <a:endParaRPr lang="en-US" sz="1600" dirty="0"/>
+                    </a:p>
+                  </a:txBody>
+                  <a:tcPr marL="109728" marR="109728" marT="36576" marB="36576" anchor="ctr">
+                    <a:lnL w="0" cap="flat" cmpd="sng" algn="ctr">
+                      <a:noFill/>
+                    </a:lnL>
+                    <a:lnR w="0" cap="flat" cmpd="sng" algn="ctr">
+                      <a:noFill/>
+                    </a:lnR>
+                    <a:lnT w="0" cap="flat" cmpd="sng" algn="ctr">
+                      <a:noFill/>
+                    </a:lnT>
+                    <a:lnB w="9525" cap="flat" cmpd="sng" algn="ctr">
+                      <a:solidFill>
+                        <a:srgbClr val="D3D9DE"/>
+                      </a:solidFill>
+                      <a:prstDash val="solid"/>
+                      <a:round/>
+                      <a:headEnd type="none" w="med" len="med"/>
+                      <a:tailEnd type="none" w="med" len="med"/>
+                    </a:lnB>
+                  </a:tcPr>
+                </a:tc>
+              </a:tr>
+              <a:tr h="512064">
+                <a:tc>
+                  <a:txBody>
+                    <a:bodyPr/>
+                    <a:lstStyle/>
+                    <a:p>
+                      <a:pPr indent="0" marL="0">
+                        <a:buNone/>
+                      </a:pPr>
+                      <a:r>
+                        <a:rPr lang="en-US" sz="1600" b="1" dirty="0">
+                          <a:solidFill>
+                            <a:schemeClr val="tx1"/>
+                          </a:solidFill>
+                        </a:rPr>
+                        <a:t>Liaisons</a:t>
                       </a:r>
                       <a:endParaRPr lang="en-US" sz="1600" dirty="0"/>
                     </a:p>
@@ -18988,9 +19838,401 @@
                             <a:schemeClr val="tx1"/>
                           </a:solidFill>
                         </a:rPr>
-                        <a:t>Arrêté</a:t>
+                        <a:t>Vidéo HD, radio chiffrée, canal d'urgence</a:t>
                       </a:r>
                       <a:endParaRPr lang="en-US" sz="1600" dirty="0"/>
+                    </a:p>
+                  </a:txBody>
+                  <a:tcPr marL="109728" marR="109728" marT="36576" marB="36576" anchor="ctr">
+                    <a:lnL w="0" cap="flat" cmpd="sng" algn="ctr">
+                      <a:noFill/>
+                    </a:lnL>
+                    <a:lnR w="0" cap="flat" cmpd="sng" algn="ctr">
+                      <a:noFill/>
+                    </a:lnR>
+                    <a:lnT w="0" cap="flat" cmpd="sng" algn="ctr">
+                      <a:noFill/>
+                    </a:lnT>
+                    <a:lnB w="9525" cap="flat" cmpd="sng" algn="ctr">
+                      <a:solidFill>
+                        <a:srgbClr val="D3D9DE"/>
+                      </a:solidFill>
+                      <a:prstDash val="solid"/>
+                      <a:round/>
+                      <a:headEnd type="none" w="med" len="med"/>
+                      <a:tailEnd type="none" w="med" len="med"/>
+                    </a:lnB>
+                  </a:tcPr>
+                </a:tc>
+              </a:tr>
+            </a:tbl>
+          </a:graphicData>
+        </a:graphic>
+      </p:graphicFrame>
+      <p:sp>
+        <p:nvSpPr>
+          <p:cNvPr id="25" name="Slide Number Placeholder 0"/>
+          <p:cNvSpPr>
+            <a:spLocks noGrp="1"/>
+          </p:cNvSpPr>
+          <p:nvPr>
+            <p:ph type="sldNum" sz="quarter" idx="4294967295"/>
+          </p:nvPr>
+        </p:nvSpPr>
+        <p:spPr>
+          <a:xfrm>
+            <a:off x="11231575" y="6382512"/>
+            <a:ext cx="365760" cy="274320"/>
+          </a:xfrm>
+          <a:prstGeom prst="rect">
+            <a:avLst/>
+          </a:prstGeom>
+          <a:extLst>
+            <a:ext uri="{C572A759-6A51-4108-AA02-DFA0A04FC94B}">
+              <ma14:wrappingTextBoxFlag xmlns:ma14="http://schemas.microsoft.com/office/mac/drawingml/2011/main" val="0"/>
+            </a:ext>
+          </a:extLst>
+        </p:spPr>
+        <p:txBody>
+          <a:bodyPr lIns="0" tIns="0" rIns="0" bIns="0"/>
+          <a:lstStyle>
+            <a:lvl1pPr>
+              <a:defRPr sz="1000">
+                <a:solidFill>
+                  <a:schemeClr val="tx2"/>
+                </a:solidFill>
+              </a:defRPr>
+            </a:lvl1pPr>
+          </a:lstStyle>
+          <a:p>
+            <a:pPr algn="r"/>
+            <a:fld id="{F7021451-1387-4CA6-816F-3879F97B5CBC}" type="slidenum">
+              <a:rPr b="0" lang="en-US"/>
+              <a:t>7</a:t>
+            </a:fld>
+            <a:endParaRPr lang="en-US"/>
+          </a:p>
+        </p:txBody>
+      </p:sp>
+    </p:spTree>
+  </p:cSld>
+  <p:clrMapOvr>
+    <a:masterClrMapping/>
+  </p:clrMapOvr>
+</p:sld>
+</file>
+
+<file path=ppt/slides/slide8.xml><?xml version="1.0" encoding="utf-8"?>
+<p:sld xmlns:a="http://schemas.openxmlformats.org/drawingml/2006/main" xmlns:r="http://schemas.openxmlformats.org/officeDocument/2006/relationships" xmlns:p="http://schemas.openxmlformats.org/presentationml/2006/main">
+  <p:cSld name="Slide 8">
+    <p:spTree>
+      <p:nvGrpSpPr>
+        <p:cNvPr id="1" name=""/>
+        <p:cNvGrpSpPr/>
+        <p:nvPr/>
+      </p:nvGrpSpPr>
+      <p:grpSpPr>
+        <a:xfrm>
+          <a:off x="0" y="0"/>
+          <a:ext cx="0" cy="0"/>
+          <a:chOff x="0" y="0"/>
+          <a:chExt cx="0" cy="0"/>
+        </a:xfrm>
+      </p:grpSpPr>
+      <p:sp>
+        <p:nvSpPr>
+          <p:cNvPr id="2" name="Text 0"/>
+          <p:cNvSpPr/>
+          <p:nvPr>
+            <p:ph idx="100" type="title" hasCustomPrompt="1"/>
+          </p:nvPr>
+        </p:nvSpPr>
+        <p:spPr>
+          <a:xfrm>
+            <a:off x="594360" y="411480"/>
+            <a:ext cx="11002975" cy="685800"/>
+          </a:xfrm>
+          <a:prstGeom prst="rect">
+            <a:avLst/>
+          </a:prstGeom>
+          <a:noFill/>
+          <a:ln/>
+        </p:spPr>
+        <p:txBody>
+          <a:bodyPr wrap="square" lIns="0" tIns="0" rIns="0" bIns="0" rtlCol="0" anchor="ctr"/>
+          <a:lstStyle/>
+          <a:p>
+            <a:pPr algn="l" indent="0" marL="0">
+              <a:buNone/>
+            </a:pPr>
+            <a:r>
+              <a:rPr lang="en-US" sz="3000" b="1" dirty="0">
+                <a:solidFill>
+                  <a:schemeClr val="tx1"/>
+                </a:solidFill>
+              </a:rPr>
+              <a:t>Le vol : du décollage vertical à la croisière</a:t>
+            </a:r>
+            <a:endParaRPr lang="en-US" sz="3000" dirty="0"/>
+          </a:p>
+        </p:txBody>
+      </p:sp>
+      <p:sp>
+        <p:nvSpPr>
+          <p:cNvPr id="3" name="Text 1"/>
+          <p:cNvSpPr txBox="1"/>
+          <p:nvPr/>
+        </p:nvSpPr>
+        <p:spPr>
+          <a:xfrm>
+            <a:off x="7025335" y="6382512"/>
+            <a:ext cx="4069080" cy="274320"/>
+          </a:xfrm>
+          <a:prstGeom prst="rect">
+            <a:avLst/>
+          </a:prstGeom>
+          <a:noFill/>
+          <a:ln/>
+        </p:spPr>
+        <p:txBody>
+          <a:bodyPr wrap="square" lIns="0" tIns="0" rIns="0" bIns="0" rtlCol="0" anchor="ctr"/>
+          <a:lstStyle/>
+          <a:p>
+            <a:pPr algn="r" indent="0" marL="0">
+              <a:buNone/>
+            </a:pPr>
+            <a:r>
+              <a:rPr lang="en-US" sz="1000" dirty="0">
+                <a:solidFill>
+                  <a:schemeClr val="tx2"/>
+                </a:solidFill>
+              </a:rPr>
+              <a:t>Angelo LOGO ADANTO</a:t>
+            </a:r>
+            <a:endParaRPr lang="en-US" sz="1000" dirty="0"/>
+          </a:p>
+        </p:txBody>
+      </p:sp>
+      <p:graphicFrame>
+        <p:nvGraphicFramePr>
+          <p:cNvPr id="9" name="Table 0"/>
+          <p:cNvGraphicFramePr>
+            <a:graphicFrameLocks noGrp="1"/>
+          </p:cNvGraphicFramePr>
+          <p:nvPr>
+            <p:extLst>
+              <p:ext uri="{D42A27DB-BD31-4B8C-83A1-F6EECF244321}">
+                <p14:modId xmlns:p14="http://schemas.microsoft.com/office/powerpoint/2010/main" val="1579011935"/>
+              </p:ext>
+            </p:extLst>
+          </p:nvPr>
+        </p:nvGraphicFramePr>
+        <p:xfrm>
+          <a:off x="594360" y="1463040"/>
+          <a:ext cx="11002975" cy="914400"/>
+        </p:xfrm>
+        <a:graphic>
+          <a:graphicData uri="http://schemas.openxmlformats.org/drawingml/2006/table">
+            <a:tbl>
+              <a:tblPr/>
+              <a:tblGrid>
+                <a:gridCol w="2377440"/>
+                <a:gridCol w="3108960"/>
+                <a:gridCol w="2377440"/>
+                <a:gridCol w="3139135"/>
+              </a:tblGrid>
+              <a:tr h="640080">
+                <a:tc>
+                  <a:txBody>
+                    <a:bodyPr/>
+                    <a:lstStyle/>
+                    <a:p>
+                      <a:pPr indent="0" marL="0">
+                        <a:buNone/>
+                      </a:pPr>
+                      <a:r>
+                        <a:rPr lang="en-US" sz="1700" b="1" dirty="0">
+                          <a:solidFill>
+                            <a:schemeClr val="accent1"/>
+                          </a:solidFill>
+                        </a:rPr>
+                        <a:t>Phase</a:t>
+                      </a:r>
+                      <a:endParaRPr lang="en-US" sz="1700" dirty="0"/>
+                    </a:p>
+                  </a:txBody>
+                  <a:tcPr marL="109728" marR="109728" marT="36576" marB="36576" anchor="ctr">
+                    <a:lnL w="0" cap="flat" cmpd="sng" algn="ctr">
+                      <a:noFill/>
+                    </a:lnL>
+                    <a:lnR w="0" cap="flat" cmpd="sng" algn="ctr">
+                      <a:noFill/>
+                    </a:lnR>
+                    <a:lnT w="0" cap="flat" cmpd="sng" algn="ctr">
+                      <a:noFill/>
+                    </a:lnT>
+                    <a:lnB w="9525" cap="flat" cmpd="sng" algn="ctr">
+                      <a:solidFill>
+                        <a:srgbClr val="D3D9DE"/>
+                      </a:solidFill>
+                      <a:prstDash val="solid"/>
+                      <a:round/>
+                      <a:headEnd type="none" w="med" len="med"/>
+                      <a:tailEnd type="none" w="med" len="med"/>
+                    </a:lnB>
+                    <a:solidFill>
+                      <a:schemeClr val="bg2"/>
+                    </a:solidFill>
+                  </a:tcPr>
+                </a:tc>
+                <a:tc>
+                  <a:txBody>
+                    <a:bodyPr/>
+                    <a:lstStyle/>
+                    <a:p>
+                      <a:pPr indent="0" marL="0">
+                        <a:buNone/>
+                      </a:pPr>
+                      <a:r>
+                        <a:rPr lang="en-US" sz="1700" b="1" dirty="0">
+                          <a:solidFill>
+                            <a:schemeClr val="accent1"/>
+                          </a:solidFill>
+                        </a:rPr>
+                        <a:t>Moteurs avant</a:t>
+                      </a:r>
+                      <a:endParaRPr lang="en-US" sz="1700" dirty="0"/>
+                    </a:p>
+                  </a:txBody>
+                  <a:tcPr marL="109728" marR="109728" marT="36576" marB="36576" anchor="ctr">
+                    <a:lnL w="0" cap="flat" cmpd="sng" algn="ctr">
+                      <a:noFill/>
+                    </a:lnL>
+                    <a:lnR w="0" cap="flat" cmpd="sng" algn="ctr">
+                      <a:noFill/>
+                    </a:lnR>
+                    <a:lnT w="0" cap="flat" cmpd="sng" algn="ctr">
+                      <a:noFill/>
+                    </a:lnT>
+                    <a:lnB w="9525" cap="flat" cmpd="sng" algn="ctr">
+                      <a:solidFill>
+                        <a:srgbClr val="D3D9DE"/>
+                      </a:solidFill>
+                      <a:prstDash val="solid"/>
+                      <a:round/>
+                      <a:headEnd type="none" w="med" len="med"/>
+                      <a:tailEnd type="none" w="med" len="med"/>
+                    </a:lnB>
+                    <a:solidFill>
+                      <a:schemeClr val="bg2"/>
+                    </a:solidFill>
+                  </a:tcPr>
+                </a:tc>
+                <a:tc>
+                  <a:txBody>
+                    <a:bodyPr/>
+                    <a:lstStyle/>
+                    <a:p>
+                      <a:pPr indent="0" marL="0">
+                        <a:buNone/>
+                      </a:pPr>
+                      <a:r>
+                        <a:rPr lang="en-US" sz="1700" b="1" dirty="0">
+                          <a:solidFill>
+                            <a:schemeClr val="accent1"/>
+                          </a:solidFill>
+                        </a:rPr>
+                        <a:t>Moteur arrière</a:t>
+                      </a:r>
+                      <a:endParaRPr lang="en-US" sz="1700" dirty="0"/>
+                    </a:p>
+                  </a:txBody>
+                  <a:tcPr marL="109728" marR="109728" marT="36576" marB="36576" anchor="ctr">
+                    <a:lnL w="0" cap="flat" cmpd="sng" algn="ctr">
+                      <a:noFill/>
+                    </a:lnL>
+                    <a:lnR w="0" cap="flat" cmpd="sng" algn="ctr">
+                      <a:noFill/>
+                    </a:lnR>
+                    <a:lnT w="0" cap="flat" cmpd="sng" algn="ctr">
+                      <a:noFill/>
+                    </a:lnT>
+                    <a:lnB w="9525" cap="flat" cmpd="sng" algn="ctr">
+                      <a:solidFill>
+                        <a:srgbClr val="D3D9DE"/>
+                      </a:solidFill>
+                      <a:prstDash val="solid"/>
+                      <a:round/>
+                      <a:headEnd type="none" w="med" len="med"/>
+                      <a:tailEnd type="none" w="med" len="med"/>
+                    </a:lnB>
+                    <a:solidFill>
+                      <a:schemeClr val="bg2"/>
+                    </a:solidFill>
+                  </a:tcPr>
+                </a:tc>
+                <a:tc>
+                  <a:txBody>
+                    <a:bodyPr/>
+                    <a:lstStyle/>
+                    <a:p>
+                      <a:pPr indent="0" marL="0">
+                        <a:buNone/>
+                      </a:pPr>
+                      <a:r>
+                        <a:rPr lang="en-US" sz="1700" b="1" dirty="0">
+                          <a:solidFill>
+                            <a:schemeClr val="accent1"/>
+                          </a:solidFill>
+                        </a:rPr>
+                        <a:t>Ce qui porte le drone</a:t>
+                      </a:r>
+                      <a:endParaRPr lang="en-US" sz="1700" dirty="0"/>
+                    </a:p>
+                  </a:txBody>
+                  <a:tcPr marL="109728" marR="109728" marT="36576" marB="36576" anchor="ctr">
+                    <a:lnL w="0" cap="flat" cmpd="sng" algn="ctr">
+                      <a:noFill/>
+                    </a:lnL>
+                    <a:lnR w="0" cap="flat" cmpd="sng" algn="ctr">
+                      <a:noFill/>
+                    </a:lnR>
+                    <a:lnT w="0" cap="flat" cmpd="sng" algn="ctr">
+                      <a:noFill/>
+                    </a:lnT>
+                    <a:lnB w="9525" cap="flat" cmpd="sng" algn="ctr">
+                      <a:solidFill>
+                        <a:srgbClr val="D3D9DE"/>
+                      </a:solidFill>
+                      <a:prstDash val="solid"/>
+                      <a:round/>
+                      <a:headEnd type="none" w="med" len="med"/>
+                      <a:tailEnd type="none" w="med" len="med"/>
+                    </a:lnB>
+                    <a:solidFill>
+                      <a:schemeClr val="bg2"/>
+                    </a:solidFill>
+                  </a:tcPr>
+                </a:tc>
+              </a:tr>
+              <a:tr h="640080">
+                <a:tc>
+                  <a:txBody>
+                    <a:bodyPr/>
+                    <a:lstStyle/>
+                    <a:p>
+                      <a:pPr indent="0" marL="0">
+                        <a:buNone/>
+                      </a:pPr>
+                      <a:r>
+                        <a:rPr lang="en-US" sz="1700" b="1" dirty="0">
+                          <a:solidFill>
+                            <a:schemeClr val="tx1"/>
+                          </a:solidFill>
+                        </a:rPr>
+                        <a:t>Décollage</a:t>
+                      </a:r>
+                      <a:endParaRPr lang="en-US" sz="1700" dirty="0"/>
                     </a:p>
                   </a:txBody>
                   <a:tcPr marL="109728" marR="109728" marT="36576" marB="36576" anchor="ctr">
@@ -19023,56 +20265,14 @@
                         <a:buNone/>
                       </a:pPr>
                       <a:r>
-                        <a:rPr lang="en-US" sz="1600" dirty="0">
+                        <a:rPr lang="en-US" sz="1700" dirty="0">
                           <a:solidFill>
                             <a:schemeClr val="tx1"/>
                           </a:solidFill>
                         </a:rPr>
-                        <a:t>L'aile</a:t>
+                        <a:t>Vers le haut</a:t>
                       </a:r>
-                      <a:endParaRPr lang="en-US" sz="1600" dirty="0"/>
-                    </a:p>
-                  </a:txBody>
-                  <a:tcPr marL="109728" marR="109728" marT="36576" marB="36576" anchor="ctr">
-                    <a:lnL w="0" cap="flat" cmpd="sng" algn="ctr">
-                      <a:noFill/>
-                    </a:lnL>
-                    <a:lnR w="0" cap="flat" cmpd="sng" algn="ctr">
-                      <a:noFill/>
-                    </a:lnR>
-                    <a:lnT w="0" cap="flat" cmpd="sng" algn="ctr">
-                      <a:noFill/>
-                    </a:lnT>
-                    <a:lnB w="9525" cap="flat" cmpd="sng" algn="ctr">
-                      <a:solidFill>
-                        <a:srgbClr val="D3D9DE"/>
-                      </a:solidFill>
-                      <a:prstDash val="solid"/>
-                      <a:round/>
-                      <a:headEnd type="none" w="med" len="med"/>
-                      <a:tailEnd type="none" w="med" len="med"/>
-                    </a:lnB>
-                  </a:tcPr>
-                </a:tc>
-              </a:tr>
-              <a:tr h="475488">
-                <a:tc>
-                  <a:txBody>
-                    <a:bodyPr/>
-                    <a:lstStyle/>
-                    <a:p>
-                      <a:pPr indent="0" marL="0">
-                        <a:buNone/>
-                      </a:pPr>
-                      <a:r>
-                        <a:rPr lang="en-US" sz="1600" b="1" dirty="0">
-                          <a:solidFill>
-                            <a:schemeClr val="tx1"/>
-                          </a:solidFill>
-                        </a:rPr>
-                        <a:t>Atterrissage</a:t>
-                      </a:r>
-                      <a:endParaRPr lang="en-US" sz="1600" dirty="0"/>
+                      <a:endParaRPr lang="en-US" sz="1700" dirty="0"/>
                     </a:p>
                   </a:txBody>
                   <a:tcPr marL="109728" marR="109728" marT="36576" marB="36576" anchor="ctr">
@@ -19105,14 +20305,14 @@
                         <a:buNone/>
                       </a:pPr>
                       <a:r>
-                        <a:rPr lang="en-US" sz="1600" dirty="0">
+                        <a:rPr lang="en-US" sz="1700" dirty="0">
                           <a:solidFill>
                             <a:schemeClr val="tx1"/>
                           </a:solidFill>
                         </a:rPr>
-                        <a:t>Reviennent vers le haut</a:t>
+                        <a:t>En marche</a:t>
                       </a:r>
-                      <a:endParaRPr lang="en-US" sz="1600" dirty="0"/>
+                      <a:endParaRPr lang="en-US" sz="1700" dirty="0"/>
                     </a:p>
                   </a:txBody>
                   <a:tcPr marL="109728" marR="109728" marT="36576" marB="36576" anchor="ctr">
@@ -19145,14 +20345,56 @@
                         <a:buNone/>
                       </a:pPr>
                       <a:r>
-                        <a:rPr lang="en-US" sz="1600" dirty="0">
+                        <a:rPr lang="en-US" sz="1700" dirty="0">
                           <a:solidFill>
                             <a:schemeClr val="tx1"/>
                           </a:solidFill>
                         </a:rPr>
-                        <a:t>En marche</a:t>
+                        <a:t>Les trois moteurs</a:t>
                       </a:r>
-                      <a:endParaRPr lang="en-US" sz="1600" dirty="0"/>
+                      <a:endParaRPr lang="en-US" sz="1700" dirty="0"/>
+                    </a:p>
+                  </a:txBody>
+                  <a:tcPr marL="109728" marR="109728" marT="36576" marB="36576" anchor="ctr">
+                    <a:lnL w="0" cap="flat" cmpd="sng" algn="ctr">
+                      <a:noFill/>
+                    </a:lnL>
+                    <a:lnR w="0" cap="flat" cmpd="sng" algn="ctr">
+                      <a:noFill/>
+                    </a:lnR>
+                    <a:lnT w="0" cap="flat" cmpd="sng" algn="ctr">
+                      <a:noFill/>
+                    </a:lnT>
+                    <a:lnB w="9525" cap="flat" cmpd="sng" algn="ctr">
+                      <a:solidFill>
+                        <a:srgbClr val="D3D9DE"/>
+                      </a:solidFill>
+                      <a:prstDash val="solid"/>
+                      <a:round/>
+                      <a:headEnd type="none" w="med" len="med"/>
+                      <a:tailEnd type="none" w="med" len="med"/>
+                    </a:lnB>
+                  </a:tcPr>
+                </a:tc>
+              </a:tr>
+              <a:tr h="640080">
+                <a:tc>
+                  <a:txBody>
+                    <a:bodyPr/>
+                    <a:lstStyle/>
+                    <a:p>
+                      <a:pPr indent="0" marL="0">
+                        <a:buNone/>
+                      </a:pPr>
+                      <a:r>
+                        <a:rPr lang="en-US" sz="1700" b="1" dirty="0">
+                          <a:solidFill>
+                            <a:schemeClr val="tx1"/>
+                          </a:solidFill>
+                        </a:rPr>
+                        <a:t>Transition</a:t>
+                      </a:r>
+                      <a:endParaRPr lang="en-US" sz="1700" dirty="0"/>
                     </a:p>
                   </a:txBody>
                   <a:tcPr marL="109728" marR="109728" marT="36576" marB="36576" anchor="ctr">
@@ -19185,14 +20427,418 @@
                         <a:buNone/>
                       </a:pPr>
                       <a:r>
-                        <a:rPr lang="en-US" sz="1600" dirty="0">
+                        <a:rPr lang="en-US" sz="1700" dirty="0">
+                          <a:solidFill>
+                            <a:schemeClr val="tx1"/>
+                          </a:solidFill>
+                        </a:rPr>
+                        <a:t>Basculent progressivement</a:t>
+                      </a:r>
+                      <a:endParaRPr lang="en-US" sz="1700" dirty="0"/>
+                    </a:p>
+                  </a:txBody>
+                  <a:tcPr marL="109728" marR="109728" marT="36576" marB="36576" anchor="ctr">
+                    <a:lnL w="0" cap="flat" cmpd="sng" algn="ctr">
+                      <a:noFill/>
+                    </a:lnL>
+                    <a:lnR w="0" cap="flat" cmpd="sng" algn="ctr">
+                      <a:noFill/>
+                    </a:lnR>
+                    <a:lnT w="0" cap="flat" cmpd="sng" algn="ctr">
+                      <a:noFill/>
+                    </a:lnT>
+                    <a:lnB w="9525" cap="flat" cmpd="sng" algn="ctr">
+                      <a:solidFill>
+                        <a:srgbClr val="D3D9DE"/>
+                      </a:solidFill>
+                      <a:prstDash val="solid"/>
+                      <a:round/>
+                      <a:headEnd type="none" w="med" len="med"/>
+                      <a:tailEnd type="none" w="med" len="med"/>
+                    </a:lnB>
+                  </a:tcPr>
+                </a:tc>
+                <a:tc>
+                  <a:txBody>
+                    <a:bodyPr/>
+                    <a:lstStyle/>
+                    <a:p>
+                      <a:pPr indent="0" marL="0">
+                        <a:buNone/>
+                      </a:pPr>
+                      <a:r>
+                        <a:rPr lang="en-US" sz="1700" dirty="0">
+                          <a:solidFill>
+                            <a:schemeClr val="tx1"/>
+                          </a:solidFill>
+                        </a:rPr>
+                        <a:t>En marche</a:t>
+                      </a:r>
+                      <a:endParaRPr lang="en-US" sz="1700" dirty="0"/>
+                    </a:p>
+                  </a:txBody>
+                  <a:tcPr marL="109728" marR="109728" marT="36576" marB="36576" anchor="ctr">
+                    <a:lnL w="0" cap="flat" cmpd="sng" algn="ctr">
+                      <a:noFill/>
+                    </a:lnL>
+                    <a:lnR w="0" cap="flat" cmpd="sng" algn="ctr">
+                      <a:noFill/>
+                    </a:lnR>
+                    <a:lnT w="0" cap="flat" cmpd="sng" algn="ctr">
+                      <a:noFill/>
+                    </a:lnT>
+                    <a:lnB w="9525" cap="flat" cmpd="sng" algn="ctr">
+                      <a:solidFill>
+                        <a:srgbClr val="D3D9DE"/>
+                      </a:solidFill>
+                      <a:prstDash val="solid"/>
+                      <a:round/>
+                      <a:headEnd type="none" w="med" len="med"/>
+                      <a:tailEnd type="none" w="med" len="med"/>
+                    </a:lnB>
+                  </a:tcPr>
+                </a:tc>
+                <a:tc>
+                  <a:txBody>
+                    <a:bodyPr/>
+                    <a:lstStyle/>
+                    <a:p>
+                      <a:pPr indent="0" marL="0">
+                        <a:buNone/>
+                      </a:pPr>
+                      <a:r>
+                        <a:rPr lang="en-US" sz="1700" dirty="0">
+                          <a:solidFill>
+                            <a:schemeClr val="tx1"/>
+                          </a:solidFill>
+                        </a:rPr>
+                        <a:t>Les moteurs, puis l'aile</a:t>
+                      </a:r>
+                      <a:endParaRPr lang="en-US" sz="1700" dirty="0"/>
+                    </a:p>
+                  </a:txBody>
+                  <a:tcPr marL="109728" marR="109728" marT="36576" marB="36576" anchor="ctr">
+                    <a:lnL w="0" cap="flat" cmpd="sng" algn="ctr">
+                      <a:noFill/>
+                    </a:lnL>
+                    <a:lnR w="0" cap="flat" cmpd="sng" algn="ctr">
+                      <a:noFill/>
+                    </a:lnR>
+                    <a:lnT w="0" cap="flat" cmpd="sng" algn="ctr">
+                      <a:noFill/>
+                    </a:lnT>
+                    <a:lnB w="9525" cap="flat" cmpd="sng" algn="ctr">
+                      <a:solidFill>
+                        <a:srgbClr val="D3D9DE"/>
+                      </a:solidFill>
+                      <a:prstDash val="solid"/>
+                      <a:round/>
+                      <a:headEnd type="none" w="med" len="med"/>
+                      <a:tailEnd type="none" w="med" len="med"/>
+                    </a:lnB>
+                  </a:tcPr>
+                </a:tc>
+              </a:tr>
+              <a:tr h="640080">
+                <a:tc>
+                  <a:txBody>
+                    <a:bodyPr/>
+                    <a:lstStyle/>
+                    <a:p>
+                      <a:pPr indent="0" marL="0">
+                        <a:buNone/>
+                      </a:pPr>
+                      <a:r>
+                        <a:rPr lang="en-US" sz="1700" b="1" dirty="0">
+                          <a:solidFill>
+                            <a:schemeClr val="tx1"/>
+                          </a:solidFill>
+                        </a:rPr>
+                        <a:t>Croisière</a:t>
+                      </a:r>
+                      <a:endParaRPr lang="en-US" sz="1700" dirty="0"/>
+                    </a:p>
+                  </a:txBody>
+                  <a:tcPr marL="109728" marR="109728" marT="36576" marB="36576" anchor="ctr">
+                    <a:lnL w="0" cap="flat" cmpd="sng" algn="ctr">
+                      <a:noFill/>
+                    </a:lnL>
+                    <a:lnR w="0" cap="flat" cmpd="sng" algn="ctr">
+                      <a:noFill/>
+                    </a:lnR>
+                    <a:lnT w="0" cap="flat" cmpd="sng" algn="ctr">
+                      <a:noFill/>
+                    </a:lnT>
+                    <a:lnB w="9525" cap="flat" cmpd="sng" algn="ctr">
+                      <a:solidFill>
+                        <a:srgbClr val="D3D9DE"/>
+                      </a:solidFill>
+                      <a:prstDash val="solid"/>
+                      <a:round/>
+                      <a:headEnd type="none" w="med" len="med"/>
+                      <a:tailEnd type="none" w="med" len="med"/>
+                    </a:lnB>
+                  </a:tcPr>
+                </a:tc>
+                <a:tc>
+                  <a:txBody>
+                    <a:bodyPr/>
+                    <a:lstStyle/>
+                    <a:p>
+                      <a:pPr indent="0" marL="0">
+                        <a:buNone/>
+                      </a:pPr>
+                      <a:r>
+                        <a:rPr lang="en-US" sz="1700" dirty="0">
+                          <a:solidFill>
+                            <a:schemeClr val="tx1"/>
+                          </a:solidFill>
+                        </a:rPr>
+                        <a:t>Vers l'avant, ils tirent</a:t>
+                      </a:r>
+                      <a:endParaRPr lang="en-US" sz="1700" dirty="0"/>
+                    </a:p>
+                  </a:txBody>
+                  <a:tcPr marL="109728" marR="109728" marT="36576" marB="36576" anchor="ctr">
+                    <a:lnL w="0" cap="flat" cmpd="sng" algn="ctr">
+                      <a:noFill/>
+                    </a:lnL>
+                    <a:lnR w="0" cap="flat" cmpd="sng" algn="ctr">
+                      <a:noFill/>
+                    </a:lnR>
+                    <a:lnT w="0" cap="flat" cmpd="sng" algn="ctr">
+                      <a:noFill/>
+                    </a:lnT>
+                    <a:lnB w="9525" cap="flat" cmpd="sng" algn="ctr">
+                      <a:solidFill>
+                        <a:srgbClr val="D3D9DE"/>
+                      </a:solidFill>
+                      <a:prstDash val="solid"/>
+                      <a:round/>
+                      <a:headEnd type="none" w="med" len="med"/>
+                      <a:tailEnd type="none" w="med" len="med"/>
+                    </a:lnB>
+                  </a:tcPr>
+                </a:tc>
+                <a:tc>
+                  <a:txBody>
+                    <a:bodyPr/>
+                    <a:lstStyle/>
+                    <a:p>
+                      <a:pPr indent="0" marL="0">
+                        <a:buNone/>
+                      </a:pPr>
+                      <a:r>
+                        <a:rPr lang="en-US" sz="1700" dirty="0">
+                          <a:solidFill>
+                            <a:schemeClr val="tx1"/>
+                          </a:solidFill>
+                        </a:rPr>
+                        <a:t>Arrêté</a:t>
+                      </a:r>
+                      <a:endParaRPr lang="en-US" sz="1700" dirty="0"/>
+                    </a:p>
+                  </a:txBody>
+                  <a:tcPr marL="109728" marR="109728" marT="36576" marB="36576" anchor="ctr">
+                    <a:lnL w="0" cap="flat" cmpd="sng" algn="ctr">
+                      <a:noFill/>
+                    </a:lnL>
+                    <a:lnR w="0" cap="flat" cmpd="sng" algn="ctr">
+                      <a:noFill/>
+                    </a:lnR>
+                    <a:lnT w="0" cap="flat" cmpd="sng" algn="ctr">
+                      <a:noFill/>
+                    </a:lnT>
+                    <a:lnB w="9525" cap="flat" cmpd="sng" algn="ctr">
+                      <a:solidFill>
+                        <a:srgbClr val="D3D9DE"/>
+                      </a:solidFill>
+                      <a:prstDash val="solid"/>
+                      <a:round/>
+                      <a:headEnd type="none" w="med" len="med"/>
+                      <a:tailEnd type="none" w="med" len="med"/>
+                    </a:lnB>
+                  </a:tcPr>
+                </a:tc>
+                <a:tc>
+                  <a:txBody>
+                    <a:bodyPr/>
+                    <a:lstStyle/>
+                    <a:p>
+                      <a:pPr indent="0" marL="0">
+                        <a:buNone/>
+                      </a:pPr>
+                      <a:r>
+                        <a:rPr lang="en-US" sz="1700" dirty="0">
+                          <a:solidFill>
+                            <a:schemeClr val="tx1"/>
+                          </a:solidFill>
+                        </a:rPr>
+                        <a:t>L'aile</a:t>
+                      </a:r>
+                      <a:endParaRPr lang="en-US" sz="1700" dirty="0"/>
+                    </a:p>
+                  </a:txBody>
+                  <a:tcPr marL="109728" marR="109728" marT="36576" marB="36576" anchor="ctr">
+                    <a:lnL w="0" cap="flat" cmpd="sng" algn="ctr">
+                      <a:noFill/>
+                    </a:lnL>
+                    <a:lnR w="0" cap="flat" cmpd="sng" algn="ctr">
+                      <a:noFill/>
+                    </a:lnR>
+                    <a:lnT w="0" cap="flat" cmpd="sng" algn="ctr">
+                      <a:noFill/>
+                    </a:lnT>
+                    <a:lnB w="9525" cap="flat" cmpd="sng" algn="ctr">
+                      <a:solidFill>
+                        <a:srgbClr val="D3D9DE"/>
+                      </a:solidFill>
+                      <a:prstDash val="solid"/>
+                      <a:round/>
+                      <a:headEnd type="none" w="med" len="med"/>
+                      <a:tailEnd type="none" w="med" len="med"/>
+                    </a:lnB>
+                  </a:tcPr>
+                </a:tc>
+              </a:tr>
+              <a:tr h="640080">
+                <a:tc>
+                  <a:txBody>
+                    <a:bodyPr/>
+                    <a:lstStyle/>
+                    <a:p>
+                      <a:pPr indent="0" marL="0">
+                        <a:buNone/>
+                      </a:pPr>
+                      <a:r>
+                        <a:rPr lang="en-US" sz="1700" b="1" dirty="0">
+                          <a:solidFill>
+                            <a:schemeClr val="tx1"/>
+                          </a:solidFill>
+                        </a:rPr>
+                        <a:t>Atterrissage</a:t>
+                      </a:r>
+                      <a:endParaRPr lang="en-US" sz="1700" dirty="0"/>
+                    </a:p>
+                  </a:txBody>
+                  <a:tcPr marL="109728" marR="109728" marT="36576" marB="36576" anchor="ctr">
+                    <a:lnL w="0" cap="flat" cmpd="sng" algn="ctr">
+                      <a:noFill/>
+                    </a:lnL>
+                    <a:lnR w="0" cap="flat" cmpd="sng" algn="ctr">
+                      <a:noFill/>
+                    </a:lnR>
+                    <a:lnT w="0" cap="flat" cmpd="sng" algn="ctr">
+                      <a:noFill/>
+                    </a:lnT>
+                    <a:lnB w="9525" cap="flat" cmpd="sng" algn="ctr">
+                      <a:solidFill>
+                        <a:srgbClr val="D3D9DE"/>
+                      </a:solidFill>
+                      <a:prstDash val="solid"/>
+                      <a:round/>
+                      <a:headEnd type="none" w="med" len="med"/>
+                      <a:tailEnd type="none" w="med" len="med"/>
+                    </a:lnB>
+                  </a:tcPr>
+                </a:tc>
+                <a:tc>
+                  <a:txBody>
+                    <a:bodyPr/>
+                    <a:lstStyle/>
+                    <a:p>
+                      <a:pPr indent="0" marL="0">
+                        <a:buNone/>
+                      </a:pPr>
+                      <a:r>
+                        <a:rPr lang="en-US" sz="1700" dirty="0">
+                          <a:solidFill>
+                            <a:schemeClr val="tx1"/>
+                          </a:solidFill>
+                        </a:rPr>
+                        <a:t>Reviennent vers le haut</a:t>
+                      </a:r>
+                      <a:endParaRPr lang="en-US" sz="1700" dirty="0"/>
+                    </a:p>
+                  </a:txBody>
+                  <a:tcPr marL="109728" marR="109728" marT="36576" marB="36576" anchor="ctr">
+                    <a:lnL w="0" cap="flat" cmpd="sng" algn="ctr">
+                      <a:noFill/>
+                    </a:lnL>
+                    <a:lnR w="0" cap="flat" cmpd="sng" algn="ctr">
+                      <a:noFill/>
+                    </a:lnR>
+                    <a:lnT w="0" cap="flat" cmpd="sng" algn="ctr">
+                      <a:noFill/>
+                    </a:lnT>
+                    <a:lnB w="9525" cap="flat" cmpd="sng" algn="ctr">
+                      <a:solidFill>
+                        <a:srgbClr val="D3D9DE"/>
+                      </a:solidFill>
+                      <a:prstDash val="solid"/>
+                      <a:round/>
+                      <a:headEnd type="none" w="med" len="med"/>
+                      <a:tailEnd type="none" w="med" len="med"/>
+                    </a:lnB>
+                  </a:tcPr>
+                </a:tc>
+                <a:tc>
+                  <a:txBody>
+                    <a:bodyPr/>
+                    <a:lstStyle/>
+                    <a:p>
+                      <a:pPr indent="0" marL="0">
+                        <a:buNone/>
+                      </a:pPr>
+                      <a:r>
+                        <a:rPr lang="en-US" sz="1700" dirty="0">
+                          <a:solidFill>
+                            <a:schemeClr val="tx1"/>
+                          </a:solidFill>
+                        </a:rPr>
+                        <a:t>En marche</a:t>
+                      </a:r>
+                      <a:endParaRPr lang="en-US" sz="1700" dirty="0"/>
+                    </a:p>
+                  </a:txBody>
+                  <a:tcPr marL="109728" marR="109728" marT="36576" marB="36576" anchor="ctr">
+                    <a:lnL w="0" cap="flat" cmpd="sng" algn="ctr">
+                      <a:noFill/>
+                    </a:lnL>
+                    <a:lnR w="0" cap="flat" cmpd="sng" algn="ctr">
+                      <a:noFill/>
+                    </a:lnR>
+                    <a:lnT w="0" cap="flat" cmpd="sng" algn="ctr">
+                      <a:noFill/>
+                    </a:lnT>
+                    <a:lnB w="9525" cap="flat" cmpd="sng" algn="ctr">
+                      <a:solidFill>
+                        <a:srgbClr val="D3D9DE"/>
+                      </a:solidFill>
+                      <a:prstDash val="solid"/>
+                      <a:round/>
+                      <a:headEnd type="none" w="med" len="med"/>
+                      <a:tailEnd type="none" w="med" len="med"/>
+                    </a:lnB>
+                  </a:tcPr>
+                </a:tc>
+                <a:tc>
+                  <a:txBody>
+                    <a:bodyPr/>
+                    <a:lstStyle/>
+                    <a:p>
+                      <a:pPr indent="0" marL="0">
+                        <a:buNone/>
+                      </a:pPr>
+                      <a:r>
+                        <a:rPr lang="en-US" sz="1700" dirty="0">
                           <a:solidFill>
                             <a:schemeClr val="tx1"/>
                           </a:solidFill>
                         </a:rPr>
                         <a:t>Les trois moteurs</a:t>
                       </a:r>
-                      <a:endParaRPr lang="en-US" sz="1600" dirty="0"/>
+                      <a:endParaRPr lang="en-US" sz="1700" dirty="0"/>
                     </a:p>
                   </a:txBody>
                   <a:tcPr marL="109728" marR="109728" marT="36576" marB="36576" anchor="ctr">
@@ -19221,62 +20867,16 @@
           </a:graphicData>
         </a:graphic>
       </p:graphicFrame>
-      <p:pic>
-        <p:nvPicPr>
-          <p:cNvPr id="5" name="Image 0" descr="Vue de face : moteurs avant en position verticale (SolidWorks)">    </p:cNvPr>
-          <p:cNvPicPr>
-            <a:picLocks noChangeAspect="1"/>
-          </p:cNvPicPr>
-          <p:nvPr/>
-        </p:nvPicPr>
-        <p:blipFill>
-          <a:blip r:embed="rId1"/>
-          <a:stretch>
-            <a:fillRect/>
-          </a:stretch>
-        </p:blipFill>
-        <p:spPr>
-          <a:xfrm>
-            <a:off x="2143952" y="4206240"/>
-            <a:ext cx="7903792" cy="1600200"/>
-          </a:xfrm>
-          <a:prstGeom prst="rect">
-            <a:avLst/>
-          </a:prstGeom>
-        </p:spPr>
-      </p:pic>
-      <p:sp>
-        <p:nvSpPr>
-          <p:cNvPr id="6" name="Cadre cao_face"/>
-          <p:cNvSpPr/>
-          <p:nvPr/>
-        </p:nvSpPr>
-        <p:spPr>
-          <a:xfrm>
-            <a:off x="2143952" y="4206240"/>
-            <a:ext cx="7903792" cy="1600200"/>
-          </a:xfrm>
-          <a:prstGeom prst="rect">
-            <a:avLst/>
-          </a:prstGeom>
-          <a:ln w="9525">
-            <a:solidFill>
-              <a:schemeClr val="accent5"/>
-            </a:solidFill>
-            <a:prstDash val="solid"/>
-          </a:ln>
-        </p:spPr>
-      </p:sp>
-      <p:sp>
-        <p:nvSpPr>
-          <p:cNvPr id="7" name="Text 3"/>
+      <p:sp>
+        <p:nvSpPr>
+          <p:cNvPr id="5" name="Text 2"/>
           <p:cNvSpPr txBox="1"/>
           <p:nvPr/>
         </p:nvSpPr>
         <p:spPr>
           <a:xfrm>
-            <a:off x="2143952" y="5861304"/>
-            <a:ext cx="7903792" cy="256032"/>
+            <a:off x="594360" y="4983480"/>
+            <a:ext cx="11002975" cy="411480"/>
           </a:xfrm>
           <a:prstGeom prst="rect">
             <a:avLst/>
@@ -19292,14 +20892,14 @@
               <a:buNone/>
             </a:pPr>
             <a:r>
-              <a:rPr lang="en-US" sz="1100" i="1" dirty="0">
+              <a:rPr lang="en-US" sz="1600" dirty="0">
                 <a:solidFill>
                   <a:schemeClr val="tx2"/>
                 </a:solidFill>
               </a:rPr>
-              <a:t>Vue de face : moteurs avant en position verticale (SolidWorks)</a:t>
-            </a:r>
-            <a:endParaRPr lang="en-US" sz="1100" dirty="0"/>
+              <a:t>La transition est gérée automatiquement par ArduPilot, à partir de la vitesse air mesurée par le tube de Pitot.</a:t>
+            </a:r>
+            <a:endParaRPr lang="en-US" sz="1600" dirty="0"/>
           </a:p>
         </p:txBody>
       </p:sp>
@@ -19657,7 +21257,7 @@
       </p:sp>
       <p:pic>
         <p:nvPicPr>
-          <p:cNvPr id="5" name="Image 0" descr="Mât GNSS sur le dos du fuselage">    </p:cNvPr>
+          <p:cNvPr id="5" name="Image 0" descr="Module GNSS avec compas intégré">    </p:cNvPr>
           <p:cNvPicPr>
             <a:picLocks noChangeAspect="1"/>
           </p:cNvPicPr>
@@ -19671,8 +21271,8 @@
         </p:blipFill>
         <p:spPr>
           <a:xfrm>
-            <a:off x="7460916" y="1417320"/>
-            <a:ext cx="2801983" cy="1783080"/>
+            <a:off x="6790653" y="1417320"/>
+            <a:ext cx="4142509" cy="1783080"/>
           </a:xfrm>
           <a:prstGeom prst="rect">
             <a:avLst/>
@@ -19681,14 +21281,14 @@
       </p:pic>
       <p:sp>
         <p:nvSpPr>
-          <p:cNvPr id="6" name="Cadre z_mat_gnss"/>
+          <p:cNvPr id="6" name="Cadre gnss"/>
           <p:cNvSpPr/>
           <p:nvPr/>
         </p:nvSpPr>
         <p:spPr>
           <a:xfrm>
-            <a:off x="7460916" y="1417320"/>
-            <a:ext cx="2801983" cy="1783080"/>
+            <a:off x="6790653" y="1417320"/>
+            <a:ext cx="4142509" cy="1783080"/>
           </a:xfrm>
           <a:prstGeom prst="rect">
             <a:avLst/>
@@ -19709,8 +21309,8 @@
         </p:nvSpPr>
         <p:spPr>
           <a:xfrm>
-            <a:off x="7460916" y="3255264"/>
-            <a:ext cx="2801983" cy="256032"/>
+            <a:off x="6790653" y="3255264"/>
+            <a:ext cx="4142509" cy="256032"/>
           </a:xfrm>
           <a:prstGeom prst="rect">
             <a:avLst/>
@@ -19731,7 +21331,7 @@
                   <a:schemeClr val="tx2"/>
                 </a:solidFill>
               </a:rPr>
-              <a:t>Mât GNSS sur le dos du fuselage</a:t>
+              <a:t>Module GNSS avec compas intégré</a:t>
             </a:r>
             <a:endParaRPr lang="en-US" sz="1100" dirty="0"/>
           </a:p>
@@ -19739,7 +21339,7 @@
       </p:sp>
       <p:pic>
         <p:nvPicPr>
-          <p:cNvPr id="8" name="Image 1" descr="Tube de Pitot dans le nez">    </p:cNvPr>
+          <p:cNvPr id="8" name="Image 1" descr="Tube de Pitot (prises de pression)">    </p:cNvPr>
           <p:cNvPicPr>
             <a:picLocks noChangeAspect="1"/>
           </p:cNvPicPr>
@@ -19753,8 +21353,8 @@
         </p:blipFill>
         <p:spPr>
           <a:xfrm>
-            <a:off x="7550819" y="3886200"/>
-            <a:ext cx="2622176" cy="1783080"/>
+            <a:off x="7163736" y="3886200"/>
+            <a:ext cx="3396343" cy="1783080"/>
           </a:xfrm>
           <a:prstGeom prst="rect">
             <a:avLst/>
@@ -19763,14 +21363,14 @@
       </p:pic>
       <p:sp>
         <p:nvSpPr>
-          <p:cNvPr id="9" name="Cadre z_nacelle"/>
+          <p:cNvPr id="9" name="Cadre pitot"/>
           <p:cNvSpPr/>
           <p:nvPr/>
         </p:nvSpPr>
         <p:spPr>
           <a:xfrm>
-            <a:off x="7550819" y="3886200"/>
-            <a:ext cx="2622176" cy="1783080"/>
+            <a:off x="7163736" y="3886200"/>
+            <a:ext cx="3396343" cy="1783080"/>
           </a:xfrm>
           <a:prstGeom prst="rect">
             <a:avLst/>
@@ -19791,8 +21391,8 @@
         </p:nvSpPr>
         <p:spPr>
           <a:xfrm>
-            <a:off x="7550819" y="5724144"/>
-            <a:ext cx="2622176" cy="256032"/>
+            <a:off x="7163736" y="5724144"/>
+            <a:ext cx="3396343" cy="256032"/>
           </a:xfrm>
           <a:prstGeom prst="rect">
             <a:avLst/>
@@ -19813,9 +21413,45 @@
                   <a:schemeClr val="tx2"/>
                 </a:solidFill>
               </a:rPr>
-              <a:t>Tube de Pitot dans le nez</a:t>
+              <a:t>Tube de Pitot (prises de pression)</a:t>
             </a:r>
             <a:endParaRPr lang="en-US" sz="1100" dirty="0"/>
+          </a:p>
+        </p:txBody>
+      </p:sp>
+      <p:sp>
+        <p:nvSpPr>
+          <p:cNvPr id="11" name="Text 7"/>
+          <p:cNvSpPr txBox="1"/>
+          <p:nvPr/>
+        </p:nvSpPr>
+        <p:spPr>
+          <a:xfrm>
+            <a:off x="594360" y="6053328"/>
+            <a:ext cx="11002975" cy="201168"/>
+          </a:xfrm>
+          <a:prstGeom prst="rect">
+            <a:avLst/>
+          </a:prstGeom>
+          <a:noFill/>
+          <a:ln/>
+        </p:spPr>
+        <p:txBody>
+          <a:bodyPr wrap="square" lIns="0" tIns="0" rIns="0" bIns="0" rtlCol="0" anchor="ctr"/>
+          <a:lstStyle/>
+          <a:p>
+            <a:pPr indent="0" marL="0">
+              <a:buNone/>
+            </a:pPr>
+            <a:r>
+              <a:rPr lang="en-US" sz="900" i="1" dirty="0">
+                <a:solidFill>
+                  <a:schemeClr val="tx2"/>
+                </a:solidFill>
+              </a:rPr>
+              <a:t>Photos de composants (exemples) : wiki ArduPilot, CC BY-SA 3.0 ; Raspberry Pi Ltd, CC BY-SA 4.0.</a:t>
+            </a:r>
+            <a:endParaRPr lang="en-US" sz="900" dirty="0"/>
           </a:p>
         </p:txBody>
       </p:sp>
